--- a/10092026/Apresentação principal.pptx
+++ b/10092026/Apresentação principal.pptx
@@ -5,16 +5,19 @@
     <p:sldMasterId id="2147483648" r:id="rId1"/>
   </p:sldMasterIdLst>
   <p:notesMasterIdLst>
-    <p:notesMasterId r:id="rId9"/>
+    <p:notesMasterId r:id="rId12"/>
   </p:notesMasterIdLst>
   <p:sldIdLst>
     <p:sldId id="256" r:id="rId2"/>
     <p:sldId id="276" r:id="rId3"/>
-    <p:sldId id="277" r:id="rId4"/>
-    <p:sldId id="279" r:id="rId5"/>
-    <p:sldId id="280" r:id="rId6"/>
-    <p:sldId id="281" r:id="rId7"/>
-    <p:sldId id="265" r:id="rId8"/>
+    <p:sldId id="283" r:id="rId4"/>
+    <p:sldId id="284" r:id="rId5"/>
+    <p:sldId id="282" r:id="rId6"/>
+    <p:sldId id="277" r:id="rId7"/>
+    <p:sldId id="279" r:id="rId8"/>
+    <p:sldId id="280" r:id="rId9"/>
+    <p:sldId id="281" r:id="rId10"/>
+    <p:sldId id="265" r:id="rId11"/>
   </p:sldIdLst>
   <p:sldSz cx="12192000" cy="6858000"/>
   <p:notesSz cx="6858000" cy="9144000"/>
@@ -2483,1487 +2486,7 @@
 </p:sld>
 </file>
 
-<file path=ppt/slides/slide2.xml><?xml version="1.0" encoding="utf-8"?>
-<p:sld xmlns:a="http://schemas.openxmlformats.org/drawingml/2006/main" xmlns:r="http://schemas.openxmlformats.org/officeDocument/2006/relationships" xmlns:p="http://schemas.openxmlformats.org/presentationml/2006/main">
-  <p:cSld>
-    <p:spTree>
-      <p:nvGrpSpPr>
-        <p:cNvPr id="1" name=""/>
-        <p:cNvGrpSpPr/>
-        <p:nvPr/>
-      </p:nvGrpSpPr>
-      <p:grpSpPr>
-        <a:xfrm>
-          <a:off x="0" y="0"/>
-          <a:ext cx="0" cy="0"/>
-          <a:chOff x="0" y="0"/>
-          <a:chExt cx="0" cy="0"/>
-        </a:xfrm>
-      </p:grpSpPr>
-      <p:sp>
-        <p:nvSpPr>
-          <p:cNvPr id="7" name="CaixaDeTexto 6">
-            <a:extLst>
-              <a:ext uri="{FF2B5EF4-FFF2-40B4-BE49-F238E27FC236}">
-                <a16:creationId xmlns:a16="http://schemas.microsoft.com/office/drawing/2014/main" id="{88FD6603-769F-4699-8E38-B5C49C39EC14}"/>
-              </a:ext>
-            </a:extLst>
-          </p:cNvPr>
-          <p:cNvSpPr txBox="1"/>
-          <p:nvPr/>
-        </p:nvSpPr>
-        <p:spPr>
-          <a:xfrm>
-            <a:off x="5374257" y="1483743"/>
-            <a:ext cx="184731" cy="369332"/>
-          </a:xfrm>
-          <a:prstGeom prst="rect">
-            <a:avLst/>
-          </a:prstGeom>
-          <a:noFill/>
-        </p:spPr>
-        <p:txBody>
-          <a:bodyPr wrap="none" rtlCol="0">
-            <a:spAutoFit/>
-          </a:bodyPr>
-          <a:lstStyle/>
-          <a:p>
-            <a:endParaRPr lang="pt-BR" dirty="0"/>
-          </a:p>
-        </p:txBody>
-      </p:sp>
-      <p:sp>
-        <p:nvSpPr>
-          <p:cNvPr id="5" name="CaixaDeTexto 4">
-            <a:extLst>
-              <a:ext uri="{FF2B5EF4-FFF2-40B4-BE49-F238E27FC236}">
-                <a16:creationId xmlns:a16="http://schemas.microsoft.com/office/drawing/2014/main" id="{085F1300-331F-4646-8EFF-78012CADE0C6}"/>
-              </a:ext>
-            </a:extLst>
-          </p:cNvPr>
-          <p:cNvSpPr txBox="1"/>
-          <p:nvPr/>
-        </p:nvSpPr>
-        <p:spPr>
-          <a:xfrm>
-            <a:off x="-8626" y="553893"/>
-            <a:ext cx="11864196" cy="3416320"/>
-          </a:xfrm>
-          <a:prstGeom prst="rect">
-            <a:avLst/>
-          </a:prstGeom>
-          <a:noFill/>
-        </p:spPr>
-        <p:txBody>
-          <a:bodyPr wrap="square">
-            <a:spAutoFit/>
-          </a:bodyPr>
-          <a:lstStyle/>
-          <a:p>
-            <a:r>
-              <a:rPr lang="pt-BR" sz="2400" b="1" dirty="0">
-                <a:latin typeface="Times New Roman" panose="02020603050405020304" pitchFamily="18" charset="0"/>
-                <a:cs typeface="Times New Roman" panose="02020603050405020304" pitchFamily="18" charset="0"/>
-              </a:rPr>
-              <a:t>🌐 TIPOS DE APIS </a:t>
-            </a:r>
-          </a:p>
-          <a:p>
-            <a:endParaRPr lang="pt-BR" sz="2400" b="1" dirty="0">
-              <a:latin typeface="Times New Roman" panose="02020603050405020304" pitchFamily="18" charset="0"/>
-              <a:cs typeface="Times New Roman" panose="02020603050405020304" pitchFamily="18" charset="0"/>
-            </a:endParaRPr>
-          </a:p>
-          <a:p>
-            <a:r>
-              <a:rPr lang="pt-BR" sz="2400" b="1" dirty="0">
-                <a:latin typeface="Times New Roman" panose="02020603050405020304" pitchFamily="18" charset="0"/>
-                <a:cs typeface="Times New Roman" panose="02020603050405020304" pitchFamily="18" charset="0"/>
-              </a:rPr>
-              <a:t>1. Quanto ao Acesso / Tipo de Negócio</a:t>
-            </a:r>
-            <a:br>
-              <a:rPr lang="pt-BR" sz="2400" b="1" dirty="0">
-                <a:latin typeface="Times New Roman" panose="02020603050405020304" pitchFamily="18" charset="0"/>
-                <a:cs typeface="Times New Roman" panose="02020603050405020304" pitchFamily="18" charset="0"/>
-              </a:rPr>
-            </a:br>
-            <a:r>
-              <a:rPr lang="pt-BR" sz="2400" dirty="0">
-                <a:latin typeface="Times New Roman" panose="02020603050405020304" pitchFamily="18" charset="0"/>
-                <a:cs typeface="Times New Roman" panose="02020603050405020304" pitchFamily="18" charset="0"/>
-              </a:rPr>
-              <a:t>A classificação mais importante para os alunos entenderem onde as APIs são aplicadas:</a:t>
-            </a:r>
-            <a:br>
-              <a:rPr lang="pt-BR" sz="2400" dirty="0">
-                <a:latin typeface="Times New Roman" panose="02020603050405020304" pitchFamily="18" charset="0"/>
-                <a:cs typeface="Times New Roman" panose="02020603050405020304" pitchFamily="18" charset="0"/>
-              </a:rPr>
-            </a:br>
-            <a:endParaRPr lang="pt-BR" sz="2400" dirty="0">
-              <a:latin typeface="Times New Roman" panose="02020603050405020304" pitchFamily="18" charset="0"/>
-              <a:cs typeface="Times New Roman" panose="02020603050405020304" pitchFamily="18" charset="0"/>
-            </a:endParaRPr>
-          </a:p>
-          <a:p>
-            <a:pPr>
-              <a:buFont typeface="Arial" panose="020B0604020202020204" pitchFamily="34" charset="0"/>
-              <a:buChar char="•"/>
-            </a:pPr>
-            <a:r>
-              <a:rPr lang="pt-BR" sz="2400" b="1" dirty="0">
-                <a:latin typeface="Times New Roman" panose="02020603050405020304" pitchFamily="18" charset="0"/>
-                <a:cs typeface="Times New Roman" panose="02020603050405020304" pitchFamily="18" charset="0"/>
-              </a:rPr>
-              <a:t>APIs Públicas (Abertas / Open APIs):</a:t>
-            </a:r>
-            <a:r>
-              <a:rPr lang="pt-BR" sz="2400" dirty="0">
-                <a:latin typeface="Times New Roman" panose="02020603050405020304" pitchFamily="18" charset="0"/>
-                <a:cs typeface="Times New Roman" panose="02020603050405020304" pitchFamily="18" charset="0"/>
-              </a:rPr>
-              <a:t> (</a:t>
-            </a:r>
-            <a:r>
-              <a:rPr lang="pt-BR" sz="2400" dirty="0" err="1">
-                <a:latin typeface="Times New Roman" panose="02020603050405020304" pitchFamily="18" charset="0"/>
-                <a:cs typeface="Times New Roman" panose="02020603050405020304" pitchFamily="18" charset="0"/>
-              </a:rPr>
-              <a:t>ex</a:t>
-            </a:r>
-            <a:r>
-              <a:rPr lang="pt-BR" sz="2400" dirty="0">
-                <a:latin typeface="Times New Roman" panose="02020603050405020304" pitchFamily="18" charset="0"/>
-                <a:cs typeface="Times New Roman" panose="02020603050405020304" pitchFamily="18" charset="0"/>
-              </a:rPr>
-              <a:t>: </a:t>
-            </a:r>
-            <a:r>
-              <a:rPr lang="pt-BR" sz="2400" dirty="0" err="1">
-                <a:latin typeface="Times New Roman" panose="02020603050405020304" pitchFamily="18" charset="0"/>
-                <a:cs typeface="Times New Roman" panose="02020603050405020304" pitchFamily="18" charset="0"/>
-              </a:rPr>
-              <a:t>ViaCEP</a:t>
-            </a:r>
-            <a:r>
-              <a:rPr lang="pt-BR" sz="2400" dirty="0">
-                <a:latin typeface="Times New Roman" panose="02020603050405020304" pitchFamily="18" charset="0"/>
-                <a:cs typeface="Times New Roman" panose="02020603050405020304" pitchFamily="18" charset="0"/>
-              </a:rPr>
-              <a:t>, </a:t>
-            </a:r>
-            <a:r>
-              <a:rPr lang="pt-BR" sz="2400" dirty="0" err="1">
-                <a:latin typeface="Times New Roman" panose="02020603050405020304" pitchFamily="18" charset="0"/>
-                <a:cs typeface="Times New Roman" panose="02020603050405020304" pitchFamily="18" charset="0"/>
-              </a:rPr>
-              <a:t>OpenWeather</a:t>
-            </a:r>
-            <a:r>
-              <a:rPr lang="pt-BR" sz="2400" dirty="0">
-                <a:latin typeface="Times New Roman" panose="02020603050405020304" pitchFamily="18" charset="0"/>
-                <a:cs typeface="Times New Roman" panose="02020603050405020304" pitchFamily="18" charset="0"/>
-              </a:rPr>
-              <a:t>, API do GitHub). </a:t>
-            </a:r>
-          </a:p>
-          <a:p>
-            <a:pPr>
-              <a:buFont typeface="Arial" panose="020B0604020202020204" pitchFamily="34" charset="0"/>
-              <a:buChar char="•"/>
-            </a:pPr>
-            <a:r>
-              <a:rPr lang="pt-BR" sz="2400" b="1" dirty="0">
-                <a:latin typeface="Times New Roman" panose="02020603050405020304" pitchFamily="18" charset="0"/>
-                <a:cs typeface="Times New Roman" panose="02020603050405020304" pitchFamily="18" charset="0"/>
-              </a:rPr>
-              <a:t>APIs Privadas (Internas):</a:t>
-            </a:r>
-            <a:r>
-              <a:rPr lang="pt-BR" sz="2400" dirty="0">
-                <a:latin typeface="Times New Roman" panose="02020603050405020304" pitchFamily="18" charset="0"/>
-                <a:cs typeface="Times New Roman" panose="02020603050405020304" pitchFamily="18" charset="0"/>
-              </a:rPr>
-              <a:t> (</a:t>
-            </a:r>
-            <a:r>
-              <a:rPr lang="pt-BR" sz="2400" dirty="0" err="1">
-                <a:latin typeface="Times New Roman" panose="02020603050405020304" pitchFamily="18" charset="0"/>
-                <a:cs typeface="Times New Roman" panose="02020603050405020304" pitchFamily="18" charset="0"/>
-              </a:rPr>
-              <a:t>ex</a:t>
-            </a:r>
-            <a:r>
-              <a:rPr lang="pt-BR" sz="2400" dirty="0">
-                <a:latin typeface="Times New Roman" panose="02020603050405020304" pitchFamily="18" charset="0"/>
-                <a:cs typeface="Times New Roman" panose="02020603050405020304" pitchFamily="18" charset="0"/>
-              </a:rPr>
-              <a:t>: conectar o sistema de RH com o de folha de pagamento).</a:t>
-            </a:r>
-          </a:p>
-          <a:p>
-            <a:pPr>
-              <a:buFont typeface="Arial" panose="020B0604020202020204" pitchFamily="34" charset="0"/>
-              <a:buChar char="•"/>
-            </a:pPr>
-            <a:r>
-              <a:rPr lang="pt-BR" sz="2400" b="1" dirty="0">
-                <a:latin typeface="Times New Roman" panose="02020603050405020304" pitchFamily="18" charset="0"/>
-                <a:cs typeface="Times New Roman" panose="02020603050405020304" pitchFamily="18" charset="0"/>
-              </a:rPr>
-              <a:t>APIs de Parceiros (</a:t>
-            </a:r>
-            <a:r>
-              <a:rPr lang="pt-BR" sz="2400" b="1" dirty="0" err="1">
-                <a:latin typeface="Times New Roman" panose="02020603050405020304" pitchFamily="18" charset="0"/>
-                <a:cs typeface="Times New Roman" panose="02020603050405020304" pitchFamily="18" charset="0"/>
-              </a:rPr>
-              <a:t>Partner</a:t>
-            </a:r>
-            <a:r>
-              <a:rPr lang="pt-BR" sz="2400" b="1" dirty="0">
-                <a:latin typeface="Times New Roman" panose="02020603050405020304" pitchFamily="18" charset="0"/>
-                <a:cs typeface="Times New Roman" panose="02020603050405020304" pitchFamily="18" charset="0"/>
-              </a:rPr>
-              <a:t> APIs):</a:t>
-            </a:r>
-            <a:r>
-              <a:rPr lang="pt-BR" sz="2400" dirty="0">
-                <a:latin typeface="Times New Roman" panose="02020603050405020304" pitchFamily="18" charset="0"/>
-                <a:cs typeface="Times New Roman" panose="02020603050405020304" pitchFamily="18" charset="0"/>
-              </a:rPr>
-              <a:t> (</a:t>
-            </a:r>
-            <a:r>
-              <a:rPr lang="pt-BR" sz="2400" dirty="0" err="1">
-                <a:latin typeface="Times New Roman" panose="02020603050405020304" pitchFamily="18" charset="0"/>
-                <a:cs typeface="Times New Roman" panose="02020603050405020304" pitchFamily="18" charset="0"/>
-              </a:rPr>
-              <a:t>ex</a:t>
-            </a:r>
-            <a:r>
-              <a:rPr lang="pt-BR" sz="2400" dirty="0">
-                <a:latin typeface="Times New Roman" panose="02020603050405020304" pitchFamily="18" charset="0"/>
-                <a:cs typeface="Times New Roman" panose="02020603050405020304" pitchFamily="18" charset="0"/>
-              </a:rPr>
-              <a:t>: APIs bancárias B2B, gateways de pagamento).</a:t>
-            </a:r>
-          </a:p>
-          <a:p>
-            <a:pPr>
-              <a:buFont typeface="Arial" panose="020B0604020202020204" pitchFamily="34" charset="0"/>
-              <a:buChar char="•"/>
-            </a:pPr>
-            <a:r>
-              <a:rPr lang="pt-BR" sz="2400" b="1" dirty="0">
-                <a:latin typeface="Times New Roman" panose="02020603050405020304" pitchFamily="18" charset="0"/>
-                <a:cs typeface="Times New Roman" panose="02020603050405020304" pitchFamily="18" charset="0"/>
-              </a:rPr>
-              <a:t>APIs Compostas (</a:t>
-            </a:r>
-            <a:r>
-              <a:rPr lang="pt-BR" sz="2400" b="1" dirty="0" err="1">
-                <a:latin typeface="Times New Roman" panose="02020603050405020304" pitchFamily="18" charset="0"/>
-                <a:cs typeface="Times New Roman" panose="02020603050405020304" pitchFamily="18" charset="0"/>
-              </a:rPr>
-              <a:t>Composite</a:t>
-            </a:r>
-            <a:r>
-              <a:rPr lang="pt-BR" sz="2400" b="1" dirty="0">
-                <a:latin typeface="Times New Roman" panose="02020603050405020304" pitchFamily="18" charset="0"/>
-                <a:cs typeface="Times New Roman" panose="02020603050405020304" pitchFamily="18" charset="0"/>
-              </a:rPr>
-              <a:t> APIs):</a:t>
-            </a:r>
-            <a:r>
-              <a:rPr lang="pt-BR" sz="2400" dirty="0">
-                <a:latin typeface="Times New Roman" panose="02020603050405020304" pitchFamily="18" charset="0"/>
-                <a:cs typeface="Times New Roman" panose="02020603050405020304" pitchFamily="18" charset="0"/>
-              </a:rPr>
-              <a:t> Unificam múltiplos </a:t>
-            </a:r>
-            <a:r>
-              <a:rPr lang="pt-BR" sz="2400" dirty="0" err="1">
-                <a:latin typeface="Times New Roman" panose="02020603050405020304" pitchFamily="18" charset="0"/>
-                <a:cs typeface="Times New Roman" panose="02020603050405020304" pitchFamily="18" charset="0"/>
-              </a:rPr>
-              <a:t>endpoints</a:t>
-            </a:r>
-            <a:r>
-              <a:rPr lang="pt-BR" sz="2400" dirty="0">
-                <a:latin typeface="Times New Roman" panose="02020603050405020304" pitchFamily="18" charset="0"/>
-                <a:cs typeface="Times New Roman" panose="02020603050405020304" pitchFamily="18" charset="0"/>
-              </a:rPr>
-              <a:t>.</a:t>
-            </a:r>
-          </a:p>
-        </p:txBody>
-      </p:sp>
-    </p:spTree>
-    <p:extLst>
-      <p:ext uri="{BB962C8B-B14F-4D97-AF65-F5344CB8AC3E}">
-        <p14:creationId xmlns:p14="http://schemas.microsoft.com/office/powerpoint/2010/main" val="4258354645"/>
-      </p:ext>
-    </p:extLst>
-  </p:cSld>
-  <p:clrMapOvr>
-    <a:masterClrMapping/>
-  </p:clrMapOvr>
-</p:sld>
-</file>
-
-<file path=ppt/slides/slide3.xml><?xml version="1.0" encoding="utf-8"?>
-<p:sld xmlns:a="http://schemas.openxmlformats.org/drawingml/2006/main" xmlns:r="http://schemas.openxmlformats.org/officeDocument/2006/relationships" xmlns:p="http://schemas.openxmlformats.org/presentationml/2006/main">
-  <p:cSld>
-    <p:spTree>
-      <p:nvGrpSpPr>
-        <p:cNvPr id="1" name=""/>
-        <p:cNvGrpSpPr/>
-        <p:nvPr/>
-      </p:nvGrpSpPr>
-      <p:grpSpPr>
-        <a:xfrm>
-          <a:off x="0" y="0"/>
-          <a:ext cx="0" cy="0"/>
-          <a:chOff x="0" y="0"/>
-          <a:chExt cx="0" cy="0"/>
-        </a:xfrm>
-      </p:grpSpPr>
-      <p:sp>
-        <p:nvSpPr>
-          <p:cNvPr id="7" name="CaixaDeTexto 6">
-            <a:extLst>
-              <a:ext uri="{FF2B5EF4-FFF2-40B4-BE49-F238E27FC236}">
-                <a16:creationId xmlns:a16="http://schemas.microsoft.com/office/drawing/2014/main" id="{88FD6603-769F-4699-8E38-B5C49C39EC14}"/>
-              </a:ext>
-            </a:extLst>
-          </p:cNvPr>
-          <p:cNvSpPr txBox="1"/>
-          <p:nvPr/>
-        </p:nvSpPr>
-        <p:spPr>
-          <a:xfrm>
-            <a:off x="5374257" y="1483743"/>
-            <a:ext cx="184731" cy="369332"/>
-          </a:xfrm>
-          <a:prstGeom prst="rect">
-            <a:avLst/>
-          </a:prstGeom>
-          <a:noFill/>
-        </p:spPr>
-        <p:txBody>
-          <a:bodyPr wrap="none" rtlCol="0">
-            <a:spAutoFit/>
-          </a:bodyPr>
-          <a:lstStyle/>
-          <a:p>
-            <a:endParaRPr lang="pt-BR" dirty="0"/>
-          </a:p>
-        </p:txBody>
-      </p:sp>
-      <p:sp>
-        <p:nvSpPr>
-          <p:cNvPr id="9" name="CaixaDeTexto 8">
-            <a:extLst>
-              <a:ext uri="{FF2B5EF4-FFF2-40B4-BE49-F238E27FC236}">
-                <a16:creationId xmlns:a16="http://schemas.microsoft.com/office/drawing/2014/main" id="{FD2487EA-CB89-473F-8CF0-BB79D734AAFE}"/>
-              </a:ext>
-            </a:extLst>
-          </p:cNvPr>
-          <p:cNvSpPr txBox="1"/>
-          <p:nvPr/>
-        </p:nvSpPr>
-        <p:spPr>
-          <a:xfrm>
-            <a:off x="0" y="552463"/>
-            <a:ext cx="12301268" cy="4154984"/>
-          </a:xfrm>
-          <a:prstGeom prst="rect">
-            <a:avLst/>
-          </a:prstGeom>
-          <a:noFill/>
-        </p:spPr>
-        <p:txBody>
-          <a:bodyPr wrap="square">
-            <a:spAutoFit/>
-          </a:bodyPr>
-          <a:lstStyle/>
-          <a:p>
-            <a:r>
-              <a:rPr lang="pt-BR" sz="2400" b="1" dirty="0">
-                <a:latin typeface="Times New Roman" panose="02020603050405020304" pitchFamily="18" charset="0"/>
-                <a:cs typeface="Times New Roman" panose="02020603050405020304" pitchFamily="18" charset="0"/>
-              </a:rPr>
-              <a:t>2. Quanto ao Protocolo / Estilo de Arquitetura como a comunicação é estruturada na web:</a:t>
-            </a:r>
-          </a:p>
-          <a:p>
-            <a:endParaRPr lang="pt-BR" sz="2000" dirty="0">
-              <a:latin typeface="Times New Roman" panose="02020603050405020304" pitchFamily="18" charset="0"/>
-              <a:cs typeface="Times New Roman" panose="02020603050405020304" pitchFamily="18" charset="0"/>
-            </a:endParaRPr>
-          </a:p>
-          <a:p>
-            <a:r>
-              <a:rPr lang="pt-BR" sz="2000" b="1" dirty="0">
-                <a:latin typeface="Times New Roman" panose="02020603050405020304" pitchFamily="18" charset="0"/>
-                <a:cs typeface="Times New Roman" panose="02020603050405020304" pitchFamily="18" charset="0"/>
-              </a:rPr>
-              <a:t>REST / </a:t>
-            </a:r>
-            <a:r>
-              <a:rPr lang="pt-BR" sz="2000" b="1" dirty="0" err="1">
-                <a:latin typeface="Times New Roman" panose="02020603050405020304" pitchFamily="18" charset="0"/>
-                <a:cs typeface="Times New Roman" panose="02020603050405020304" pitchFamily="18" charset="0"/>
-              </a:rPr>
-              <a:t>RESTful</a:t>
-            </a:r>
-            <a:r>
-              <a:rPr lang="pt-BR" sz="2000" b="1" dirty="0">
-                <a:latin typeface="Times New Roman" panose="02020603050405020304" pitchFamily="18" charset="0"/>
-                <a:cs typeface="Times New Roman" panose="02020603050405020304" pitchFamily="18" charset="0"/>
-              </a:rPr>
-              <a:t> (</a:t>
-            </a:r>
-            <a:r>
-              <a:rPr lang="pt-BR" sz="2000" b="1" dirty="0" err="1">
-                <a:latin typeface="Times New Roman" panose="02020603050405020304" pitchFamily="18" charset="0"/>
-                <a:cs typeface="Times New Roman" panose="02020603050405020304" pitchFamily="18" charset="0"/>
-              </a:rPr>
-              <a:t>Representational</a:t>
-            </a:r>
-            <a:r>
-              <a:rPr lang="pt-BR" sz="2000" b="1" dirty="0">
-                <a:latin typeface="Times New Roman" panose="02020603050405020304" pitchFamily="18" charset="0"/>
-                <a:cs typeface="Times New Roman" panose="02020603050405020304" pitchFamily="18" charset="0"/>
-              </a:rPr>
-              <a:t> </a:t>
-            </a:r>
-            <a:r>
-              <a:rPr lang="pt-BR" sz="2000" b="1" dirty="0" err="1">
-                <a:latin typeface="Times New Roman" panose="02020603050405020304" pitchFamily="18" charset="0"/>
-                <a:cs typeface="Times New Roman" panose="02020603050405020304" pitchFamily="18" charset="0"/>
-              </a:rPr>
-              <a:t>State</a:t>
-            </a:r>
-            <a:r>
-              <a:rPr lang="pt-BR" sz="2000" b="1" dirty="0">
-                <a:latin typeface="Times New Roman" panose="02020603050405020304" pitchFamily="18" charset="0"/>
-                <a:cs typeface="Times New Roman" panose="02020603050405020304" pitchFamily="18" charset="0"/>
-              </a:rPr>
-              <a:t> </a:t>
-            </a:r>
-            <a:r>
-              <a:rPr lang="pt-BR" sz="2000" b="1" dirty="0" err="1">
-                <a:latin typeface="Times New Roman" panose="02020603050405020304" pitchFamily="18" charset="0"/>
-                <a:cs typeface="Times New Roman" panose="02020603050405020304" pitchFamily="18" charset="0"/>
-              </a:rPr>
-              <a:t>Transfer</a:t>
-            </a:r>
-            <a:r>
-              <a:rPr lang="pt-BR" sz="2000" b="1" dirty="0">
-                <a:latin typeface="Times New Roman" panose="02020603050405020304" pitchFamily="18" charset="0"/>
-                <a:cs typeface="Times New Roman" panose="02020603050405020304" pitchFamily="18" charset="0"/>
-              </a:rPr>
-              <a:t>): </a:t>
-            </a:r>
-            <a:r>
-              <a:rPr lang="pt-BR" sz="2000" dirty="0">
-                <a:latin typeface="Times New Roman" panose="02020603050405020304" pitchFamily="18" charset="0"/>
-                <a:cs typeface="Times New Roman" panose="02020603050405020304" pitchFamily="18" charset="0"/>
-              </a:rPr>
-              <a:t>O padrão da web moderna. Utiliza verbos </a:t>
-            </a:r>
-            <a:r>
-              <a:rPr lang="pt-BR" sz="2000" b="1" dirty="0">
-                <a:latin typeface="Times New Roman" panose="02020603050405020304" pitchFamily="18" charset="0"/>
-                <a:cs typeface="Times New Roman" panose="02020603050405020304" pitchFamily="18" charset="0"/>
-              </a:rPr>
-              <a:t>HTTP (GET, POST, PUT, DELETE)</a:t>
-            </a:r>
-            <a:r>
-              <a:rPr lang="pt-BR" sz="2000" dirty="0">
-                <a:latin typeface="Times New Roman" panose="02020603050405020304" pitchFamily="18" charset="0"/>
-                <a:cs typeface="Times New Roman" panose="02020603050405020304" pitchFamily="18" charset="0"/>
-              </a:rPr>
-              <a:t>, envia dados em formato JSON e possui excelente desempenho</a:t>
-            </a:r>
-            <a:r>
-              <a:rPr lang="pt-BR" sz="2000" b="1" dirty="0">
-                <a:latin typeface="Times New Roman" panose="02020603050405020304" pitchFamily="18" charset="0"/>
-                <a:cs typeface="Times New Roman" panose="02020603050405020304" pitchFamily="18" charset="0"/>
-              </a:rPr>
-              <a:t>. (Foco total da nossa aula).</a:t>
-            </a:r>
-          </a:p>
-          <a:p>
-            <a:endParaRPr lang="pt-BR" sz="2000" dirty="0">
-              <a:latin typeface="Times New Roman" panose="02020603050405020304" pitchFamily="18" charset="0"/>
-              <a:cs typeface="Times New Roman" panose="02020603050405020304" pitchFamily="18" charset="0"/>
-            </a:endParaRPr>
-          </a:p>
-          <a:p>
-            <a:r>
-              <a:rPr lang="pt-BR" sz="2000" b="1" dirty="0">
-                <a:latin typeface="Times New Roman" panose="02020603050405020304" pitchFamily="18" charset="0"/>
-                <a:cs typeface="Times New Roman" panose="02020603050405020304" pitchFamily="18" charset="0"/>
-              </a:rPr>
-              <a:t>SOAP (</a:t>
-            </a:r>
-            <a:r>
-              <a:rPr lang="pt-BR" sz="2000" b="1" dirty="0" err="1">
-                <a:latin typeface="Times New Roman" panose="02020603050405020304" pitchFamily="18" charset="0"/>
-                <a:cs typeface="Times New Roman" panose="02020603050405020304" pitchFamily="18" charset="0"/>
-              </a:rPr>
-              <a:t>Simple</a:t>
-            </a:r>
-            <a:r>
-              <a:rPr lang="pt-BR" sz="2000" b="1" dirty="0">
-                <a:latin typeface="Times New Roman" panose="02020603050405020304" pitchFamily="18" charset="0"/>
-                <a:cs typeface="Times New Roman" panose="02020603050405020304" pitchFamily="18" charset="0"/>
-              </a:rPr>
-              <a:t> </a:t>
-            </a:r>
-            <a:r>
-              <a:rPr lang="pt-BR" sz="2000" b="1" dirty="0" err="1">
-                <a:latin typeface="Times New Roman" panose="02020603050405020304" pitchFamily="18" charset="0"/>
-                <a:cs typeface="Times New Roman" panose="02020603050405020304" pitchFamily="18" charset="0"/>
-              </a:rPr>
-              <a:t>Object</a:t>
-            </a:r>
-            <a:r>
-              <a:rPr lang="pt-BR" sz="2000" b="1" dirty="0">
-                <a:latin typeface="Times New Roman" panose="02020603050405020304" pitchFamily="18" charset="0"/>
-                <a:cs typeface="Times New Roman" panose="02020603050405020304" pitchFamily="18" charset="0"/>
-              </a:rPr>
-              <a:t> Access </a:t>
-            </a:r>
-            <a:r>
-              <a:rPr lang="pt-BR" sz="2000" b="1" dirty="0" err="1">
-                <a:latin typeface="Times New Roman" panose="02020603050405020304" pitchFamily="18" charset="0"/>
-                <a:cs typeface="Times New Roman" panose="02020603050405020304" pitchFamily="18" charset="0"/>
-              </a:rPr>
-              <a:t>Protocol</a:t>
-            </a:r>
-            <a:r>
-              <a:rPr lang="pt-BR" sz="2000" b="1" dirty="0">
-                <a:latin typeface="Times New Roman" panose="02020603050405020304" pitchFamily="18" charset="0"/>
-                <a:cs typeface="Times New Roman" panose="02020603050405020304" pitchFamily="18" charset="0"/>
-              </a:rPr>
-              <a:t>): </a:t>
-            </a:r>
-            <a:r>
-              <a:rPr lang="pt-BR" sz="2000" dirty="0">
-                <a:latin typeface="Times New Roman" panose="02020603050405020304" pitchFamily="18" charset="0"/>
-                <a:cs typeface="Times New Roman" panose="02020603050405020304" pitchFamily="18" charset="0"/>
-              </a:rPr>
-              <a:t>Padrão legado/corporativo rígido baseado em mensagens XML, muito utilizado por bancos e sistemas legados de alta segurança.</a:t>
-            </a:r>
-          </a:p>
-          <a:p>
-            <a:endParaRPr lang="pt-BR" sz="2000" dirty="0">
-              <a:latin typeface="Times New Roman" panose="02020603050405020304" pitchFamily="18" charset="0"/>
-              <a:cs typeface="Times New Roman" panose="02020603050405020304" pitchFamily="18" charset="0"/>
-            </a:endParaRPr>
-          </a:p>
-          <a:p>
-            <a:r>
-              <a:rPr lang="pt-BR" sz="2000" b="1" dirty="0" err="1">
-                <a:latin typeface="Times New Roman" panose="02020603050405020304" pitchFamily="18" charset="0"/>
-                <a:cs typeface="Times New Roman" panose="02020603050405020304" pitchFamily="18" charset="0"/>
-              </a:rPr>
-              <a:t>GraphQL</a:t>
-            </a:r>
-            <a:r>
-              <a:rPr lang="pt-BR" sz="2000" b="1" dirty="0">
-                <a:latin typeface="Times New Roman" panose="02020603050405020304" pitchFamily="18" charset="0"/>
-                <a:cs typeface="Times New Roman" panose="02020603050405020304" pitchFamily="18" charset="0"/>
-              </a:rPr>
-              <a:t>:</a:t>
-            </a:r>
-            <a:r>
-              <a:rPr lang="pt-BR" sz="2000" dirty="0">
-                <a:latin typeface="Times New Roman" panose="02020603050405020304" pitchFamily="18" charset="0"/>
-                <a:cs typeface="Times New Roman" panose="02020603050405020304" pitchFamily="18" charset="0"/>
-              </a:rPr>
-              <a:t> Desenvolvido pelo Meta, permite que o cliente solicite exatamente os campos de que precisa em uma única requisição, evitando transferência excessiva de dados (over-</a:t>
-            </a:r>
-            <a:r>
-              <a:rPr lang="pt-BR" sz="2000" dirty="0" err="1">
-                <a:latin typeface="Times New Roman" panose="02020603050405020304" pitchFamily="18" charset="0"/>
-                <a:cs typeface="Times New Roman" panose="02020603050405020304" pitchFamily="18" charset="0"/>
-              </a:rPr>
-              <a:t>fetching</a:t>
-            </a:r>
-            <a:r>
-              <a:rPr lang="pt-BR" sz="2000" dirty="0">
-                <a:latin typeface="Times New Roman" panose="02020603050405020304" pitchFamily="18" charset="0"/>
-                <a:cs typeface="Times New Roman" panose="02020603050405020304" pitchFamily="18" charset="0"/>
-              </a:rPr>
-              <a:t>).</a:t>
-            </a:r>
-          </a:p>
-          <a:p>
-            <a:endParaRPr lang="pt-BR" sz="2000" dirty="0">
-              <a:latin typeface="Times New Roman" panose="02020603050405020304" pitchFamily="18" charset="0"/>
-              <a:cs typeface="Times New Roman" panose="02020603050405020304" pitchFamily="18" charset="0"/>
-            </a:endParaRPr>
-          </a:p>
-          <a:p>
-            <a:r>
-              <a:rPr lang="pt-BR" sz="2000" b="1" dirty="0" err="1">
-                <a:latin typeface="Times New Roman" panose="02020603050405020304" pitchFamily="18" charset="0"/>
-                <a:cs typeface="Times New Roman" panose="02020603050405020304" pitchFamily="18" charset="0"/>
-              </a:rPr>
-              <a:t>WebSockets</a:t>
-            </a:r>
-            <a:r>
-              <a:rPr lang="pt-BR" sz="2000" b="1" dirty="0">
-                <a:latin typeface="Times New Roman" panose="02020603050405020304" pitchFamily="18" charset="0"/>
-                <a:cs typeface="Times New Roman" panose="02020603050405020304" pitchFamily="18" charset="0"/>
-              </a:rPr>
-              <a:t> / </a:t>
-            </a:r>
-            <a:r>
-              <a:rPr lang="pt-BR" sz="2000" b="1" dirty="0" err="1">
-                <a:latin typeface="Times New Roman" panose="02020603050405020304" pitchFamily="18" charset="0"/>
-                <a:cs typeface="Times New Roman" panose="02020603050405020304" pitchFamily="18" charset="0"/>
-              </a:rPr>
-              <a:t>gRPC</a:t>
-            </a:r>
-            <a:r>
-              <a:rPr lang="pt-BR" sz="2000" b="1" dirty="0">
-                <a:latin typeface="Times New Roman" panose="02020603050405020304" pitchFamily="18" charset="0"/>
-                <a:cs typeface="Times New Roman" panose="02020603050405020304" pitchFamily="18" charset="0"/>
-              </a:rPr>
-              <a:t>: </a:t>
-            </a:r>
-            <a:r>
-              <a:rPr lang="pt-BR" sz="2000" dirty="0">
-                <a:latin typeface="Times New Roman" panose="02020603050405020304" pitchFamily="18" charset="0"/>
-                <a:cs typeface="Times New Roman" panose="02020603050405020304" pitchFamily="18" charset="0"/>
-              </a:rPr>
-              <a:t>Utilizados para comunicação bidirecional em tempo real (chats, jogos online, cotações financeiras ao vivo).</a:t>
-            </a:r>
-          </a:p>
-        </p:txBody>
-      </p:sp>
-    </p:spTree>
-    <p:extLst>
-      <p:ext uri="{BB962C8B-B14F-4D97-AF65-F5344CB8AC3E}">
-        <p14:creationId xmlns:p14="http://schemas.microsoft.com/office/powerpoint/2010/main" val="640381052"/>
-      </p:ext>
-    </p:extLst>
-  </p:cSld>
-  <p:clrMapOvr>
-    <a:masterClrMapping/>
-  </p:clrMapOvr>
-</p:sld>
-</file>
-
-<file path=ppt/slides/slide4.xml><?xml version="1.0" encoding="utf-8"?>
-<p:sld xmlns:a="http://schemas.openxmlformats.org/drawingml/2006/main" xmlns:r="http://schemas.openxmlformats.org/officeDocument/2006/relationships" xmlns:p="http://schemas.openxmlformats.org/presentationml/2006/main">
-  <p:cSld>
-    <p:spTree>
-      <p:nvGrpSpPr>
-        <p:cNvPr id="1" name=""/>
-        <p:cNvGrpSpPr/>
-        <p:nvPr/>
-      </p:nvGrpSpPr>
-      <p:grpSpPr>
-        <a:xfrm>
-          <a:off x="0" y="0"/>
-          <a:ext cx="0" cy="0"/>
-          <a:chOff x="0" y="0"/>
-          <a:chExt cx="0" cy="0"/>
-        </a:xfrm>
-      </p:grpSpPr>
-      <p:sp>
-        <p:nvSpPr>
-          <p:cNvPr id="7" name="CaixaDeTexto 6">
-            <a:extLst>
-              <a:ext uri="{FF2B5EF4-FFF2-40B4-BE49-F238E27FC236}">
-                <a16:creationId xmlns:a16="http://schemas.microsoft.com/office/drawing/2014/main" id="{88FD6603-769F-4699-8E38-B5C49C39EC14}"/>
-              </a:ext>
-            </a:extLst>
-          </p:cNvPr>
-          <p:cNvSpPr txBox="1"/>
-          <p:nvPr/>
-        </p:nvSpPr>
-        <p:spPr>
-          <a:xfrm>
-            <a:off x="5374257" y="1483743"/>
-            <a:ext cx="184731" cy="369332"/>
-          </a:xfrm>
-          <a:prstGeom prst="rect">
-            <a:avLst/>
-          </a:prstGeom>
-          <a:noFill/>
-        </p:spPr>
-        <p:txBody>
-          <a:bodyPr wrap="none" rtlCol="0">
-            <a:spAutoFit/>
-          </a:bodyPr>
-          <a:lstStyle/>
-          <a:p>
-            <a:endParaRPr lang="pt-BR" dirty="0"/>
-          </a:p>
-        </p:txBody>
-      </p:sp>
-      <p:sp>
-        <p:nvSpPr>
-          <p:cNvPr id="9" name="CaixaDeTexto 8">
-            <a:extLst>
-              <a:ext uri="{FF2B5EF4-FFF2-40B4-BE49-F238E27FC236}">
-                <a16:creationId xmlns:a16="http://schemas.microsoft.com/office/drawing/2014/main" id="{FD2487EA-CB89-473F-8CF0-BB79D734AAFE}"/>
-              </a:ext>
-            </a:extLst>
-          </p:cNvPr>
-          <p:cNvSpPr txBox="1"/>
-          <p:nvPr/>
-        </p:nvSpPr>
-        <p:spPr>
-          <a:xfrm>
-            <a:off x="0" y="552463"/>
-            <a:ext cx="12301268" cy="4832092"/>
-          </a:xfrm>
-          <a:prstGeom prst="rect">
-            <a:avLst/>
-          </a:prstGeom>
-          <a:noFill/>
-        </p:spPr>
-        <p:txBody>
-          <a:bodyPr wrap="square">
-            <a:spAutoFit/>
-          </a:bodyPr>
-          <a:lstStyle/>
-          <a:p>
-            <a:r>
-              <a:rPr lang="pt-BR" sz="2400" b="1" dirty="0">
-                <a:latin typeface="Times New Roman" panose="02020603050405020304" pitchFamily="18" charset="0"/>
-                <a:cs typeface="Times New Roman" panose="02020603050405020304" pitchFamily="18" charset="0"/>
-              </a:rPr>
-              <a:t>3. O Papel do JSON na Comunicação Web:</a:t>
-            </a:r>
-          </a:p>
-          <a:p>
-            <a:endParaRPr lang="pt-BR" sz="2400" b="1" u="sng" dirty="0">
-              <a:latin typeface="Times New Roman" panose="02020603050405020304" pitchFamily="18" charset="0"/>
-              <a:cs typeface="Times New Roman" panose="02020603050405020304" pitchFamily="18" charset="0"/>
-            </a:endParaRPr>
-          </a:p>
-          <a:p>
-            <a:r>
-              <a:rPr lang="pt-BR" sz="2000" dirty="0">
-                <a:latin typeface="Times New Roman" panose="02020603050405020304" pitchFamily="18" charset="0"/>
-                <a:cs typeface="Times New Roman" panose="02020603050405020304" pitchFamily="18" charset="0"/>
-              </a:rPr>
-              <a:t>O JSON é um formato leve de estruturação de dados baseado em pares de chave: valor. Quando o navegador faz uma requisição HTTP (</a:t>
-            </a:r>
-            <a:r>
-              <a:rPr lang="pt-BR" sz="2000" dirty="0" err="1">
-                <a:latin typeface="Times New Roman" panose="02020603050405020304" pitchFamily="18" charset="0"/>
-                <a:cs typeface="Times New Roman" panose="02020603050405020304" pitchFamily="18" charset="0"/>
-              </a:rPr>
-              <a:t>fetch</a:t>
-            </a:r>
-            <a:r>
-              <a:rPr lang="pt-BR" sz="2000" dirty="0">
-                <a:latin typeface="Times New Roman" panose="02020603050405020304" pitchFamily="18" charset="0"/>
-                <a:cs typeface="Times New Roman" panose="02020603050405020304" pitchFamily="18" charset="0"/>
-              </a:rPr>
-              <a:t>) para uma API, o servidor responde enviando as informações formatadas como JSON.</a:t>
-            </a:r>
-          </a:p>
-          <a:p>
-            <a:endParaRPr lang="pt-BR" sz="2000" dirty="0">
-              <a:latin typeface="Times New Roman" panose="02020603050405020304" pitchFamily="18" charset="0"/>
-              <a:cs typeface="Times New Roman" panose="02020603050405020304" pitchFamily="18" charset="0"/>
-            </a:endParaRPr>
-          </a:p>
-          <a:p>
-            <a:r>
-              <a:rPr lang="pt-BR" sz="2000" dirty="0">
-                <a:latin typeface="Times New Roman" panose="02020603050405020304" pitchFamily="18" charset="0"/>
-                <a:cs typeface="Times New Roman" panose="02020603050405020304" pitchFamily="18" charset="0"/>
-              </a:rPr>
-              <a:t>Exemplo de Resposta de uma API em JSON:</a:t>
-            </a:r>
-          </a:p>
-          <a:p>
-            <a:endParaRPr lang="pt-BR" sz="2000" dirty="0">
-              <a:latin typeface="Times New Roman" panose="02020603050405020304" pitchFamily="18" charset="0"/>
-              <a:cs typeface="Times New Roman" panose="02020603050405020304" pitchFamily="18" charset="0"/>
-            </a:endParaRPr>
-          </a:p>
-          <a:p>
-            <a:r>
-              <a:rPr lang="pt-BR" sz="2000" dirty="0">
-                <a:latin typeface="Times New Roman" panose="02020603050405020304" pitchFamily="18" charset="0"/>
-                <a:cs typeface="Times New Roman" panose="02020603050405020304" pitchFamily="18" charset="0"/>
-              </a:rPr>
-              <a:t>JSON</a:t>
-            </a:r>
-          </a:p>
-          <a:p>
-            <a:r>
-              <a:rPr lang="pt-BR" sz="2000" dirty="0">
-                <a:latin typeface="Times New Roman" panose="02020603050405020304" pitchFamily="18" charset="0"/>
-                <a:cs typeface="Times New Roman" panose="02020603050405020304" pitchFamily="18" charset="0"/>
-              </a:rPr>
-              <a:t>{</a:t>
-            </a:r>
-          </a:p>
-          <a:p>
-            <a:r>
-              <a:rPr lang="pt-BR" sz="2000" dirty="0">
-                <a:latin typeface="Times New Roman" panose="02020603050405020304" pitchFamily="18" charset="0"/>
-                <a:cs typeface="Times New Roman" panose="02020603050405020304" pitchFamily="18" charset="0"/>
-              </a:rPr>
-              <a:t>  "status": 200,</a:t>
-            </a:r>
-          </a:p>
-          <a:p>
-            <a:r>
-              <a:rPr lang="pt-BR" sz="2000" dirty="0">
-                <a:latin typeface="Times New Roman" panose="02020603050405020304" pitchFamily="18" charset="0"/>
-                <a:cs typeface="Times New Roman" panose="02020603050405020304" pitchFamily="18" charset="0"/>
-              </a:rPr>
-              <a:t>  "</a:t>
-            </a:r>
-            <a:r>
-              <a:rPr lang="pt-BR" sz="2000" dirty="0" err="1">
-                <a:latin typeface="Times New Roman" panose="02020603050405020304" pitchFamily="18" charset="0"/>
-                <a:cs typeface="Times New Roman" panose="02020603050405020304" pitchFamily="18" charset="0"/>
-              </a:rPr>
-              <a:t>usuario</a:t>
-            </a:r>
-            <a:r>
-              <a:rPr lang="pt-BR" sz="2000" dirty="0">
-                <a:latin typeface="Times New Roman" panose="02020603050405020304" pitchFamily="18" charset="0"/>
-                <a:cs typeface="Times New Roman" panose="02020603050405020304" pitchFamily="18" charset="0"/>
-              </a:rPr>
-              <a:t>": "Antonio Cruz",</a:t>
-            </a:r>
-          </a:p>
-          <a:p>
-            <a:r>
-              <a:rPr lang="pt-BR" sz="2000" dirty="0">
-                <a:latin typeface="Times New Roman" panose="02020603050405020304" pitchFamily="18" charset="0"/>
-                <a:cs typeface="Times New Roman" panose="02020603050405020304" pitchFamily="18" charset="0"/>
-              </a:rPr>
-              <a:t>  "turma": "1ESSRA",</a:t>
-            </a:r>
-          </a:p>
-          <a:p>
-            <a:r>
-              <a:rPr lang="pt-BR" sz="2000" dirty="0">
-                <a:latin typeface="Times New Roman" panose="02020603050405020304" pitchFamily="18" charset="0"/>
-                <a:cs typeface="Times New Roman" panose="02020603050405020304" pitchFamily="18" charset="0"/>
-              </a:rPr>
-              <a:t>  "ativo": </a:t>
-            </a:r>
-            <a:r>
-              <a:rPr lang="pt-BR" sz="2000" dirty="0" err="1">
-                <a:latin typeface="Times New Roman" panose="02020603050405020304" pitchFamily="18" charset="0"/>
-                <a:cs typeface="Times New Roman" panose="02020603050405020304" pitchFamily="18" charset="0"/>
-              </a:rPr>
-              <a:t>true</a:t>
-            </a:r>
-            <a:r>
-              <a:rPr lang="pt-BR" sz="2000" dirty="0">
-                <a:latin typeface="Times New Roman" panose="02020603050405020304" pitchFamily="18" charset="0"/>
-                <a:cs typeface="Times New Roman" panose="02020603050405020304" pitchFamily="18" charset="0"/>
-              </a:rPr>
-              <a:t>,</a:t>
-            </a:r>
-          </a:p>
-          <a:p>
-            <a:r>
-              <a:rPr lang="pt-BR" sz="2000" dirty="0">
-                <a:latin typeface="Times New Roman" panose="02020603050405020304" pitchFamily="18" charset="0"/>
-                <a:cs typeface="Times New Roman" panose="02020603050405020304" pitchFamily="18" charset="0"/>
-              </a:rPr>
-              <a:t>  "disciplinas": ["Desenvolvimento Web", "Lógica Dinâmica"]</a:t>
-            </a:r>
-          </a:p>
-          <a:p>
-            <a:r>
-              <a:rPr lang="pt-BR" sz="2000" dirty="0">
-                <a:latin typeface="Times New Roman" panose="02020603050405020304" pitchFamily="18" charset="0"/>
-                <a:cs typeface="Times New Roman" panose="02020603050405020304" pitchFamily="18" charset="0"/>
-              </a:rPr>
-              <a:t>}</a:t>
-            </a:r>
-            <a:endParaRPr lang="pt-BR" dirty="0">
-              <a:latin typeface="Times New Roman" panose="02020603050405020304" pitchFamily="18" charset="0"/>
-              <a:cs typeface="Times New Roman" panose="02020603050405020304" pitchFamily="18" charset="0"/>
-            </a:endParaRPr>
-          </a:p>
-        </p:txBody>
-      </p:sp>
-    </p:spTree>
-    <p:extLst>
-      <p:ext uri="{BB962C8B-B14F-4D97-AF65-F5344CB8AC3E}">
-        <p14:creationId xmlns:p14="http://schemas.microsoft.com/office/powerpoint/2010/main" val="3340963908"/>
-      </p:ext>
-    </p:extLst>
-  </p:cSld>
-  <p:clrMapOvr>
-    <a:masterClrMapping/>
-  </p:clrMapOvr>
-</p:sld>
-</file>
-
-<file path=ppt/slides/slide5.xml><?xml version="1.0" encoding="utf-8"?>
-<p:sld xmlns:a="http://schemas.openxmlformats.org/drawingml/2006/main" xmlns:r="http://schemas.openxmlformats.org/officeDocument/2006/relationships" xmlns:p="http://schemas.openxmlformats.org/presentationml/2006/main">
-  <p:cSld>
-    <p:spTree>
-      <p:nvGrpSpPr>
-        <p:cNvPr id="1" name=""/>
-        <p:cNvGrpSpPr/>
-        <p:nvPr/>
-      </p:nvGrpSpPr>
-      <p:grpSpPr>
-        <a:xfrm>
-          <a:off x="0" y="0"/>
-          <a:ext cx="0" cy="0"/>
-          <a:chOff x="0" y="0"/>
-          <a:chExt cx="0" cy="0"/>
-        </a:xfrm>
-      </p:grpSpPr>
-      <p:sp>
-        <p:nvSpPr>
-          <p:cNvPr id="7" name="CaixaDeTexto 6">
-            <a:extLst>
-              <a:ext uri="{FF2B5EF4-FFF2-40B4-BE49-F238E27FC236}">
-                <a16:creationId xmlns:a16="http://schemas.microsoft.com/office/drawing/2014/main" id="{88FD6603-769F-4699-8E38-B5C49C39EC14}"/>
-              </a:ext>
-            </a:extLst>
-          </p:cNvPr>
-          <p:cNvSpPr txBox="1"/>
-          <p:nvPr/>
-        </p:nvSpPr>
-        <p:spPr>
-          <a:xfrm>
-            <a:off x="5374257" y="1483743"/>
-            <a:ext cx="184731" cy="369332"/>
-          </a:xfrm>
-          <a:prstGeom prst="rect">
-            <a:avLst/>
-          </a:prstGeom>
-          <a:noFill/>
-        </p:spPr>
-        <p:txBody>
-          <a:bodyPr wrap="none" rtlCol="0">
-            <a:spAutoFit/>
-          </a:bodyPr>
-          <a:lstStyle/>
-          <a:p>
-            <a:endParaRPr lang="pt-BR" dirty="0"/>
-          </a:p>
-        </p:txBody>
-      </p:sp>
-      <p:sp>
-        <p:nvSpPr>
-          <p:cNvPr id="9" name="CaixaDeTexto 8">
-            <a:extLst>
-              <a:ext uri="{FF2B5EF4-FFF2-40B4-BE49-F238E27FC236}">
-                <a16:creationId xmlns:a16="http://schemas.microsoft.com/office/drawing/2014/main" id="{FD2487EA-CB89-473F-8CF0-BB79D734AAFE}"/>
-              </a:ext>
-            </a:extLst>
-          </p:cNvPr>
-          <p:cNvSpPr txBox="1"/>
-          <p:nvPr/>
-        </p:nvSpPr>
-        <p:spPr>
-          <a:xfrm>
-            <a:off x="0" y="552463"/>
-            <a:ext cx="12301268" cy="2985433"/>
-          </a:xfrm>
-          <a:prstGeom prst="rect">
-            <a:avLst/>
-          </a:prstGeom>
-          <a:noFill/>
-        </p:spPr>
-        <p:txBody>
-          <a:bodyPr wrap="square">
-            <a:spAutoFit/>
-          </a:bodyPr>
-          <a:lstStyle/>
-          <a:p>
-            <a:r>
-              <a:rPr lang="pt-BR" sz="2400" b="1" dirty="0">
-                <a:latin typeface="Times New Roman" panose="02020603050405020304" pitchFamily="18" charset="0"/>
-                <a:cs typeface="Times New Roman" panose="02020603050405020304" pitchFamily="18" charset="0"/>
-              </a:rPr>
-              <a:t>4. Por Que o JSON É o Padrão do Mercado?</a:t>
-            </a:r>
-            <a:br>
-              <a:rPr lang="pt-BR" sz="2400" b="1" dirty="0">
-                <a:latin typeface="Times New Roman" panose="02020603050405020304" pitchFamily="18" charset="0"/>
-                <a:cs typeface="Times New Roman" panose="02020603050405020304" pitchFamily="18" charset="0"/>
-              </a:rPr>
-            </a:br>
-            <a:endParaRPr lang="pt-BR" sz="2400" b="1" dirty="0">
-              <a:latin typeface="Times New Roman" panose="02020603050405020304" pitchFamily="18" charset="0"/>
-              <a:cs typeface="Times New Roman" panose="02020603050405020304" pitchFamily="18" charset="0"/>
-            </a:endParaRPr>
-          </a:p>
-          <a:p>
-            <a:r>
-              <a:rPr lang="pt-BR" sz="2000" dirty="0">
-                <a:latin typeface="Times New Roman" panose="02020603050405020304" pitchFamily="18" charset="0"/>
-                <a:cs typeface="Times New Roman" panose="02020603050405020304" pitchFamily="18" charset="0"/>
-              </a:rPr>
-              <a:t>Independência de Linguagem: Pode ser gerado por um servidor em Python, Java ou C# e lido diretamente por </a:t>
-            </a:r>
-            <a:r>
-              <a:rPr lang="pt-BR" sz="2000" dirty="0" err="1">
-                <a:latin typeface="Times New Roman" panose="02020603050405020304" pitchFamily="18" charset="0"/>
-                <a:cs typeface="Times New Roman" panose="02020603050405020304" pitchFamily="18" charset="0"/>
-              </a:rPr>
-              <a:t>JavaScript</a:t>
-            </a:r>
-            <a:r>
-              <a:rPr lang="pt-BR" sz="2000" dirty="0">
-                <a:latin typeface="Times New Roman" panose="02020603050405020304" pitchFamily="18" charset="0"/>
-                <a:cs typeface="Times New Roman" panose="02020603050405020304" pitchFamily="18" charset="0"/>
-              </a:rPr>
-              <a:t> no navegador.</a:t>
-            </a:r>
-          </a:p>
-          <a:p>
-            <a:endParaRPr lang="pt-BR" sz="2000" dirty="0">
-              <a:latin typeface="Times New Roman" panose="02020603050405020304" pitchFamily="18" charset="0"/>
-              <a:cs typeface="Times New Roman" panose="02020603050405020304" pitchFamily="18" charset="0"/>
-            </a:endParaRPr>
-          </a:p>
-          <a:p>
-            <a:r>
-              <a:rPr lang="pt-BR" sz="2000" dirty="0">
-                <a:latin typeface="Times New Roman" panose="02020603050405020304" pitchFamily="18" charset="0"/>
-                <a:cs typeface="Times New Roman" panose="02020603050405020304" pitchFamily="18" charset="0"/>
-              </a:rPr>
-              <a:t>Leitura Simples: É fácil de ler tanto por humanos quanto por máquinas.</a:t>
-            </a:r>
-          </a:p>
-          <a:p>
-            <a:endParaRPr lang="pt-BR" sz="2000" dirty="0">
-              <a:latin typeface="Times New Roman" panose="02020603050405020304" pitchFamily="18" charset="0"/>
-              <a:cs typeface="Times New Roman" panose="02020603050405020304" pitchFamily="18" charset="0"/>
-            </a:endParaRPr>
-          </a:p>
-          <a:p>
-            <a:r>
-              <a:rPr lang="pt-BR" sz="2000" dirty="0">
-                <a:latin typeface="Times New Roman" panose="02020603050405020304" pitchFamily="18" charset="0"/>
-                <a:cs typeface="Times New Roman" panose="02020603050405020304" pitchFamily="18" charset="0"/>
-              </a:rPr>
-              <a:t>Integração Nativa com </a:t>
-            </a:r>
-            <a:r>
-              <a:rPr lang="pt-BR" sz="2000" dirty="0" err="1">
-                <a:latin typeface="Times New Roman" panose="02020603050405020304" pitchFamily="18" charset="0"/>
-                <a:cs typeface="Times New Roman" panose="02020603050405020304" pitchFamily="18" charset="0"/>
-              </a:rPr>
-              <a:t>JavaScript</a:t>
-            </a:r>
-            <a:r>
-              <a:rPr lang="pt-BR" sz="2000" dirty="0">
-                <a:latin typeface="Times New Roman" panose="02020603050405020304" pitchFamily="18" charset="0"/>
-                <a:cs typeface="Times New Roman" panose="02020603050405020304" pitchFamily="18" charset="0"/>
-              </a:rPr>
-              <a:t>: O navegador converte um texto JSON em um objeto nativo do JS de forma instantânea usando o método </a:t>
-            </a:r>
-            <a:r>
-              <a:rPr lang="pt-BR" sz="2000" dirty="0" err="1">
-                <a:latin typeface="Times New Roman" panose="02020603050405020304" pitchFamily="18" charset="0"/>
-                <a:cs typeface="Times New Roman" panose="02020603050405020304" pitchFamily="18" charset="0"/>
-              </a:rPr>
-              <a:t>JSON.parse</a:t>
-            </a:r>
-            <a:r>
-              <a:rPr lang="pt-BR" sz="2000" dirty="0">
-                <a:latin typeface="Times New Roman" panose="02020603050405020304" pitchFamily="18" charset="0"/>
-                <a:cs typeface="Times New Roman" panose="02020603050405020304" pitchFamily="18" charset="0"/>
-              </a:rPr>
-              <a:t>().</a:t>
-            </a:r>
-            <a:endParaRPr lang="pt-BR" sz="1600" dirty="0">
-              <a:latin typeface="Times New Roman" panose="02020603050405020304" pitchFamily="18" charset="0"/>
-              <a:cs typeface="Times New Roman" panose="02020603050405020304" pitchFamily="18" charset="0"/>
-            </a:endParaRPr>
-          </a:p>
-        </p:txBody>
-      </p:sp>
-    </p:spTree>
-    <p:extLst>
-      <p:ext uri="{BB962C8B-B14F-4D97-AF65-F5344CB8AC3E}">
-        <p14:creationId xmlns:p14="http://schemas.microsoft.com/office/powerpoint/2010/main" val="1975743805"/>
-      </p:ext>
-    </p:extLst>
-  </p:cSld>
-  <p:clrMapOvr>
-    <a:masterClrMapping/>
-  </p:clrMapOvr>
-</p:sld>
-</file>
-
-<file path=ppt/slides/slide6.xml><?xml version="1.0" encoding="utf-8"?>
-<p:sld xmlns:a="http://schemas.openxmlformats.org/drawingml/2006/main" xmlns:r="http://schemas.openxmlformats.org/officeDocument/2006/relationships" xmlns:p="http://schemas.openxmlformats.org/presentationml/2006/main">
-  <p:cSld>
-    <p:spTree>
-      <p:nvGrpSpPr>
-        <p:cNvPr id="1" name=""/>
-        <p:cNvGrpSpPr/>
-        <p:nvPr/>
-      </p:nvGrpSpPr>
-      <p:grpSpPr>
-        <a:xfrm>
-          <a:off x="0" y="0"/>
-          <a:ext cx="0" cy="0"/>
-          <a:chOff x="0" y="0"/>
-          <a:chExt cx="0" cy="0"/>
-        </a:xfrm>
-      </p:grpSpPr>
-      <p:sp>
-        <p:nvSpPr>
-          <p:cNvPr id="7" name="CaixaDeTexto 6">
-            <a:extLst>
-              <a:ext uri="{FF2B5EF4-FFF2-40B4-BE49-F238E27FC236}">
-                <a16:creationId xmlns:a16="http://schemas.microsoft.com/office/drawing/2014/main" id="{88FD6603-769F-4699-8E38-B5C49C39EC14}"/>
-              </a:ext>
-            </a:extLst>
-          </p:cNvPr>
-          <p:cNvSpPr txBox="1"/>
-          <p:nvPr/>
-        </p:nvSpPr>
-        <p:spPr>
-          <a:xfrm>
-            <a:off x="5374257" y="1483743"/>
-            <a:ext cx="184731" cy="369332"/>
-          </a:xfrm>
-          <a:prstGeom prst="rect">
-            <a:avLst/>
-          </a:prstGeom>
-          <a:noFill/>
-        </p:spPr>
-        <p:txBody>
-          <a:bodyPr wrap="none" rtlCol="0">
-            <a:spAutoFit/>
-          </a:bodyPr>
-          <a:lstStyle/>
-          <a:p>
-            <a:endParaRPr lang="pt-BR" dirty="0"/>
-          </a:p>
-        </p:txBody>
-      </p:sp>
-      <p:sp>
-        <p:nvSpPr>
-          <p:cNvPr id="9" name="CaixaDeTexto 8">
-            <a:extLst>
-              <a:ext uri="{FF2B5EF4-FFF2-40B4-BE49-F238E27FC236}">
-                <a16:creationId xmlns:a16="http://schemas.microsoft.com/office/drawing/2014/main" id="{FD2487EA-CB89-473F-8CF0-BB79D734AAFE}"/>
-              </a:ext>
-            </a:extLst>
-          </p:cNvPr>
-          <p:cNvSpPr txBox="1"/>
-          <p:nvPr/>
-        </p:nvSpPr>
-        <p:spPr>
-          <a:xfrm>
-            <a:off x="0" y="552463"/>
-            <a:ext cx="12301268" cy="5139869"/>
-          </a:xfrm>
-          <a:prstGeom prst="rect">
-            <a:avLst/>
-          </a:prstGeom>
-          <a:noFill/>
-        </p:spPr>
-        <p:txBody>
-          <a:bodyPr wrap="square">
-            <a:spAutoFit/>
-          </a:bodyPr>
-          <a:lstStyle/>
-          <a:p>
-            <a:r>
-              <a:rPr lang="pt-BR" sz="2400" b="1" dirty="0">
-                <a:latin typeface="Times New Roman" panose="02020603050405020304" pitchFamily="18" charset="0"/>
-                <a:cs typeface="Times New Roman" panose="02020603050405020304" pitchFamily="18" charset="0"/>
-              </a:rPr>
-              <a:t>5. Sintaxe Prática: Consumindo JSON de uma API no JS</a:t>
-            </a:r>
-            <a:br>
-              <a:rPr lang="pt-BR" sz="2400" b="1" dirty="0">
-                <a:latin typeface="Times New Roman" panose="02020603050405020304" pitchFamily="18" charset="0"/>
-                <a:cs typeface="Times New Roman" panose="02020603050405020304" pitchFamily="18" charset="0"/>
-              </a:rPr>
-            </a:br>
-            <a:endParaRPr lang="pt-BR" sz="2400" b="1" dirty="0">
-              <a:latin typeface="Times New Roman" panose="02020603050405020304" pitchFamily="18" charset="0"/>
-              <a:cs typeface="Times New Roman" panose="02020603050405020304" pitchFamily="18" charset="0"/>
-            </a:endParaRPr>
-          </a:p>
-          <a:p>
-            <a:r>
-              <a:rPr lang="pt-BR" sz="2000" dirty="0">
-                <a:latin typeface="Times New Roman" panose="02020603050405020304" pitchFamily="18" charset="0"/>
-                <a:cs typeface="Times New Roman" panose="02020603050405020304" pitchFamily="18" charset="0"/>
-              </a:rPr>
-              <a:t>No fluxo real do Checkpoint 2, o método </a:t>
-            </a:r>
-            <a:r>
-              <a:rPr lang="pt-BR" sz="2000" dirty="0" err="1">
-                <a:latin typeface="Times New Roman" panose="02020603050405020304" pitchFamily="18" charset="0"/>
-                <a:cs typeface="Times New Roman" panose="02020603050405020304" pitchFamily="18" charset="0"/>
-              </a:rPr>
-              <a:t>fetch</a:t>
-            </a:r>
-            <a:r>
-              <a:rPr lang="pt-BR" sz="2000" dirty="0">
-                <a:latin typeface="Times New Roman" panose="02020603050405020304" pitchFamily="18" charset="0"/>
-                <a:cs typeface="Times New Roman" panose="02020603050405020304" pitchFamily="18" charset="0"/>
-              </a:rPr>
-              <a:t>() busca a resposta da API e o método .</a:t>
-            </a:r>
-            <a:r>
-              <a:rPr lang="pt-BR" sz="2000" dirty="0" err="1">
-                <a:latin typeface="Times New Roman" panose="02020603050405020304" pitchFamily="18" charset="0"/>
-                <a:cs typeface="Times New Roman" panose="02020603050405020304" pitchFamily="18" charset="0"/>
-              </a:rPr>
-              <a:t>json</a:t>
-            </a:r>
-            <a:r>
-              <a:rPr lang="pt-BR" sz="2000" dirty="0">
-                <a:latin typeface="Times New Roman" panose="02020603050405020304" pitchFamily="18" charset="0"/>
-                <a:cs typeface="Times New Roman" panose="02020603050405020304" pitchFamily="18" charset="0"/>
-              </a:rPr>
-              <a:t>() converte essa resposta bruta em um objeto utilizável pelo código:</a:t>
-            </a:r>
-          </a:p>
-          <a:p>
-            <a:endParaRPr lang="pt-BR" sz="2000" dirty="0">
-              <a:latin typeface="Times New Roman" panose="02020603050405020304" pitchFamily="18" charset="0"/>
-              <a:cs typeface="Times New Roman" panose="02020603050405020304" pitchFamily="18" charset="0"/>
-            </a:endParaRPr>
-          </a:p>
-          <a:p>
-            <a:r>
-              <a:rPr lang="pt-BR" sz="2000" dirty="0" err="1">
-                <a:latin typeface="Times New Roman" panose="02020603050405020304" pitchFamily="18" charset="0"/>
-                <a:cs typeface="Times New Roman" panose="02020603050405020304" pitchFamily="18" charset="0"/>
-              </a:rPr>
-              <a:t>JavaScript</a:t>
-            </a:r>
-            <a:endParaRPr lang="pt-BR" sz="2000" dirty="0">
-              <a:latin typeface="Times New Roman" panose="02020603050405020304" pitchFamily="18" charset="0"/>
-              <a:cs typeface="Times New Roman" panose="02020603050405020304" pitchFamily="18" charset="0"/>
-            </a:endParaRPr>
-          </a:p>
-          <a:p>
-            <a:r>
-              <a:rPr lang="pt-BR" sz="2000" dirty="0">
-                <a:latin typeface="Times New Roman" panose="02020603050405020304" pitchFamily="18" charset="0"/>
-                <a:cs typeface="Times New Roman" panose="02020603050405020304" pitchFamily="18" charset="0"/>
-              </a:rPr>
-              <a:t>// Buscando dados de uma API externa</a:t>
-            </a:r>
-          </a:p>
-          <a:p>
-            <a:r>
-              <a:rPr lang="pt-BR" sz="2000" dirty="0" err="1">
-                <a:latin typeface="Times New Roman" panose="02020603050405020304" pitchFamily="18" charset="0"/>
-                <a:cs typeface="Times New Roman" panose="02020603050405020304" pitchFamily="18" charset="0"/>
-              </a:rPr>
-              <a:t>fetch</a:t>
-            </a:r>
-            <a:r>
-              <a:rPr lang="pt-BR" sz="2000" dirty="0">
-                <a:latin typeface="Times New Roman" panose="02020603050405020304" pitchFamily="18" charset="0"/>
-                <a:cs typeface="Times New Roman" panose="02020603050405020304" pitchFamily="18" charset="0"/>
-              </a:rPr>
-              <a:t>("https://viacep.com.br/ws/01001000/</a:t>
-            </a:r>
-            <a:r>
-              <a:rPr lang="pt-BR" sz="2000" dirty="0" err="1">
-                <a:latin typeface="Times New Roman" panose="02020603050405020304" pitchFamily="18" charset="0"/>
-                <a:cs typeface="Times New Roman" panose="02020603050405020304" pitchFamily="18" charset="0"/>
-              </a:rPr>
-              <a:t>json</a:t>
-            </a:r>
-            <a:r>
-              <a:rPr lang="pt-BR" sz="2000" dirty="0">
-                <a:latin typeface="Times New Roman" panose="02020603050405020304" pitchFamily="18" charset="0"/>
-                <a:cs typeface="Times New Roman" panose="02020603050405020304" pitchFamily="18" charset="0"/>
-              </a:rPr>
-              <a:t>/")</a:t>
-            </a:r>
-          </a:p>
-          <a:p>
-            <a:r>
-              <a:rPr lang="pt-BR" sz="2000" dirty="0">
-                <a:latin typeface="Times New Roman" panose="02020603050405020304" pitchFamily="18" charset="0"/>
-                <a:cs typeface="Times New Roman" panose="02020603050405020304" pitchFamily="18" charset="0"/>
-              </a:rPr>
-              <a:t>  .</a:t>
-            </a:r>
-            <a:r>
-              <a:rPr lang="pt-BR" sz="2000" dirty="0" err="1">
-                <a:latin typeface="Times New Roman" panose="02020603050405020304" pitchFamily="18" charset="0"/>
-                <a:cs typeface="Times New Roman" panose="02020603050405020304" pitchFamily="18" charset="0"/>
-              </a:rPr>
-              <a:t>then</a:t>
-            </a:r>
-            <a:r>
-              <a:rPr lang="pt-BR" sz="2000" dirty="0">
-                <a:latin typeface="Times New Roman" panose="02020603050405020304" pitchFamily="18" charset="0"/>
-                <a:cs typeface="Times New Roman" panose="02020603050405020304" pitchFamily="18" charset="0"/>
-              </a:rPr>
-              <a:t>(resposta =&gt; </a:t>
-            </a:r>
-            <a:r>
-              <a:rPr lang="pt-BR" sz="2000" dirty="0" err="1">
-                <a:latin typeface="Times New Roman" panose="02020603050405020304" pitchFamily="18" charset="0"/>
-                <a:cs typeface="Times New Roman" panose="02020603050405020304" pitchFamily="18" charset="0"/>
-              </a:rPr>
-              <a:t>resposta.json</a:t>
-            </a:r>
-            <a:r>
-              <a:rPr lang="pt-BR" sz="2000" dirty="0">
-                <a:latin typeface="Times New Roman" panose="02020603050405020304" pitchFamily="18" charset="0"/>
-                <a:cs typeface="Times New Roman" panose="02020603050405020304" pitchFamily="18" charset="0"/>
-              </a:rPr>
-              <a:t>()) // Converte a resposta HTTP em objeto JSON</a:t>
-            </a:r>
-          </a:p>
-          <a:p>
-            <a:r>
-              <a:rPr lang="pt-BR" sz="2000" dirty="0">
-                <a:latin typeface="Times New Roman" panose="02020603050405020304" pitchFamily="18" charset="0"/>
-                <a:cs typeface="Times New Roman" panose="02020603050405020304" pitchFamily="18" charset="0"/>
-              </a:rPr>
-              <a:t>  .</a:t>
-            </a:r>
-            <a:r>
-              <a:rPr lang="pt-BR" sz="2000" dirty="0" err="1">
-                <a:latin typeface="Times New Roman" panose="02020603050405020304" pitchFamily="18" charset="0"/>
-                <a:cs typeface="Times New Roman" panose="02020603050405020304" pitchFamily="18" charset="0"/>
-              </a:rPr>
-              <a:t>then</a:t>
-            </a:r>
-            <a:r>
-              <a:rPr lang="pt-BR" sz="2000" dirty="0">
-                <a:latin typeface="Times New Roman" panose="02020603050405020304" pitchFamily="18" charset="0"/>
-                <a:cs typeface="Times New Roman" panose="02020603050405020304" pitchFamily="18" charset="0"/>
-              </a:rPr>
-              <a:t>(dados =&gt; {</a:t>
-            </a:r>
-          </a:p>
-          <a:p>
-            <a:r>
-              <a:rPr lang="pt-BR" sz="2000" dirty="0">
-                <a:latin typeface="Times New Roman" panose="02020603050405020304" pitchFamily="18" charset="0"/>
-                <a:cs typeface="Times New Roman" panose="02020603050405020304" pitchFamily="18" charset="0"/>
-              </a:rPr>
-              <a:t>    // Acessando as chaves do JSON retornado</a:t>
-            </a:r>
-          </a:p>
-          <a:p>
-            <a:r>
-              <a:rPr lang="pt-BR" sz="2000" dirty="0">
-                <a:latin typeface="Times New Roman" panose="02020603050405020304" pitchFamily="18" charset="0"/>
-                <a:cs typeface="Times New Roman" panose="02020603050405020304" pitchFamily="18" charset="0"/>
-              </a:rPr>
-              <a:t>    console.log("Logradouro:", </a:t>
-            </a:r>
-            <a:r>
-              <a:rPr lang="pt-BR" sz="2000" dirty="0" err="1">
-                <a:latin typeface="Times New Roman" panose="02020603050405020304" pitchFamily="18" charset="0"/>
-                <a:cs typeface="Times New Roman" panose="02020603050405020304" pitchFamily="18" charset="0"/>
-              </a:rPr>
-              <a:t>dados.logradouro</a:t>
-            </a:r>
-            <a:r>
-              <a:rPr lang="pt-BR" sz="2000" dirty="0">
-                <a:latin typeface="Times New Roman" panose="02020603050405020304" pitchFamily="18" charset="0"/>
-                <a:cs typeface="Times New Roman" panose="02020603050405020304" pitchFamily="18" charset="0"/>
-              </a:rPr>
-              <a:t>);</a:t>
-            </a:r>
-          </a:p>
-          <a:p>
-            <a:r>
-              <a:rPr lang="pt-BR" sz="2000" dirty="0">
-                <a:latin typeface="Times New Roman" panose="02020603050405020304" pitchFamily="18" charset="0"/>
-                <a:cs typeface="Times New Roman" panose="02020603050405020304" pitchFamily="18" charset="0"/>
-              </a:rPr>
-              <a:t>    console.log("Bairro:", </a:t>
-            </a:r>
-            <a:r>
-              <a:rPr lang="pt-BR" sz="2000" dirty="0" err="1">
-                <a:latin typeface="Times New Roman" panose="02020603050405020304" pitchFamily="18" charset="0"/>
-                <a:cs typeface="Times New Roman" panose="02020603050405020304" pitchFamily="18" charset="0"/>
-              </a:rPr>
-              <a:t>dados.bairro</a:t>
-            </a:r>
-            <a:r>
-              <a:rPr lang="pt-BR" sz="2000" dirty="0">
-                <a:latin typeface="Times New Roman" panose="02020603050405020304" pitchFamily="18" charset="0"/>
-                <a:cs typeface="Times New Roman" panose="02020603050405020304" pitchFamily="18" charset="0"/>
-              </a:rPr>
-              <a:t>);</a:t>
-            </a:r>
-          </a:p>
-          <a:p>
-            <a:r>
-              <a:rPr lang="pt-BR" sz="2000" dirty="0">
-                <a:latin typeface="Times New Roman" panose="02020603050405020304" pitchFamily="18" charset="0"/>
-                <a:cs typeface="Times New Roman" panose="02020603050405020304" pitchFamily="18" charset="0"/>
-              </a:rPr>
-              <a:t>  });</a:t>
-            </a:r>
-            <a:br>
-              <a:rPr lang="pt-BR" sz="2000" dirty="0">
-                <a:latin typeface="Times New Roman" panose="02020603050405020304" pitchFamily="18" charset="0"/>
-                <a:cs typeface="Times New Roman" panose="02020603050405020304" pitchFamily="18" charset="0"/>
-              </a:rPr>
-            </a:br>
-            <a:endParaRPr lang="pt-BR" sz="2000" dirty="0">
-              <a:latin typeface="Times New Roman" panose="02020603050405020304" pitchFamily="18" charset="0"/>
-              <a:cs typeface="Times New Roman" panose="02020603050405020304" pitchFamily="18" charset="0"/>
-            </a:endParaRPr>
-          </a:p>
-          <a:p>
-            <a:r>
-              <a:rPr lang="pt-BR" sz="2000" dirty="0">
-                <a:latin typeface="Times New Roman" panose="02020603050405020304" pitchFamily="18" charset="0"/>
-                <a:cs typeface="Times New Roman" panose="02020603050405020304" pitchFamily="18" charset="0"/>
-              </a:rPr>
-              <a:t>Em resumo: A API traz o transporte e a regra de negócio; o JSON é o idioma padrão em que a mensagem é entregue.</a:t>
-            </a:r>
-            <a:endParaRPr lang="pt-BR" sz="1400" dirty="0">
-              <a:latin typeface="Times New Roman" panose="02020603050405020304" pitchFamily="18" charset="0"/>
-              <a:cs typeface="Times New Roman" panose="02020603050405020304" pitchFamily="18" charset="0"/>
-            </a:endParaRPr>
-          </a:p>
-        </p:txBody>
-      </p:sp>
-    </p:spTree>
-    <p:extLst>
-      <p:ext uri="{BB962C8B-B14F-4D97-AF65-F5344CB8AC3E}">
-        <p14:creationId xmlns:p14="http://schemas.microsoft.com/office/powerpoint/2010/main" val="112422609"/>
-      </p:ext>
-    </p:extLst>
-  </p:cSld>
-  <p:clrMapOvr>
-    <a:masterClrMapping/>
-  </p:clrMapOvr>
-</p:sld>
-</file>
-
-<file path=ppt/slides/slide7.xml><?xml version="1.0" encoding="utf-8"?>
+<file path=ppt/slides/slide10.xml><?xml version="1.0" encoding="utf-8"?>
 <p:sld xmlns:a="http://schemas.openxmlformats.org/drawingml/2006/main" xmlns:r="http://schemas.openxmlformats.org/officeDocument/2006/relationships" xmlns:p="http://schemas.openxmlformats.org/presentationml/2006/main">
   <p:cSld>
     <p:spTree>
@@ -4410,6 +2933,4129 @@
     <p:extLst>
       <p:ext uri="{BB962C8B-B14F-4D97-AF65-F5344CB8AC3E}">
         <p14:creationId xmlns:p14="http://schemas.microsoft.com/office/powerpoint/2010/main" val="1333912310"/>
+      </p:ext>
+    </p:extLst>
+  </p:cSld>
+  <p:clrMapOvr>
+    <a:masterClrMapping/>
+  </p:clrMapOvr>
+</p:sld>
+</file>
+
+<file path=ppt/slides/slide2.xml><?xml version="1.0" encoding="utf-8"?>
+<p:sld xmlns:a="http://schemas.openxmlformats.org/drawingml/2006/main" xmlns:r="http://schemas.openxmlformats.org/officeDocument/2006/relationships" xmlns:p="http://schemas.openxmlformats.org/presentationml/2006/main">
+  <p:cSld>
+    <p:spTree>
+      <p:nvGrpSpPr>
+        <p:cNvPr id="1" name=""/>
+        <p:cNvGrpSpPr/>
+        <p:nvPr/>
+      </p:nvGrpSpPr>
+      <p:grpSpPr>
+        <a:xfrm>
+          <a:off x="0" y="0"/>
+          <a:ext cx="0" cy="0"/>
+          <a:chOff x="0" y="0"/>
+          <a:chExt cx="0" cy="0"/>
+        </a:xfrm>
+      </p:grpSpPr>
+      <p:sp>
+        <p:nvSpPr>
+          <p:cNvPr id="7" name="CaixaDeTexto 6">
+            <a:extLst>
+              <a:ext uri="{FF2B5EF4-FFF2-40B4-BE49-F238E27FC236}">
+                <a16:creationId xmlns:a16="http://schemas.microsoft.com/office/drawing/2014/main" id="{88FD6603-769F-4699-8E38-B5C49C39EC14}"/>
+              </a:ext>
+            </a:extLst>
+          </p:cNvPr>
+          <p:cNvSpPr txBox="1"/>
+          <p:nvPr/>
+        </p:nvSpPr>
+        <p:spPr>
+          <a:xfrm>
+            <a:off x="5374257" y="1483743"/>
+            <a:ext cx="184731" cy="369332"/>
+          </a:xfrm>
+          <a:prstGeom prst="rect">
+            <a:avLst/>
+          </a:prstGeom>
+          <a:noFill/>
+        </p:spPr>
+        <p:txBody>
+          <a:bodyPr wrap="none" rtlCol="0">
+            <a:spAutoFit/>
+          </a:bodyPr>
+          <a:lstStyle/>
+          <a:p>
+            <a:endParaRPr lang="pt-BR" dirty="0"/>
+          </a:p>
+        </p:txBody>
+      </p:sp>
+      <p:sp>
+        <p:nvSpPr>
+          <p:cNvPr id="5" name="CaixaDeTexto 4">
+            <a:extLst>
+              <a:ext uri="{FF2B5EF4-FFF2-40B4-BE49-F238E27FC236}">
+                <a16:creationId xmlns:a16="http://schemas.microsoft.com/office/drawing/2014/main" id="{085F1300-331F-4646-8EFF-78012CADE0C6}"/>
+              </a:ext>
+            </a:extLst>
+          </p:cNvPr>
+          <p:cNvSpPr txBox="1"/>
+          <p:nvPr/>
+        </p:nvSpPr>
+        <p:spPr>
+          <a:xfrm>
+            <a:off x="-8626" y="553893"/>
+            <a:ext cx="12200626" cy="5940088"/>
+          </a:xfrm>
+          <a:prstGeom prst="rect">
+            <a:avLst/>
+          </a:prstGeom>
+          <a:noFill/>
+        </p:spPr>
+        <p:txBody>
+          <a:bodyPr wrap="square">
+            <a:spAutoFit/>
+          </a:bodyPr>
+          <a:lstStyle/>
+          <a:p>
+            <a:r>
+              <a:rPr lang="pt-BR" sz="2400" b="1" dirty="0">
+                <a:latin typeface="Times New Roman" panose="02020603050405020304" pitchFamily="18" charset="0"/>
+                <a:cs typeface="Times New Roman" panose="02020603050405020304" pitchFamily="18" charset="0"/>
+              </a:rPr>
+              <a:t>Título: Como as APIs Funcionam por Baixo dos Panos?</a:t>
+            </a:r>
+          </a:p>
+          <a:p>
+            <a:endParaRPr lang="pt-BR" sz="2000" dirty="0">
+              <a:latin typeface="Times New Roman" panose="02020603050405020304" pitchFamily="18" charset="0"/>
+              <a:cs typeface="Times New Roman" panose="02020603050405020304" pitchFamily="18" charset="0"/>
+            </a:endParaRPr>
+          </a:p>
+          <a:p>
+            <a:r>
+              <a:rPr lang="pt-BR" sz="2400" dirty="0">
+                <a:latin typeface="Times New Roman" panose="02020603050405020304" pitchFamily="18" charset="0"/>
+                <a:cs typeface="Times New Roman" panose="02020603050405020304" pitchFamily="18" charset="0"/>
+              </a:rPr>
+              <a:t>Conteúdo do Slide:</a:t>
+            </a:r>
+          </a:p>
+          <a:p>
+            <a:r>
+              <a:rPr lang="pt-BR" sz="2400" dirty="0">
+                <a:latin typeface="Times New Roman" panose="02020603050405020304" pitchFamily="18" charset="0"/>
+                <a:cs typeface="Times New Roman" panose="02020603050405020304" pitchFamily="18" charset="0"/>
+              </a:rPr>
+              <a:t>Todas as APIs REST modernas que consumiremos na aula de hoje (</a:t>
+            </a:r>
+            <a:r>
+              <a:rPr lang="pt-BR" sz="2400" dirty="0" err="1">
+                <a:latin typeface="Times New Roman" panose="02020603050405020304" pitchFamily="18" charset="0"/>
+                <a:cs typeface="Times New Roman" panose="02020603050405020304" pitchFamily="18" charset="0"/>
+              </a:rPr>
+              <a:t>ViaCEP</a:t>
+            </a:r>
+            <a:r>
+              <a:rPr lang="pt-BR" sz="2400" dirty="0">
+                <a:latin typeface="Times New Roman" panose="02020603050405020304" pitchFamily="18" charset="0"/>
+                <a:cs typeface="Times New Roman" panose="02020603050405020304" pitchFamily="18" charset="0"/>
+              </a:rPr>
+              <a:t>, </a:t>
+            </a:r>
+            <a:r>
+              <a:rPr lang="pt-BR" sz="2400" dirty="0" err="1">
+                <a:latin typeface="Times New Roman" panose="02020603050405020304" pitchFamily="18" charset="0"/>
+                <a:cs typeface="Times New Roman" panose="02020603050405020304" pitchFamily="18" charset="0"/>
+              </a:rPr>
+              <a:t>PokeAPI</a:t>
+            </a:r>
+            <a:r>
+              <a:rPr lang="pt-BR" sz="2400" dirty="0">
+                <a:latin typeface="Times New Roman" panose="02020603050405020304" pitchFamily="18" charset="0"/>
+                <a:cs typeface="Times New Roman" panose="02020603050405020304" pitchFamily="18" charset="0"/>
+              </a:rPr>
+              <a:t>, </a:t>
+            </a:r>
+            <a:r>
+              <a:rPr lang="pt-BR" sz="2400" dirty="0" err="1">
+                <a:latin typeface="Times New Roman" panose="02020603050405020304" pitchFamily="18" charset="0"/>
+                <a:cs typeface="Times New Roman" panose="02020603050405020304" pitchFamily="18" charset="0"/>
+              </a:rPr>
+              <a:t>DummyJSON</a:t>
+            </a:r>
+            <a:r>
+              <a:rPr lang="pt-BR" sz="2400" dirty="0">
+                <a:latin typeface="Times New Roman" panose="02020603050405020304" pitchFamily="18" charset="0"/>
+                <a:cs typeface="Times New Roman" panose="02020603050405020304" pitchFamily="18" charset="0"/>
+              </a:rPr>
+              <a:t>, </a:t>
+            </a:r>
+            <a:r>
+              <a:rPr lang="pt-BR" sz="2400" dirty="0" err="1">
+                <a:latin typeface="Times New Roman" panose="02020603050405020304" pitchFamily="18" charset="0"/>
+                <a:cs typeface="Times New Roman" panose="02020603050405020304" pitchFamily="18" charset="0"/>
+              </a:rPr>
+              <a:t>Picsum</a:t>
+            </a:r>
+            <a:r>
+              <a:rPr lang="pt-BR" sz="2400" dirty="0">
+                <a:latin typeface="Times New Roman" panose="02020603050405020304" pitchFamily="18" charset="0"/>
+                <a:cs typeface="Times New Roman" panose="02020603050405020304" pitchFamily="18" charset="0"/>
+              </a:rPr>
+              <a:t> e OCR Space) funcionam de forma assíncrona.</a:t>
+            </a:r>
+          </a:p>
+          <a:p>
+            <a:endParaRPr lang="pt-BR" sz="2400" dirty="0">
+              <a:latin typeface="Times New Roman" panose="02020603050405020304" pitchFamily="18" charset="0"/>
+              <a:cs typeface="Times New Roman" panose="02020603050405020304" pitchFamily="18" charset="0"/>
+            </a:endParaRPr>
+          </a:p>
+          <a:p>
+            <a:r>
+              <a:rPr lang="pt-BR" sz="2400" dirty="0">
+                <a:latin typeface="Times New Roman" panose="02020603050405020304" pitchFamily="18" charset="0"/>
+                <a:cs typeface="Times New Roman" panose="02020603050405020304" pitchFamily="18" charset="0"/>
+              </a:rPr>
+              <a:t>Execução em Segundo Plano: O navegador e o servidor da API não esperam um pelo outro. Quando disparando o </a:t>
+            </a:r>
+            <a:r>
+              <a:rPr lang="pt-BR" sz="2400" dirty="0" err="1">
+                <a:latin typeface="Times New Roman" panose="02020603050405020304" pitchFamily="18" charset="0"/>
+                <a:cs typeface="Times New Roman" panose="02020603050405020304" pitchFamily="18" charset="0"/>
+              </a:rPr>
+              <a:t>fetch</a:t>
+            </a:r>
+            <a:r>
+              <a:rPr lang="pt-BR" sz="2400" dirty="0">
+                <a:latin typeface="Times New Roman" panose="02020603050405020304" pitchFamily="18" charset="0"/>
+                <a:cs typeface="Times New Roman" panose="02020603050405020304" pitchFamily="18" charset="0"/>
+              </a:rPr>
+              <a:t>(), a requisição viaja pela rede e o </a:t>
+            </a:r>
+            <a:r>
+              <a:rPr lang="pt-BR" sz="2400" dirty="0" err="1">
+                <a:latin typeface="Times New Roman" panose="02020603050405020304" pitchFamily="18" charset="0"/>
+                <a:cs typeface="Times New Roman" panose="02020603050405020304" pitchFamily="18" charset="0"/>
+              </a:rPr>
+              <a:t>JavaScript</a:t>
+            </a:r>
+            <a:r>
+              <a:rPr lang="pt-BR" sz="2400" dirty="0">
+                <a:latin typeface="Times New Roman" panose="02020603050405020304" pitchFamily="18" charset="0"/>
+                <a:cs typeface="Times New Roman" panose="02020603050405020304" pitchFamily="18" charset="0"/>
+              </a:rPr>
+              <a:t> continua executando outros códigos no navegador.</a:t>
+            </a:r>
+          </a:p>
+          <a:p>
+            <a:endParaRPr lang="pt-BR" sz="2400" dirty="0">
+              <a:latin typeface="Times New Roman" panose="02020603050405020304" pitchFamily="18" charset="0"/>
+              <a:cs typeface="Times New Roman" panose="02020603050405020304" pitchFamily="18" charset="0"/>
+            </a:endParaRPr>
+          </a:p>
+          <a:p>
+            <a:r>
+              <a:rPr lang="pt-BR" sz="2400" dirty="0">
+                <a:latin typeface="Times New Roman" panose="02020603050405020304" pitchFamily="18" charset="0"/>
+                <a:cs typeface="Times New Roman" panose="02020603050405020304" pitchFamily="18" charset="0"/>
+              </a:rPr>
+              <a:t>Respostas Não Imediatas: Como a resposta do servidor leva tempo para trafegar na rede, o </a:t>
+            </a:r>
+            <a:r>
+              <a:rPr lang="pt-BR" sz="2400" dirty="0" err="1">
+                <a:latin typeface="Times New Roman" panose="02020603050405020304" pitchFamily="18" charset="0"/>
+                <a:cs typeface="Times New Roman" panose="02020603050405020304" pitchFamily="18" charset="0"/>
+              </a:rPr>
+              <a:t>JavaScript</a:t>
+            </a:r>
+            <a:r>
+              <a:rPr lang="pt-BR" sz="2400" dirty="0">
+                <a:latin typeface="Times New Roman" panose="02020603050405020304" pitchFamily="18" charset="0"/>
+                <a:cs typeface="Times New Roman" panose="02020603050405020304" pitchFamily="18" charset="0"/>
+              </a:rPr>
+              <a:t> utiliza </a:t>
+            </a:r>
+            <a:r>
+              <a:rPr lang="pt-BR" sz="2400" dirty="0" err="1">
+                <a:latin typeface="Times New Roman" panose="02020603050405020304" pitchFamily="18" charset="0"/>
+                <a:cs typeface="Times New Roman" panose="02020603050405020304" pitchFamily="18" charset="0"/>
+              </a:rPr>
+              <a:t>Promises</a:t>
+            </a:r>
+            <a:r>
+              <a:rPr lang="pt-BR" sz="2400" dirty="0">
+                <a:latin typeface="Times New Roman" panose="02020603050405020304" pitchFamily="18" charset="0"/>
+                <a:cs typeface="Times New Roman" panose="02020603050405020304" pitchFamily="18" charset="0"/>
+              </a:rPr>
+              <a:t> (.</a:t>
+            </a:r>
+            <a:r>
+              <a:rPr lang="pt-BR" sz="2400" dirty="0" err="1">
+                <a:latin typeface="Times New Roman" panose="02020603050405020304" pitchFamily="18" charset="0"/>
+                <a:cs typeface="Times New Roman" panose="02020603050405020304" pitchFamily="18" charset="0"/>
+              </a:rPr>
+              <a:t>then</a:t>
+            </a:r>
+            <a:r>
+              <a:rPr lang="pt-BR" sz="2400" dirty="0">
+                <a:latin typeface="Times New Roman" panose="02020603050405020304" pitchFamily="18" charset="0"/>
+                <a:cs typeface="Times New Roman" panose="02020603050405020304" pitchFamily="18" charset="0"/>
+              </a:rPr>
+              <a:t>() ou </a:t>
+            </a:r>
+            <a:r>
+              <a:rPr lang="pt-BR" sz="2400" dirty="0" err="1">
+                <a:latin typeface="Times New Roman" panose="02020603050405020304" pitchFamily="18" charset="0"/>
+                <a:cs typeface="Times New Roman" panose="02020603050405020304" pitchFamily="18" charset="0"/>
+              </a:rPr>
+              <a:t>async</a:t>
+            </a:r>
+            <a:r>
+              <a:rPr lang="pt-BR" sz="2400" dirty="0">
+                <a:latin typeface="Times New Roman" panose="02020603050405020304" pitchFamily="18" charset="0"/>
+                <a:cs typeface="Times New Roman" panose="02020603050405020304" pitchFamily="18" charset="0"/>
+              </a:rPr>
+              <a:t>/</a:t>
+            </a:r>
+            <a:r>
+              <a:rPr lang="pt-BR" sz="2400" dirty="0" err="1">
+                <a:latin typeface="Times New Roman" panose="02020603050405020304" pitchFamily="18" charset="0"/>
+                <a:cs typeface="Times New Roman" panose="02020603050405020304" pitchFamily="18" charset="0"/>
+              </a:rPr>
+              <a:t>await</a:t>
+            </a:r>
+            <a:r>
+              <a:rPr lang="pt-BR" sz="2400" dirty="0">
+                <a:latin typeface="Times New Roman" panose="02020603050405020304" pitchFamily="18" charset="0"/>
+                <a:cs typeface="Times New Roman" panose="02020603050405020304" pitchFamily="18" charset="0"/>
+              </a:rPr>
+              <a:t>) para processar os dados assim que eles chegam.</a:t>
+            </a:r>
+          </a:p>
+          <a:p>
+            <a:endParaRPr lang="pt-BR" sz="2400" dirty="0">
+              <a:latin typeface="Times New Roman" panose="02020603050405020304" pitchFamily="18" charset="0"/>
+              <a:cs typeface="Times New Roman" panose="02020603050405020304" pitchFamily="18" charset="0"/>
+            </a:endParaRPr>
+          </a:p>
+          <a:p>
+            <a:r>
+              <a:rPr lang="pt-BR" sz="2400" dirty="0">
+                <a:latin typeface="Times New Roman" panose="02020603050405020304" pitchFamily="18" charset="0"/>
+                <a:cs typeface="Times New Roman" panose="02020603050405020304" pitchFamily="18" charset="0"/>
+              </a:rPr>
+              <a:t>Interface Fluida: Essa arquitetura garante que a tela não "trave" nem congele enquanto o sistema aguarda os dados do servidor.</a:t>
+            </a:r>
+          </a:p>
+        </p:txBody>
+      </p:sp>
+    </p:spTree>
+    <p:extLst>
+      <p:ext uri="{BB962C8B-B14F-4D97-AF65-F5344CB8AC3E}">
+        <p14:creationId xmlns:p14="http://schemas.microsoft.com/office/powerpoint/2010/main" val="4258354645"/>
+      </p:ext>
+    </p:extLst>
+  </p:cSld>
+  <p:clrMapOvr>
+    <a:masterClrMapping/>
+  </p:clrMapOvr>
+</p:sld>
+</file>
+
+<file path=ppt/slides/slide3.xml><?xml version="1.0" encoding="utf-8"?>
+<p:sld xmlns:a="http://schemas.openxmlformats.org/drawingml/2006/main" xmlns:r="http://schemas.openxmlformats.org/officeDocument/2006/relationships" xmlns:p="http://schemas.openxmlformats.org/presentationml/2006/main">
+  <p:cSld>
+    <p:spTree>
+      <p:nvGrpSpPr>
+        <p:cNvPr id="1" name=""/>
+        <p:cNvGrpSpPr/>
+        <p:nvPr/>
+      </p:nvGrpSpPr>
+      <p:grpSpPr>
+        <a:xfrm>
+          <a:off x="0" y="0"/>
+          <a:ext cx="0" cy="0"/>
+          <a:chOff x="0" y="0"/>
+          <a:chExt cx="0" cy="0"/>
+        </a:xfrm>
+      </p:grpSpPr>
+      <p:sp>
+        <p:nvSpPr>
+          <p:cNvPr id="7" name="CaixaDeTexto 6">
+            <a:extLst>
+              <a:ext uri="{FF2B5EF4-FFF2-40B4-BE49-F238E27FC236}">
+                <a16:creationId xmlns:a16="http://schemas.microsoft.com/office/drawing/2014/main" id="{88FD6603-769F-4699-8E38-B5C49C39EC14}"/>
+              </a:ext>
+            </a:extLst>
+          </p:cNvPr>
+          <p:cNvSpPr txBox="1"/>
+          <p:nvPr/>
+        </p:nvSpPr>
+        <p:spPr>
+          <a:xfrm>
+            <a:off x="5374257" y="1483743"/>
+            <a:ext cx="184731" cy="369332"/>
+          </a:xfrm>
+          <a:prstGeom prst="rect">
+            <a:avLst/>
+          </a:prstGeom>
+          <a:noFill/>
+        </p:spPr>
+        <p:txBody>
+          <a:bodyPr wrap="none" rtlCol="0">
+            <a:spAutoFit/>
+          </a:bodyPr>
+          <a:lstStyle/>
+          <a:p>
+            <a:endParaRPr lang="pt-BR" dirty="0"/>
+          </a:p>
+        </p:txBody>
+      </p:sp>
+      <p:graphicFrame>
+        <p:nvGraphicFramePr>
+          <p:cNvPr id="2" name="Tabela 1">
+            <a:extLst>
+              <a:ext uri="{FF2B5EF4-FFF2-40B4-BE49-F238E27FC236}">
+                <a16:creationId xmlns:a16="http://schemas.microsoft.com/office/drawing/2014/main" id="{A35752D7-FFD8-430B-8582-58971C21C99F}"/>
+              </a:ext>
+            </a:extLst>
+          </p:cNvPr>
+          <p:cNvGraphicFramePr>
+            <a:graphicFrameLocks noGrp="1"/>
+          </p:cNvGraphicFramePr>
+          <p:nvPr>
+            <p:extLst>
+              <p:ext uri="{D42A27DB-BD31-4B8C-83A1-F6EECF244321}">
+                <p14:modId xmlns:p14="http://schemas.microsoft.com/office/powerpoint/2010/main" val="833543277"/>
+              </p:ext>
+            </p:extLst>
+          </p:nvPr>
+        </p:nvGraphicFramePr>
+        <p:xfrm>
+          <a:off x="116457" y="1853075"/>
+          <a:ext cx="10515600" cy="3434080"/>
+        </p:xfrm>
+        <a:graphic>
+          <a:graphicData uri="http://schemas.openxmlformats.org/drawingml/2006/table">
+            <a:tbl>
+              <a:tblPr/>
+              <a:tblGrid>
+                <a:gridCol w="5257800">
+                  <a:extLst>
+                    <a:ext uri="{9D8B030D-6E8A-4147-A177-3AD203B41FA5}">
+                      <a16:colId xmlns:a16="http://schemas.microsoft.com/office/drawing/2014/main" val="1572314598"/>
+                    </a:ext>
+                  </a:extLst>
+                </a:gridCol>
+                <a:gridCol w="5257800">
+                  <a:extLst>
+                    <a:ext uri="{9D8B030D-6E8A-4147-A177-3AD203B41FA5}">
+                      <a16:colId xmlns:a16="http://schemas.microsoft.com/office/drawing/2014/main" val="1532154053"/>
+                    </a:ext>
+                  </a:extLst>
+                </a:gridCol>
+              </a:tblGrid>
+              <a:tr h="0">
+                <a:tc>
+                  <a:txBody>
+                    <a:bodyPr/>
+                    <a:lstStyle/>
+                    <a:p>
+                      <a:r>
+                        <a:rPr lang="pt-BR" sz="2400" b="1" dirty="0">
+                          <a:effectLst/>
+                          <a:latin typeface="Google Sans Text"/>
+                        </a:rPr>
+                        <a:t>O Que Fizemos Até Agora</a:t>
+                      </a:r>
+                      <a:endParaRPr lang="pt-BR" sz="2400" dirty="0">
+                        <a:effectLst/>
+                        <a:latin typeface="Google Sans Text"/>
+                      </a:endParaRPr>
+                    </a:p>
+                  </a:txBody>
+                  <a:tcPr marL="76200" marR="76200" marT="50800" marB="50800" anchor="ctr">
+                    <a:lnL w="6350" cap="flat" cmpd="sng" algn="ctr">
+                      <a:solidFill>
+                        <a:srgbClr val="C4C7C5"/>
+                      </a:solidFill>
+                      <a:prstDash val="solid"/>
+                      <a:round/>
+                      <a:headEnd type="none" w="med" len="med"/>
+                      <a:tailEnd type="none" w="med" len="med"/>
+                    </a:lnL>
+                    <a:lnR w="6350" cap="flat" cmpd="sng" algn="ctr">
+                      <a:solidFill>
+                        <a:srgbClr val="C4C7C5"/>
+                      </a:solidFill>
+                      <a:prstDash val="solid"/>
+                      <a:round/>
+                      <a:headEnd type="none" w="med" len="med"/>
+                      <a:tailEnd type="none" w="med" len="med"/>
+                    </a:lnR>
+                    <a:lnT w="6350" cap="flat" cmpd="sng" algn="ctr">
+                      <a:solidFill>
+                        <a:srgbClr val="C4C7C5"/>
+                      </a:solidFill>
+                      <a:prstDash val="solid"/>
+                      <a:round/>
+                      <a:headEnd type="none" w="med" len="med"/>
+                      <a:tailEnd type="none" w="med" len="med"/>
+                    </a:lnT>
+                    <a:lnB w="6350" cap="flat" cmpd="sng" algn="ctr">
+                      <a:solidFill>
+                        <a:srgbClr val="C4C7C5"/>
+                      </a:solidFill>
+                      <a:prstDash val="solid"/>
+                      <a:round/>
+                      <a:headEnd type="none" w="med" len="med"/>
+                      <a:tailEnd type="none" w="med" len="med"/>
+                    </a:lnB>
+                  </a:tcPr>
+                </a:tc>
+                <a:tc>
+                  <a:txBody>
+                    <a:bodyPr/>
+                    <a:lstStyle/>
+                    <a:p>
+                      <a:r>
+                        <a:rPr lang="pt-BR" sz="2400" b="1" dirty="0">
+                          <a:effectLst/>
+                          <a:latin typeface="Google Sans Text"/>
+                        </a:rPr>
+                        <a:t>O Que Faremos na Próxima Aula</a:t>
+                      </a:r>
+                      <a:endParaRPr lang="pt-BR" sz="2400" dirty="0">
+                        <a:effectLst/>
+                        <a:latin typeface="Google Sans Text"/>
+                      </a:endParaRPr>
+                    </a:p>
+                  </a:txBody>
+                  <a:tcPr marL="76200" marR="76200" marT="50800" marB="50800" anchor="ctr">
+                    <a:lnL w="6350" cap="flat" cmpd="sng" algn="ctr">
+                      <a:solidFill>
+                        <a:srgbClr val="C4C7C5"/>
+                      </a:solidFill>
+                      <a:prstDash val="solid"/>
+                      <a:round/>
+                      <a:headEnd type="none" w="med" len="med"/>
+                      <a:tailEnd type="none" w="med" len="med"/>
+                    </a:lnL>
+                    <a:lnR w="6350" cap="flat" cmpd="sng" algn="ctr">
+                      <a:solidFill>
+                        <a:srgbClr val="C4C7C5"/>
+                      </a:solidFill>
+                      <a:prstDash val="solid"/>
+                      <a:round/>
+                      <a:headEnd type="none" w="med" len="med"/>
+                      <a:tailEnd type="none" w="med" len="med"/>
+                    </a:lnR>
+                    <a:lnT w="6350" cap="flat" cmpd="sng" algn="ctr">
+                      <a:solidFill>
+                        <a:srgbClr val="C4C7C5"/>
+                      </a:solidFill>
+                      <a:prstDash val="solid"/>
+                      <a:round/>
+                      <a:headEnd type="none" w="med" len="med"/>
+                      <a:tailEnd type="none" w="med" len="med"/>
+                    </a:lnT>
+                    <a:lnB w="6350" cap="flat" cmpd="sng" algn="ctr">
+                      <a:solidFill>
+                        <a:srgbClr val="C4C7C5"/>
+                      </a:solidFill>
+                      <a:prstDash val="solid"/>
+                      <a:round/>
+                      <a:headEnd type="none" w="med" len="med"/>
+                      <a:tailEnd type="none" w="med" len="med"/>
+                    </a:lnB>
+                  </a:tcPr>
+                </a:tc>
+                <a:extLst>
+                  <a:ext uri="{0D108BD9-81ED-4DB2-BD59-A6C34878D82A}">
+                    <a16:rowId xmlns:a16="http://schemas.microsoft.com/office/drawing/2014/main" val="3257108918"/>
+                  </a:ext>
+                </a:extLst>
+              </a:tr>
+              <a:tr h="0">
+                <a:tc>
+                  <a:txBody>
+                    <a:bodyPr/>
+                    <a:lstStyle/>
+                    <a:p>
+                      <a:r>
+                        <a:rPr lang="pt-BR" sz="2400" b="1" dirty="0">
+                          <a:effectLst/>
+                          <a:latin typeface="Google Sans Text"/>
+                        </a:rPr>
+                        <a:t>Apenas Leitura de Dados</a:t>
+                      </a:r>
+                      <a:endParaRPr lang="pt-BR" sz="2400" dirty="0">
+                        <a:effectLst/>
+                        <a:latin typeface="Google Sans Text"/>
+                      </a:endParaRPr>
+                    </a:p>
+                  </a:txBody>
+                  <a:tcPr marL="76200" marR="76200" marT="50800" marB="50800" anchor="ctr">
+                    <a:lnL w="6350" cap="flat" cmpd="sng" algn="ctr">
+                      <a:solidFill>
+                        <a:srgbClr val="C4C7C5"/>
+                      </a:solidFill>
+                      <a:prstDash val="solid"/>
+                      <a:round/>
+                      <a:headEnd type="none" w="med" len="med"/>
+                      <a:tailEnd type="none" w="med" len="med"/>
+                    </a:lnL>
+                    <a:lnR w="6350" cap="flat" cmpd="sng" algn="ctr">
+                      <a:solidFill>
+                        <a:srgbClr val="C4C7C5"/>
+                      </a:solidFill>
+                      <a:prstDash val="solid"/>
+                      <a:round/>
+                      <a:headEnd type="none" w="med" len="med"/>
+                      <a:tailEnd type="none" w="med" len="med"/>
+                    </a:lnR>
+                    <a:lnT w="6350" cap="flat" cmpd="sng" algn="ctr">
+                      <a:solidFill>
+                        <a:srgbClr val="C4C7C5"/>
+                      </a:solidFill>
+                      <a:prstDash val="solid"/>
+                      <a:round/>
+                      <a:headEnd type="none" w="med" len="med"/>
+                      <a:tailEnd type="none" w="med" len="med"/>
+                    </a:lnT>
+                    <a:lnB w="6350" cap="flat" cmpd="sng" algn="ctr">
+                      <a:solidFill>
+                        <a:srgbClr val="C4C7C5"/>
+                      </a:solidFill>
+                      <a:prstDash val="solid"/>
+                      <a:round/>
+                      <a:headEnd type="none" w="med" len="med"/>
+                      <a:tailEnd type="none" w="med" len="med"/>
+                    </a:lnB>
+                  </a:tcPr>
+                </a:tc>
+                <a:tc>
+                  <a:txBody>
+                    <a:bodyPr/>
+                    <a:lstStyle/>
+                    <a:p>
+                      <a:r>
+                        <a:rPr lang="pt-BR" sz="2400" b="1">
+                          <a:effectLst/>
+                          <a:latin typeface="Google Sans Text"/>
+                        </a:rPr>
+                        <a:t>Persistência e Manipulação de Dados</a:t>
+                      </a:r>
+                      <a:endParaRPr lang="pt-BR" sz="2400">
+                        <a:effectLst/>
+                        <a:latin typeface="Google Sans Text"/>
+                      </a:endParaRPr>
+                    </a:p>
+                  </a:txBody>
+                  <a:tcPr marL="76200" marR="76200" marT="50800" marB="50800" anchor="ctr">
+                    <a:lnL w="6350" cap="flat" cmpd="sng" algn="ctr">
+                      <a:solidFill>
+                        <a:srgbClr val="C4C7C5"/>
+                      </a:solidFill>
+                      <a:prstDash val="solid"/>
+                      <a:round/>
+                      <a:headEnd type="none" w="med" len="med"/>
+                      <a:tailEnd type="none" w="med" len="med"/>
+                    </a:lnL>
+                    <a:lnR w="6350" cap="flat" cmpd="sng" algn="ctr">
+                      <a:solidFill>
+                        <a:srgbClr val="C4C7C5"/>
+                      </a:solidFill>
+                      <a:prstDash val="solid"/>
+                      <a:round/>
+                      <a:headEnd type="none" w="med" len="med"/>
+                      <a:tailEnd type="none" w="med" len="med"/>
+                    </a:lnR>
+                    <a:lnT w="6350" cap="flat" cmpd="sng" algn="ctr">
+                      <a:solidFill>
+                        <a:srgbClr val="C4C7C5"/>
+                      </a:solidFill>
+                      <a:prstDash val="solid"/>
+                      <a:round/>
+                      <a:headEnd type="none" w="med" len="med"/>
+                      <a:tailEnd type="none" w="med" len="med"/>
+                    </a:lnT>
+                    <a:lnB w="6350" cap="flat" cmpd="sng" algn="ctr">
+                      <a:solidFill>
+                        <a:srgbClr val="C4C7C5"/>
+                      </a:solidFill>
+                      <a:prstDash val="solid"/>
+                      <a:round/>
+                      <a:headEnd type="none" w="med" len="med"/>
+                      <a:tailEnd type="none" w="med" len="med"/>
+                    </a:lnB>
+                  </a:tcPr>
+                </a:tc>
+                <a:extLst>
+                  <a:ext uri="{0D108BD9-81ED-4DB2-BD59-A6C34878D82A}">
+                    <a16:rowId xmlns:a16="http://schemas.microsoft.com/office/drawing/2014/main" val="1484164230"/>
+                  </a:ext>
+                </a:extLst>
+              </a:tr>
+              <a:tr h="0">
+                <a:tc>
+                  <a:txBody>
+                    <a:bodyPr/>
+                    <a:lstStyle/>
+                    <a:p>
+                      <a:r>
+                        <a:rPr lang="pt-BR" sz="2400" dirty="0">
+                          <a:effectLst/>
+                          <a:latin typeface="Google Sans Text"/>
+                        </a:rPr>
+                        <a:t>Usaremos exclusivamente o método </a:t>
+                      </a:r>
+                      <a:r>
+                        <a:rPr lang="pt-BR" sz="2400" b="1" dirty="0">
+                          <a:effectLst/>
+                          <a:latin typeface="Google Sans Text"/>
+                        </a:rPr>
+                        <a:t>GET</a:t>
+                      </a:r>
+                      <a:endParaRPr lang="pt-BR" sz="2400" dirty="0">
+                        <a:effectLst/>
+                        <a:latin typeface="Google Sans Text"/>
+                      </a:endParaRPr>
+                    </a:p>
+                  </a:txBody>
+                  <a:tcPr marL="76200" marR="76200" marT="50800" marB="50800" anchor="ctr">
+                    <a:lnL w="6350" cap="flat" cmpd="sng" algn="ctr">
+                      <a:solidFill>
+                        <a:srgbClr val="C4C7C5"/>
+                      </a:solidFill>
+                      <a:prstDash val="solid"/>
+                      <a:round/>
+                      <a:headEnd type="none" w="med" len="med"/>
+                      <a:tailEnd type="none" w="med" len="med"/>
+                    </a:lnL>
+                    <a:lnR w="6350" cap="flat" cmpd="sng" algn="ctr">
+                      <a:solidFill>
+                        <a:srgbClr val="C4C7C5"/>
+                      </a:solidFill>
+                      <a:prstDash val="solid"/>
+                      <a:round/>
+                      <a:headEnd type="none" w="med" len="med"/>
+                      <a:tailEnd type="none" w="med" len="med"/>
+                    </a:lnR>
+                    <a:lnT w="6350" cap="flat" cmpd="sng" algn="ctr">
+                      <a:solidFill>
+                        <a:srgbClr val="C4C7C5"/>
+                      </a:solidFill>
+                      <a:prstDash val="solid"/>
+                      <a:round/>
+                      <a:headEnd type="none" w="med" len="med"/>
+                      <a:tailEnd type="none" w="med" len="med"/>
+                    </a:lnT>
+                    <a:lnB w="6350" cap="flat" cmpd="sng" algn="ctr">
+                      <a:solidFill>
+                        <a:srgbClr val="C4C7C5"/>
+                      </a:solidFill>
+                      <a:prstDash val="solid"/>
+                      <a:round/>
+                      <a:headEnd type="none" w="med" len="med"/>
+                      <a:tailEnd type="none" w="med" len="med"/>
+                    </a:lnB>
+                  </a:tcPr>
+                </a:tc>
+                <a:tc>
+                  <a:txBody>
+                    <a:bodyPr/>
+                    <a:lstStyle/>
+                    <a:p>
+                      <a:r>
+                        <a:rPr lang="pt-BR" sz="2400">
+                          <a:effectLst/>
+                          <a:latin typeface="Google Sans Text"/>
+                        </a:rPr>
+                        <a:t>Usaremos o ciclo </a:t>
+                      </a:r>
+                      <a:r>
+                        <a:rPr lang="pt-BR" sz="2400" b="1">
+                          <a:effectLst/>
+                          <a:latin typeface="Google Sans Text"/>
+                        </a:rPr>
+                        <a:t>CRUD completo</a:t>
+                      </a:r>
+                      <a:r>
+                        <a:rPr lang="pt-BR" sz="2400">
+                          <a:effectLst/>
+                          <a:latin typeface="Google Sans Text"/>
+                        </a:rPr>
+                        <a:t> (POST, PUT/PATCH, DELETE)</a:t>
+                      </a:r>
+                    </a:p>
+                  </a:txBody>
+                  <a:tcPr marL="76200" marR="76200" marT="50800" marB="50800" anchor="ctr">
+                    <a:lnL w="6350" cap="flat" cmpd="sng" algn="ctr">
+                      <a:solidFill>
+                        <a:srgbClr val="C4C7C5"/>
+                      </a:solidFill>
+                      <a:prstDash val="solid"/>
+                      <a:round/>
+                      <a:headEnd type="none" w="med" len="med"/>
+                      <a:tailEnd type="none" w="med" len="med"/>
+                    </a:lnL>
+                    <a:lnR w="6350" cap="flat" cmpd="sng" algn="ctr">
+                      <a:solidFill>
+                        <a:srgbClr val="C4C7C5"/>
+                      </a:solidFill>
+                      <a:prstDash val="solid"/>
+                      <a:round/>
+                      <a:headEnd type="none" w="med" len="med"/>
+                      <a:tailEnd type="none" w="med" len="med"/>
+                    </a:lnR>
+                    <a:lnT w="6350" cap="flat" cmpd="sng" algn="ctr">
+                      <a:solidFill>
+                        <a:srgbClr val="C4C7C5"/>
+                      </a:solidFill>
+                      <a:prstDash val="solid"/>
+                      <a:round/>
+                      <a:headEnd type="none" w="med" len="med"/>
+                      <a:tailEnd type="none" w="med" len="med"/>
+                    </a:lnT>
+                    <a:lnB w="6350" cap="flat" cmpd="sng" algn="ctr">
+                      <a:solidFill>
+                        <a:srgbClr val="C4C7C5"/>
+                      </a:solidFill>
+                      <a:prstDash val="solid"/>
+                      <a:round/>
+                      <a:headEnd type="none" w="med" len="med"/>
+                      <a:tailEnd type="none" w="med" len="med"/>
+                    </a:lnB>
+                  </a:tcPr>
+                </a:tc>
+                <a:extLst>
+                  <a:ext uri="{0D108BD9-81ED-4DB2-BD59-A6C34878D82A}">
+                    <a16:rowId xmlns:a16="http://schemas.microsoft.com/office/drawing/2014/main" val="1980774410"/>
+                  </a:ext>
+                </a:extLst>
+              </a:tr>
+              <a:tr h="0">
+                <a:tc>
+                  <a:txBody>
+                    <a:bodyPr/>
+                    <a:lstStyle/>
+                    <a:p>
+                      <a:r>
+                        <a:rPr lang="pt-BR" sz="2400" dirty="0">
+                          <a:effectLst/>
+                          <a:latin typeface="Google Sans Text"/>
+                        </a:rPr>
+                        <a:t>Buscaremos informações sem modificar o servidor</a:t>
+                      </a:r>
+                    </a:p>
+                  </a:txBody>
+                  <a:tcPr marL="76200" marR="76200" marT="50800" marB="50800" anchor="ctr">
+                    <a:lnL w="6350" cap="flat" cmpd="sng" algn="ctr">
+                      <a:solidFill>
+                        <a:srgbClr val="C4C7C5"/>
+                      </a:solidFill>
+                      <a:prstDash val="solid"/>
+                      <a:round/>
+                      <a:headEnd type="none" w="med" len="med"/>
+                      <a:tailEnd type="none" w="med" len="med"/>
+                    </a:lnL>
+                    <a:lnR w="6350" cap="flat" cmpd="sng" algn="ctr">
+                      <a:solidFill>
+                        <a:srgbClr val="C4C7C5"/>
+                      </a:solidFill>
+                      <a:prstDash val="solid"/>
+                      <a:round/>
+                      <a:headEnd type="none" w="med" len="med"/>
+                      <a:tailEnd type="none" w="med" len="med"/>
+                    </a:lnR>
+                    <a:lnT w="6350" cap="flat" cmpd="sng" algn="ctr">
+                      <a:solidFill>
+                        <a:srgbClr val="C4C7C5"/>
+                      </a:solidFill>
+                      <a:prstDash val="solid"/>
+                      <a:round/>
+                      <a:headEnd type="none" w="med" len="med"/>
+                      <a:tailEnd type="none" w="med" len="med"/>
+                    </a:lnT>
+                    <a:lnB w="6350" cap="flat" cmpd="sng" algn="ctr">
+                      <a:solidFill>
+                        <a:srgbClr val="C4C7C5"/>
+                      </a:solidFill>
+                      <a:prstDash val="solid"/>
+                      <a:round/>
+                      <a:headEnd type="none" w="med" len="med"/>
+                      <a:tailEnd type="none" w="med" len="med"/>
+                    </a:lnB>
+                  </a:tcPr>
+                </a:tc>
+                <a:tc>
+                  <a:txBody>
+                    <a:bodyPr/>
+                    <a:lstStyle/>
+                    <a:p>
+                      <a:r>
+                        <a:rPr lang="pt-BR" sz="2400">
+                          <a:effectLst/>
+                          <a:latin typeface="Google Sans Text"/>
+                        </a:rPr>
+                        <a:t>Enviaremos novos dados, editaremos registros e removeremos conteúdos</a:t>
+                      </a:r>
+                    </a:p>
+                  </a:txBody>
+                  <a:tcPr marL="76200" marR="76200" marT="50800" marB="50800" anchor="ctr">
+                    <a:lnL w="6350" cap="flat" cmpd="sng" algn="ctr">
+                      <a:solidFill>
+                        <a:srgbClr val="C4C7C5"/>
+                      </a:solidFill>
+                      <a:prstDash val="solid"/>
+                      <a:round/>
+                      <a:headEnd type="none" w="med" len="med"/>
+                      <a:tailEnd type="none" w="med" len="med"/>
+                    </a:lnL>
+                    <a:lnR w="6350" cap="flat" cmpd="sng" algn="ctr">
+                      <a:solidFill>
+                        <a:srgbClr val="C4C7C5"/>
+                      </a:solidFill>
+                      <a:prstDash val="solid"/>
+                      <a:round/>
+                      <a:headEnd type="none" w="med" len="med"/>
+                      <a:tailEnd type="none" w="med" len="med"/>
+                    </a:lnR>
+                    <a:lnT w="6350" cap="flat" cmpd="sng" algn="ctr">
+                      <a:solidFill>
+                        <a:srgbClr val="C4C7C5"/>
+                      </a:solidFill>
+                      <a:prstDash val="solid"/>
+                      <a:round/>
+                      <a:headEnd type="none" w="med" len="med"/>
+                      <a:tailEnd type="none" w="med" len="med"/>
+                    </a:lnT>
+                    <a:lnB w="6350" cap="flat" cmpd="sng" algn="ctr">
+                      <a:solidFill>
+                        <a:srgbClr val="C4C7C5"/>
+                      </a:solidFill>
+                      <a:prstDash val="solid"/>
+                      <a:round/>
+                      <a:headEnd type="none" w="med" len="med"/>
+                      <a:tailEnd type="none" w="med" len="med"/>
+                    </a:lnB>
+                  </a:tcPr>
+                </a:tc>
+                <a:extLst>
+                  <a:ext uri="{0D108BD9-81ED-4DB2-BD59-A6C34878D82A}">
+                    <a16:rowId xmlns:a16="http://schemas.microsoft.com/office/drawing/2014/main" val="2210569401"/>
+                  </a:ext>
+                </a:extLst>
+              </a:tr>
+              <a:tr h="0">
+                <a:tc>
+                  <a:txBody>
+                    <a:bodyPr/>
+                    <a:lstStyle/>
+                    <a:p>
+                      <a:r>
+                        <a:rPr lang="pt-BR" sz="2400" i="1" dirty="0">
+                          <a:effectLst/>
+                          <a:latin typeface="Google Sans Text"/>
+                        </a:rPr>
+                        <a:t>Exemplo:</a:t>
+                      </a:r>
+                      <a:r>
+                        <a:rPr lang="pt-BR" sz="2400" dirty="0">
+                          <a:effectLst/>
+                          <a:latin typeface="Google Sans Text"/>
+                        </a:rPr>
+                        <a:t> Consultar um endereço por CEP ou listar usuários</a:t>
+                      </a:r>
+                    </a:p>
+                  </a:txBody>
+                  <a:tcPr marL="76200" marR="76200" marT="50800" marB="50800" anchor="ctr">
+                    <a:lnL w="6350" cap="flat" cmpd="sng" algn="ctr">
+                      <a:solidFill>
+                        <a:srgbClr val="C4C7C5"/>
+                      </a:solidFill>
+                      <a:prstDash val="solid"/>
+                      <a:round/>
+                      <a:headEnd type="none" w="med" len="med"/>
+                      <a:tailEnd type="none" w="med" len="med"/>
+                    </a:lnL>
+                    <a:lnR w="6350" cap="flat" cmpd="sng" algn="ctr">
+                      <a:solidFill>
+                        <a:srgbClr val="C4C7C5"/>
+                      </a:solidFill>
+                      <a:prstDash val="solid"/>
+                      <a:round/>
+                      <a:headEnd type="none" w="med" len="med"/>
+                      <a:tailEnd type="none" w="med" len="med"/>
+                    </a:lnR>
+                    <a:lnT w="6350" cap="flat" cmpd="sng" algn="ctr">
+                      <a:solidFill>
+                        <a:srgbClr val="C4C7C5"/>
+                      </a:solidFill>
+                      <a:prstDash val="solid"/>
+                      <a:round/>
+                      <a:headEnd type="none" w="med" len="med"/>
+                      <a:tailEnd type="none" w="med" len="med"/>
+                    </a:lnT>
+                    <a:lnB w="6350" cap="flat" cmpd="sng" algn="ctr">
+                      <a:solidFill>
+                        <a:srgbClr val="C4C7C5"/>
+                      </a:solidFill>
+                      <a:prstDash val="solid"/>
+                      <a:round/>
+                      <a:headEnd type="none" w="med" len="med"/>
+                      <a:tailEnd type="none" w="med" len="med"/>
+                    </a:lnB>
+                  </a:tcPr>
+                </a:tc>
+                <a:tc>
+                  <a:txBody>
+                    <a:bodyPr/>
+                    <a:lstStyle/>
+                    <a:p>
+                      <a:r>
+                        <a:rPr lang="pt-BR" sz="2400" i="1" dirty="0">
+                          <a:effectLst/>
+                          <a:latin typeface="Google Sans Text"/>
+                        </a:rPr>
+                        <a:t>Exemplo:</a:t>
+                      </a:r>
+                      <a:r>
+                        <a:rPr lang="pt-BR" sz="2400" dirty="0">
+                          <a:effectLst/>
+                          <a:latin typeface="Google Sans Text"/>
+                        </a:rPr>
+                        <a:t> Cadastrar um novo usuário, alterar seu cargo e excluir sua conta</a:t>
+                      </a:r>
+                    </a:p>
+                  </a:txBody>
+                  <a:tcPr marL="76200" marR="76200" marT="50800" marB="50800" anchor="ctr">
+                    <a:lnL w="6350" cap="flat" cmpd="sng" algn="ctr">
+                      <a:solidFill>
+                        <a:srgbClr val="C4C7C5"/>
+                      </a:solidFill>
+                      <a:prstDash val="solid"/>
+                      <a:round/>
+                      <a:headEnd type="none" w="med" len="med"/>
+                      <a:tailEnd type="none" w="med" len="med"/>
+                    </a:lnL>
+                    <a:lnR w="6350" cap="flat" cmpd="sng" algn="ctr">
+                      <a:solidFill>
+                        <a:srgbClr val="C4C7C5"/>
+                      </a:solidFill>
+                      <a:prstDash val="solid"/>
+                      <a:round/>
+                      <a:headEnd type="none" w="med" len="med"/>
+                      <a:tailEnd type="none" w="med" len="med"/>
+                    </a:lnR>
+                    <a:lnT w="6350" cap="flat" cmpd="sng" algn="ctr">
+                      <a:solidFill>
+                        <a:srgbClr val="C4C7C5"/>
+                      </a:solidFill>
+                      <a:prstDash val="solid"/>
+                      <a:round/>
+                      <a:headEnd type="none" w="med" len="med"/>
+                      <a:tailEnd type="none" w="med" len="med"/>
+                    </a:lnT>
+                    <a:lnB w="6350" cap="flat" cmpd="sng" algn="ctr">
+                      <a:solidFill>
+                        <a:srgbClr val="C4C7C5"/>
+                      </a:solidFill>
+                      <a:prstDash val="solid"/>
+                      <a:round/>
+                      <a:headEnd type="none" w="med" len="med"/>
+                      <a:tailEnd type="none" w="med" len="med"/>
+                    </a:lnB>
+                  </a:tcPr>
+                </a:tc>
+                <a:extLst>
+                  <a:ext uri="{0D108BD9-81ED-4DB2-BD59-A6C34878D82A}">
+                    <a16:rowId xmlns:a16="http://schemas.microsoft.com/office/drawing/2014/main" val="274268461"/>
+                  </a:ext>
+                </a:extLst>
+              </a:tr>
+            </a:tbl>
+          </a:graphicData>
+        </a:graphic>
+      </p:graphicFrame>
+      <p:sp>
+        <p:nvSpPr>
+          <p:cNvPr id="3" name="Rectangle 1">
+            <a:extLst>
+              <a:ext uri="{FF2B5EF4-FFF2-40B4-BE49-F238E27FC236}">
+                <a16:creationId xmlns:a16="http://schemas.microsoft.com/office/drawing/2014/main" id="{99CD9A64-54F9-42F0-924E-E6841B20A750}"/>
+              </a:ext>
+            </a:extLst>
+          </p:cNvPr>
+          <p:cNvSpPr>
+            <a:spLocks noChangeArrowheads="1"/>
+          </p:cNvSpPr>
+          <p:nvPr/>
+        </p:nvSpPr>
+        <p:spPr bwMode="auto">
+          <a:xfrm>
+            <a:off x="-8626" y="551787"/>
+            <a:ext cx="12042476" cy="1107996"/>
+          </a:xfrm>
+          <a:prstGeom prst="rect">
+            <a:avLst/>
+          </a:prstGeom>
+          <a:noFill/>
+          <a:ln>
+            <a:noFill/>
+          </a:ln>
+          <a:effectLst/>
+          <a:extLst>
+            <a:ext uri="{909E8E84-426E-40DD-AFC4-6F175D3DCCD1}">
+              <a14:hiddenFill xmlns:a14="http://schemas.microsoft.com/office/drawing/2010/main">
+                <a:solidFill>
+                  <a:schemeClr val="accent1"/>
+                </a:solidFill>
+              </a14:hiddenFill>
+            </a:ext>
+            <a:ext uri="{91240B29-F687-4F45-9708-019B960494DF}">
+              <a14:hiddenLine xmlns:a14="http://schemas.microsoft.com/office/drawing/2010/main" w="9525">
+                <a:solidFill>
+                  <a:schemeClr val="tx1"/>
+                </a:solidFill>
+                <a:miter lim="800000"/>
+                <a:headEnd/>
+                <a:tailEnd/>
+              </a14:hiddenLine>
+            </a:ext>
+            <a:ext uri="{AF507438-7753-43E0-B8FC-AC1667EBCBE1}">
+              <a14:hiddenEffects xmlns:a14="http://schemas.microsoft.com/office/drawing/2010/main">
+                <a:effectLst>
+                  <a:outerShdw dist="35921" dir="2700000" algn="ctr" rotWithShape="0">
+                    <a:schemeClr val="bg2"/>
+                  </a:outerShdw>
+                </a:effectLst>
+              </a14:hiddenEffects>
+            </a:ext>
+          </a:extLst>
+        </p:spPr>
+        <p:txBody>
+          <a:bodyPr vert="horz" wrap="square" lIns="91440" tIns="0" rIns="91440" bIns="0" numCol="1" anchor="ctr" anchorCtr="0" compatLnSpc="1">
+            <a:prstTxWarp prst="textNoShape">
+              <a:avLst/>
+            </a:prstTxWarp>
+            <a:spAutoFit/>
+          </a:bodyPr>
+          <a:lstStyle/>
+          <a:p>
+            <a:pPr marL="0" marR="0" lvl="0" indent="0" algn="l" defTabSz="914400" rtl="0" eaLnBrk="0" fontAlgn="base" latinLnBrk="0" hangingPunct="0">
+              <a:lnSpc>
+                <a:spcPct val="100000"/>
+              </a:lnSpc>
+              <a:spcBef>
+                <a:spcPct val="0"/>
+              </a:spcBef>
+              <a:spcAft>
+                <a:spcPct val="0"/>
+              </a:spcAft>
+              <a:buClrTx/>
+              <a:buSzTx/>
+              <a:buFontTx/>
+              <a:buNone/>
+              <a:tabLst/>
+            </a:pPr>
+            <a:r>
+              <a:rPr kumimoji="0" lang="pt-BR" altLang="pt-BR" sz="2400" b="1" i="0" u="none" strike="noStrike" cap="none" normalizeH="0" baseline="0" dirty="0">
+                <a:ln>
+                  <a:noFill/>
+                </a:ln>
+                <a:solidFill>
+                  <a:schemeClr val="tx1"/>
+                </a:solidFill>
+                <a:effectLst/>
+                <a:latin typeface="Times New Roman" panose="02020603050405020304" pitchFamily="18" charset="0"/>
+                <a:cs typeface="Times New Roman" panose="02020603050405020304" pitchFamily="18" charset="0"/>
+              </a:rPr>
+              <a:t>Slide 2: A Evolução da Nossa Aplicação (GET vs. CRUD Completo)</a:t>
+            </a:r>
+          </a:p>
+          <a:p>
+            <a:pPr marL="0" marR="0" lvl="0" indent="0" algn="l" defTabSz="914400" rtl="0" eaLnBrk="0" fontAlgn="base" latinLnBrk="0" hangingPunct="0">
+              <a:lnSpc>
+                <a:spcPct val="100000"/>
+              </a:lnSpc>
+              <a:spcBef>
+                <a:spcPct val="0"/>
+              </a:spcBef>
+              <a:spcAft>
+                <a:spcPct val="0"/>
+              </a:spcAft>
+              <a:buClrTx/>
+              <a:buSzTx/>
+              <a:buFontTx/>
+              <a:buNone/>
+              <a:tabLst/>
+            </a:pPr>
+            <a:r>
+              <a:rPr kumimoji="0" lang="pt-BR" altLang="pt-BR" sz="2400" b="1" i="0" u="none" strike="noStrike" cap="none" normalizeH="0" baseline="0" dirty="0">
+                <a:ln>
+                  <a:noFill/>
+                </a:ln>
+                <a:solidFill>
+                  <a:schemeClr val="tx1"/>
+                </a:solidFill>
+                <a:effectLst/>
+                <a:latin typeface="Times New Roman" panose="02020603050405020304" pitchFamily="18" charset="0"/>
+                <a:cs typeface="Times New Roman" panose="02020603050405020304" pitchFamily="18" charset="0"/>
+              </a:rPr>
+              <a:t>Título:</a:t>
+            </a:r>
+            <a:r>
+              <a:rPr kumimoji="0" lang="pt-BR" altLang="pt-BR" sz="2400" b="0" i="0" u="none" strike="noStrike" cap="none" normalizeH="0" baseline="0" dirty="0">
+                <a:ln>
+                  <a:noFill/>
+                </a:ln>
+                <a:solidFill>
+                  <a:schemeClr val="tx1"/>
+                </a:solidFill>
+                <a:effectLst/>
+                <a:latin typeface="Times New Roman" panose="02020603050405020304" pitchFamily="18" charset="0"/>
+                <a:cs typeface="Times New Roman" panose="02020603050405020304" pitchFamily="18" charset="0"/>
+              </a:rPr>
+              <a:t> De Onde Viemos vs. Para Onde Vamos</a:t>
+            </a:r>
+          </a:p>
+          <a:p>
+            <a:pPr marL="0" marR="0" lvl="0" indent="0" algn="l" defTabSz="914400" rtl="0" eaLnBrk="0" fontAlgn="base" latinLnBrk="0" hangingPunct="0">
+              <a:lnSpc>
+                <a:spcPct val="100000"/>
+              </a:lnSpc>
+              <a:spcBef>
+                <a:spcPct val="0"/>
+              </a:spcBef>
+              <a:spcAft>
+                <a:spcPct val="0"/>
+              </a:spcAft>
+              <a:buClrTx/>
+              <a:buSzTx/>
+              <a:buFontTx/>
+              <a:buNone/>
+              <a:tabLst/>
+            </a:pPr>
+            <a:r>
+              <a:rPr kumimoji="0" lang="pt-BR" altLang="pt-BR" sz="2400" b="1" i="0" u="none" strike="noStrike" cap="none" normalizeH="0" baseline="0" dirty="0">
+                <a:ln>
+                  <a:noFill/>
+                </a:ln>
+                <a:solidFill>
+                  <a:schemeClr val="tx1"/>
+                </a:solidFill>
+                <a:effectLst/>
+                <a:latin typeface="Times New Roman" panose="02020603050405020304" pitchFamily="18" charset="0"/>
+                <a:cs typeface="Times New Roman" panose="02020603050405020304" pitchFamily="18" charset="0"/>
+              </a:rPr>
+              <a:t>Tabela Comparativa:</a:t>
+            </a:r>
+            <a:endParaRPr kumimoji="0" lang="pt-BR" altLang="pt-BR" sz="2400" b="0" i="0" u="none" strike="noStrike" cap="none" normalizeH="0" baseline="0" dirty="0">
+              <a:ln>
+                <a:noFill/>
+              </a:ln>
+              <a:solidFill>
+                <a:schemeClr val="tx1"/>
+              </a:solidFill>
+              <a:effectLst/>
+              <a:latin typeface="Times New Roman" panose="02020603050405020304" pitchFamily="18" charset="0"/>
+              <a:cs typeface="Times New Roman" panose="02020603050405020304" pitchFamily="18" charset="0"/>
+            </a:endParaRPr>
+          </a:p>
+        </p:txBody>
+      </p:sp>
+    </p:spTree>
+    <p:extLst>
+      <p:ext uri="{BB962C8B-B14F-4D97-AF65-F5344CB8AC3E}">
+        <p14:creationId xmlns:p14="http://schemas.microsoft.com/office/powerpoint/2010/main" val="1379223130"/>
+      </p:ext>
+    </p:extLst>
+  </p:cSld>
+  <p:clrMapOvr>
+    <a:masterClrMapping/>
+  </p:clrMapOvr>
+</p:sld>
+</file>
+
+<file path=ppt/slides/slide4.xml><?xml version="1.0" encoding="utf-8"?>
+<p:sld xmlns:a="http://schemas.openxmlformats.org/drawingml/2006/main" xmlns:r="http://schemas.openxmlformats.org/officeDocument/2006/relationships" xmlns:p="http://schemas.openxmlformats.org/presentationml/2006/main">
+  <p:cSld>
+    <p:spTree>
+      <p:nvGrpSpPr>
+        <p:cNvPr id="1" name=""/>
+        <p:cNvGrpSpPr/>
+        <p:nvPr/>
+      </p:nvGrpSpPr>
+      <p:grpSpPr>
+        <a:xfrm>
+          <a:off x="0" y="0"/>
+          <a:ext cx="0" cy="0"/>
+          <a:chOff x="0" y="0"/>
+          <a:chExt cx="0" cy="0"/>
+        </a:xfrm>
+      </p:grpSpPr>
+      <p:sp>
+        <p:nvSpPr>
+          <p:cNvPr id="7" name="CaixaDeTexto 6">
+            <a:extLst>
+              <a:ext uri="{FF2B5EF4-FFF2-40B4-BE49-F238E27FC236}">
+                <a16:creationId xmlns:a16="http://schemas.microsoft.com/office/drawing/2014/main" id="{88FD6603-769F-4699-8E38-B5C49C39EC14}"/>
+              </a:ext>
+            </a:extLst>
+          </p:cNvPr>
+          <p:cNvSpPr txBox="1"/>
+          <p:nvPr/>
+        </p:nvSpPr>
+        <p:spPr>
+          <a:xfrm>
+            <a:off x="5374257" y="1483743"/>
+            <a:ext cx="184731" cy="369332"/>
+          </a:xfrm>
+          <a:prstGeom prst="rect">
+            <a:avLst/>
+          </a:prstGeom>
+          <a:noFill/>
+        </p:spPr>
+        <p:txBody>
+          <a:bodyPr wrap="none" rtlCol="0">
+            <a:spAutoFit/>
+          </a:bodyPr>
+          <a:lstStyle/>
+          <a:p>
+            <a:endParaRPr lang="pt-BR" dirty="0"/>
+          </a:p>
+        </p:txBody>
+      </p:sp>
+      <p:graphicFrame>
+        <p:nvGraphicFramePr>
+          <p:cNvPr id="4" name="Tabela 3">
+            <a:extLst>
+              <a:ext uri="{FF2B5EF4-FFF2-40B4-BE49-F238E27FC236}">
+                <a16:creationId xmlns:a16="http://schemas.microsoft.com/office/drawing/2014/main" id="{92BE53FC-78A1-49BA-B791-B44AA4AF1123}"/>
+              </a:ext>
+            </a:extLst>
+          </p:cNvPr>
+          <p:cNvGraphicFramePr>
+            <a:graphicFrameLocks noGrp="1"/>
+          </p:cNvGraphicFramePr>
+          <p:nvPr>
+            <p:extLst>
+              <p:ext uri="{D42A27DB-BD31-4B8C-83A1-F6EECF244321}">
+                <p14:modId xmlns:p14="http://schemas.microsoft.com/office/powerpoint/2010/main" val="2253491092"/>
+              </p:ext>
+            </p:extLst>
+          </p:nvPr>
+        </p:nvGraphicFramePr>
+        <p:xfrm>
+          <a:off x="116457" y="2876026"/>
+          <a:ext cx="10515600" cy="3251200"/>
+        </p:xfrm>
+        <a:graphic>
+          <a:graphicData uri="http://schemas.openxmlformats.org/drawingml/2006/table">
+            <a:tbl>
+              <a:tblPr/>
+              <a:tblGrid>
+                <a:gridCol w="3505200">
+                  <a:extLst>
+                    <a:ext uri="{9D8B030D-6E8A-4147-A177-3AD203B41FA5}">
+                      <a16:colId xmlns:a16="http://schemas.microsoft.com/office/drawing/2014/main" val="3340635977"/>
+                    </a:ext>
+                  </a:extLst>
+                </a:gridCol>
+                <a:gridCol w="3505200">
+                  <a:extLst>
+                    <a:ext uri="{9D8B030D-6E8A-4147-A177-3AD203B41FA5}">
+                      <a16:colId xmlns:a16="http://schemas.microsoft.com/office/drawing/2014/main" val="95396236"/>
+                    </a:ext>
+                  </a:extLst>
+                </a:gridCol>
+                <a:gridCol w="3505200">
+                  <a:extLst>
+                    <a:ext uri="{9D8B030D-6E8A-4147-A177-3AD203B41FA5}">
+                      <a16:colId xmlns:a16="http://schemas.microsoft.com/office/drawing/2014/main" val="2527249543"/>
+                    </a:ext>
+                  </a:extLst>
+                </a:gridCol>
+              </a:tblGrid>
+              <a:tr h="0">
+                <a:tc>
+                  <a:txBody>
+                    <a:bodyPr/>
+                    <a:lstStyle/>
+                    <a:p>
+                      <a:r>
+                        <a:rPr lang="pt-BR" b="1">
+                          <a:effectLst/>
+                          <a:latin typeface="Google Sans Text"/>
+                        </a:rPr>
+                        <a:t>Verbo HTTP</a:t>
+                      </a:r>
+                      <a:endParaRPr lang="pt-BR">
+                        <a:effectLst/>
+                        <a:latin typeface="Google Sans Text"/>
+                      </a:endParaRPr>
+                    </a:p>
+                  </a:txBody>
+                  <a:tcPr marL="76200" marR="76200" marT="50800" marB="50800" anchor="ctr">
+                    <a:lnL w="6350" cap="flat" cmpd="sng" algn="ctr">
+                      <a:solidFill>
+                        <a:srgbClr val="C4C7C5"/>
+                      </a:solidFill>
+                      <a:prstDash val="solid"/>
+                      <a:round/>
+                      <a:headEnd type="none" w="med" len="med"/>
+                      <a:tailEnd type="none" w="med" len="med"/>
+                    </a:lnL>
+                    <a:lnR w="6350" cap="flat" cmpd="sng" algn="ctr">
+                      <a:solidFill>
+                        <a:srgbClr val="C4C7C5"/>
+                      </a:solidFill>
+                      <a:prstDash val="solid"/>
+                      <a:round/>
+                      <a:headEnd type="none" w="med" len="med"/>
+                      <a:tailEnd type="none" w="med" len="med"/>
+                    </a:lnR>
+                    <a:lnT w="6350" cap="flat" cmpd="sng" algn="ctr">
+                      <a:solidFill>
+                        <a:srgbClr val="C4C7C5"/>
+                      </a:solidFill>
+                      <a:prstDash val="solid"/>
+                      <a:round/>
+                      <a:headEnd type="none" w="med" len="med"/>
+                      <a:tailEnd type="none" w="med" len="med"/>
+                    </a:lnT>
+                    <a:lnB w="6350" cap="flat" cmpd="sng" algn="ctr">
+                      <a:solidFill>
+                        <a:srgbClr val="C4C7C5"/>
+                      </a:solidFill>
+                      <a:prstDash val="solid"/>
+                      <a:round/>
+                      <a:headEnd type="none" w="med" len="med"/>
+                      <a:tailEnd type="none" w="med" len="med"/>
+                    </a:lnB>
+                  </a:tcPr>
+                </a:tc>
+                <a:tc>
+                  <a:txBody>
+                    <a:bodyPr/>
+                    <a:lstStyle/>
+                    <a:p>
+                      <a:r>
+                        <a:rPr lang="pt-BR" b="1">
+                          <a:effectLst/>
+                          <a:latin typeface="Google Sans Text"/>
+                        </a:rPr>
+                        <a:t>Ação no Servidor (CRUD)</a:t>
+                      </a:r>
+                      <a:endParaRPr lang="pt-BR">
+                        <a:effectLst/>
+                        <a:latin typeface="Google Sans Text"/>
+                      </a:endParaRPr>
+                    </a:p>
+                  </a:txBody>
+                  <a:tcPr marL="76200" marR="76200" marT="50800" marB="50800" anchor="ctr">
+                    <a:lnL w="6350" cap="flat" cmpd="sng" algn="ctr">
+                      <a:solidFill>
+                        <a:srgbClr val="C4C7C5"/>
+                      </a:solidFill>
+                      <a:prstDash val="solid"/>
+                      <a:round/>
+                      <a:headEnd type="none" w="med" len="med"/>
+                      <a:tailEnd type="none" w="med" len="med"/>
+                    </a:lnL>
+                    <a:lnR w="6350" cap="flat" cmpd="sng" algn="ctr">
+                      <a:solidFill>
+                        <a:srgbClr val="C4C7C5"/>
+                      </a:solidFill>
+                      <a:prstDash val="solid"/>
+                      <a:round/>
+                      <a:headEnd type="none" w="med" len="med"/>
+                      <a:tailEnd type="none" w="med" len="med"/>
+                    </a:lnR>
+                    <a:lnT w="6350" cap="flat" cmpd="sng" algn="ctr">
+                      <a:solidFill>
+                        <a:srgbClr val="C4C7C5"/>
+                      </a:solidFill>
+                      <a:prstDash val="solid"/>
+                      <a:round/>
+                      <a:headEnd type="none" w="med" len="med"/>
+                      <a:tailEnd type="none" w="med" len="med"/>
+                    </a:lnT>
+                    <a:lnB w="6350" cap="flat" cmpd="sng" algn="ctr">
+                      <a:solidFill>
+                        <a:srgbClr val="C4C7C5"/>
+                      </a:solidFill>
+                      <a:prstDash val="solid"/>
+                      <a:round/>
+                      <a:headEnd type="none" w="med" len="med"/>
+                      <a:tailEnd type="none" w="med" len="med"/>
+                    </a:lnB>
+                  </a:tcPr>
+                </a:tc>
+                <a:tc>
+                  <a:txBody>
+                    <a:bodyPr/>
+                    <a:lstStyle/>
+                    <a:p>
+                      <a:r>
+                        <a:rPr lang="pt-BR" b="1">
+                          <a:effectLst/>
+                          <a:latin typeface="Google Sans Text"/>
+                        </a:rPr>
+                        <a:t>Descrição Prática</a:t>
+                      </a:r>
+                      <a:endParaRPr lang="pt-BR">
+                        <a:effectLst/>
+                        <a:latin typeface="Google Sans Text"/>
+                      </a:endParaRPr>
+                    </a:p>
+                  </a:txBody>
+                  <a:tcPr marL="76200" marR="76200" marT="50800" marB="50800" anchor="ctr">
+                    <a:lnL w="6350" cap="flat" cmpd="sng" algn="ctr">
+                      <a:solidFill>
+                        <a:srgbClr val="C4C7C5"/>
+                      </a:solidFill>
+                      <a:prstDash val="solid"/>
+                      <a:round/>
+                      <a:headEnd type="none" w="med" len="med"/>
+                      <a:tailEnd type="none" w="med" len="med"/>
+                    </a:lnL>
+                    <a:lnR w="6350" cap="flat" cmpd="sng" algn="ctr">
+                      <a:solidFill>
+                        <a:srgbClr val="C4C7C5"/>
+                      </a:solidFill>
+                      <a:prstDash val="solid"/>
+                      <a:round/>
+                      <a:headEnd type="none" w="med" len="med"/>
+                      <a:tailEnd type="none" w="med" len="med"/>
+                    </a:lnR>
+                    <a:lnT w="6350" cap="flat" cmpd="sng" algn="ctr">
+                      <a:solidFill>
+                        <a:srgbClr val="C4C7C5"/>
+                      </a:solidFill>
+                      <a:prstDash val="solid"/>
+                      <a:round/>
+                      <a:headEnd type="none" w="med" len="med"/>
+                      <a:tailEnd type="none" w="med" len="med"/>
+                    </a:lnT>
+                    <a:lnB w="6350" cap="flat" cmpd="sng" algn="ctr">
+                      <a:solidFill>
+                        <a:srgbClr val="C4C7C5"/>
+                      </a:solidFill>
+                      <a:prstDash val="solid"/>
+                      <a:round/>
+                      <a:headEnd type="none" w="med" len="med"/>
+                      <a:tailEnd type="none" w="med" len="med"/>
+                    </a:lnB>
+                  </a:tcPr>
+                </a:tc>
+                <a:extLst>
+                  <a:ext uri="{0D108BD9-81ED-4DB2-BD59-A6C34878D82A}">
+                    <a16:rowId xmlns:a16="http://schemas.microsoft.com/office/drawing/2014/main" val="1984116661"/>
+                  </a:ext>
+                </a:extLst>
+              </a:tr>
+              <a:tr h="0">
+                <a:tc>
+                  <a:txBody>
+                    <a:bodyPr/>
+                    <a:lstStyle/>
+                    <a:p>
+                      <a:r>
+                        <a:rPr lang="pt-BR" b="1">
+                          <a:effectLst/>
+                          <a:latin typeface="Google Sans Text"/>
+                        </a:rPr>
+                        <a:t>GET</a:t>
+                      </a:r>
+                      <a:endParaRPr lang="pt-BR">
+                        <a:effectLst/>
+                        <a:latin typeface="Google Sans Text"/>
+                      </a:endParaRPr>
+                    </a:p>
+                  </a:txBody>
+                  <a:tcPr marL="76200" marR="76200" marT="50800" marB="50800" anchor="ctr">
+                    <a:lnL w="6350" cap="flat" cmpd="sng" algn="ctr">
+                      <a:solidFill>
+                        <a:srgbClr val="C4C7C5"/>
+                      </a:solidFill>
+                      <a:prstDash val="solid"/>
+                      <a:round/>
+                      <a:headEnd type="none" w="med" len="med"/>
+                      <a:tailEnd type="none" w="med" len="med"/>
+                    </a:lnL>
+                    <a:lnR w="6350" cap="flat" cmpd="sng" algn="ctr">
+                      <a:solidFill>
+                        <a:srgbClr val="C4C7C5"/>
+                      </a:solidFill>
+                      <a:prstDash val="solid"/>
+                      <a:round/>
+                      <a:headEnd type="none" w="med" len="med"/>
+                      <a:tailEnd type="none" w="med" len="med"/>
+                    </a:lnR>
+                    <a:lnT w="6350" cap="flat" cmpd="sng" algn="ctr">
+                      <a:solidFill>
+                        <a:srgbClr val="C4C7C5"/>
+                      </a:solidFill>
+                      <a:prstDash val="solid"/>
+                      <a:round/>
+                      <a:headEnd type="none" w="med" len="med"/>
+                      <a:tailEnd type="none" w="med" len="med"/>
+                    </a:lnT>
+                    <a:lnB w="6350" cap="flat" cmpd="sng" algn="ctr">
+                      <a:solidFill>
+                        <a:srgbClr val="C4C7C5"/>
+                      </a:solidFill>
+                      <a:prstDash val="solid"/>
+                      <a:round/>
+                      <a:headEnd type="none" w="med" len="med"/>
+                      <a:tailEnd type="none" w="med" len="med"/>
+                    </a:lnB>
+                  </a:tcPr>
+                </a:tc>
+                <a:tc>
+                  <a:txBody>
+                    <a:bodyPr/>
+                    <a:lstStyle/>
+                    <a:p>
+                      <a:r>
+                        <a:rPr lang="pt-BR" b="1">
+                          <a:effectLst/>
+                          <a:latin typeface="Google Sans Text"/>
+                        </a:rPr>
+                        <a:t>Read</a:t>
+                      </a:r>
+                      <a:r>
+                        <a:rPr lang="pt-BR">
+                          <a:effectLst/>
+                          <a:latin typeface="Google Sans Text"/>
+                        </a:rPr>
+                        <a:t> (Ler)</a:t>
+                      </a:r>
+                    </a:p>
+                  </a:txBody>
+                  <a:tcPr marL="76200" marR="76200" marT="50800" marB="50800" anchor="ctr">
+                    <a:lnL w="6350" cap="flat" cmpd="sng" algn="ctr">
+                      <a:solidFill>
+                        <a:srgbClr val="C4C7C5"/>
+                      </a:solidFill>
+                      <a:prstDash val="solid"/>
+                      <a:round/>
+                      <a:headEnd type="none" w="med" len="med"/>
+                      <a:tailEnd type="none" w="med" len="med"/>
+                    </a:lnL>
+                    <a:lnR w="6350" cap="flat" cmpd="sng" algn="ctr">
+                      <a:solidFill>
+                        <a:srgbClr val="C4C7C5"/>
+                      </a:solidFill>
+                      <a:prstDash val="solid"/>
+                      <a:round/>
+                      <a:headEnd type="none" w="med" len="med"/>
+                      <a:tailEnd type="none" w="med" len="med"/>
+                    </a:lnR>
+                    <a:lnT w="6350" cap="flat" cmpd="sng" algn="ctr">
+                      <a:solidFill>
+                        <a:srgbClr val="C4C7C5"/>
+                      </a:solidFill>
+                      <a:prstDash val="solid"/>
+                      <a:round/>
+                      <a:headEnd type="none" w="med" len="med"/>
+                      <a:tailEnd type="none" w="med" len="med"/>
+                    </a:lnT>
+                    <a:lnB w="6350" cap="flat" cmpd="sng" algn="ctr">
+                      <a:solidFill>
+                        <a:srgbClr val="C4C7C5"/>
+                      </a:solidFill>
+                      <a:prstDash val="solid"/>
+                      <a:round/>
+                      <a:headEnd type="none" w="med" len="med"/>
+                      <a:tailEnd type="none" w="med" len="med"/>
+                    </a:lnB>
+                  </a:tcPr>
+                </a:tc>
+                <a:tc>
+                  <a:txBody>
+                    <a:bodyPr/>
+                    <a:lstStyle/>
+                    <a:p>
+                      <a:r>
+                        <a:rPr lang="pt-BR">
+                          <a:effectLst/>
+                          <a:latin typeface="Google Sans Text"/>
+                        </a:rPr>
+                        <a:t>Busca e recupera informações do servidor sem alterar nada.</a:t>
+                      </a:r>
+                    </a:p>
+                  </a:txBody>
+                  <a:tcPr marL="76200" marR="76200" marT="50800" marB="50800" anchor="ctr">
+                    <a:lnL w="6350" cap="flat" cmpd="sng" algn="ctr">
+                      <a:solidFill>
+                        <a:srgbClr val="C4C7C5"/>
+                      </a:solidFill>
+                      <a:prstDash val="solid"/>
+                      <a:round/>
+                      <a:headEnd type="none" w="med" len="med"/>
+                      <a:tailEnd type="none" w="med" len="med"/>
+                    </a:lnL>
+                    <a:lnR w="6350" cap="flat" cmpd="sng" algn="ctr">
+                      <a:solidFill>
+                        <a:srgbClr val="C4C7C5"/>
+                      </a:solidFill>
+                      <a:prstDash val="solid"/>
+                      <a:round/>
+                      <a:headEnd type="none" w="med" len="med"/>
+                      <a:tailEnd type="none" w="med" len="med"/>
+                    </a:lnR>
+                    <a:lnT w="6350" cap="flat" cmpd="sng" algn="ctr">
+                      <a:solidFill>
+                        <a:srgbClr val="C4C7C5"/>
+                      </a:solidFill>
+                      <a:prstDash val="solid"/>
+                      <a:round/>
+                      <a:headEnd type="none" w="med" len="med"/>
+                      <a:tailEnd type="none" w="med" len="med"/>
+                    </a:lnT>
+                    <a:lnB w="6350" cap="flat" cmpd="sng" algn="ctr">
+                      <a:solidFill>
+                        <a:srgbClr val="C4C7C5"/>
+                      </a:solidFill>
+                      <a:prstDash val="solid"/>
+                      <a:round/>
+                      <a:headEnd type="none" w="med" len="med"/>
+                      <a:tailEnd type="none" w="med" len="med"/>
+                    </a:lnB>
+                  </a:tcPr>
+                </a:tc>
+                <a:extLst>
+                  <a:ext uri="{0D108BD9-81ED-4DB2-BD59-A6C34878D82A}">
+                    <a16:rowId xmlns:a16="http://schemas.microsoft.com/office/drawing/2014/main" val="3492687781"/>
+                  </a:ext>
+                </a:extLst>
+              </a:tr>
+              <a:tr h="0">
+                <a:tc>
+                  <a:txBody>
+                    <a:bodyPr/>
+                    <a:lstStyle/>
+                    <a:p>
+                      <a:r>
+                        <a:rPr lang="pt-BR" b="1" dirty="0">
+                          <a:effectLst/>
+                          <a:latin typeface="Google Sans Text"/>
+                        </a:rPr>
+                        <a:t>POST</a:t>
+                      </a:r>
+                      <a:endParaRPr lang="pt-BR" dirty="0">
+                        <a:effectLst/>
+                        <a:latin typeface="Google Sans Text"/>
+                      </a:endParaRPr>
+                    </a:p>
+                  </a:txBody>
+                  <a:tcPr marL="76200" marR="76200" marT="50800" marB="50800" anchor="ctr">
+                    <a:lnL w="6350" cap="flat" cmpd="sng" algn="ctr">
+                      <a:solidFill>
+                        <a:srgbClr val="C4C7C5"/>
+                      </a:solidFill>
+                      <a:prstDash val="solid"/>
+                      <a:round/>
+                      <a:headEnd type="none" w="med" len="med"/>
+                      <a:tailEnd type="none" w="med" len="med"/>
+                    </a:lnL>
+                    <a:lnR w="6350" cap="flat" cmpd="sng" algn="ctr">
+                      <a:solidFill>
+                        <a:srgbClr val="C4C7C5"/>
+                      </a:solidFill>
+                      <a:prstDash val="solid"/>
+                      <a:round/>
+                      <a:headEnd type="none" w="med" len="med"/>
+                      <a:tailEnd type="none" w="med" len="med"/>
+                    </a:lnR>
+                    <a:lnT w="6350" cap="flat" cmpd="sng" algn="ctr">
+                      <a:solidFill>
+                        <a:srgbClr val="C4C7C5"/>
+                      </a:solidFill>
+                      <a:prstDash val="solid"/>
+                      <a:round/>
+                      <a:headEnd type="none" w="med" len="med"/>
+                      <a:tailEnd type="none" w="med" len="med"/>
+                    </a:lnT>
+                    <a:lnB w="6350" cap="flat" cmpd="sng" algn="ctr">
+                      <a:solidFill>
+                        <a:srgbClr val="C4C7C5"/>
+                      </a:solidFill>
+                      <a:prstDash val="solid"/>
+                      <a:round/>
+                      <a:headEnd type="none" w="med" len="med"/>
+                      <a:tailEnd type="none" w="med" len="med"/>
+                    </a:lnB>
+                  </a:tcPr>
+                </a:tc>
+                <a:tc>
+                  <a:txBody>
+                    <a:bodyPr/>
+                    <a:lstStyle/>
+                    <a:p>
+                      <a:r>
+                        <a:rPr lang="pt-BR" b="1">
+                          <a:effectLst/>
+                          <a:latin typeface="Google Sans Text"/>
+                        </a:rPr>
+                        <a:t>Create</a:t>
+                      </a:r>
+                      <a:r>
+                        <a:rPr lang="pt-BR">
+                          <a:effectLst/>
+                          <a:latin typeface="Google Sans Text"/>
+                        </a:rPr>
+                        <a:t> (Criar)</a:t>
+                      </a:r>
+                    </a:p>
+                  </a:txBody>
+                  <a:tcPr marL="76200" marR="76200" marT="50800" marB="50800" anchor="ctr">
+                    <a:lnL w="6350" cap="flat" cmpd="sng" algn="ctr">
+                      <a:solidFill>
+                        <a:srgbClr val="C4C7C5"/>
+                      </a:solidFill>
+                      <a:prstDash val="solid"/>
+                      <a:round/>
+                      <a:headEnd type="none" w="med" len="med"/>
+                      <a:tailEnd type="none" w="med" len="med"/>
+                    </a:lnL>
+                    <a:lnR w="6350" cap="flat" cmpd="sng" algn="ctr">
+                      <a:solidFill>
+                        <a:srgbClr val="C4C7C5"/>
+                      </a:solidFill>
+                      <a:prstDash val="solid"/>
+                      <a:round/>
+                      <a:headEnd type="none" w="med" len="med"/>
+                      <a:tailEnd type="none" w="med" len="med"/>
+                    </a:lnR>
+                    <a:lnT w="6350" cap="flat" cmpd="sng" algn="ctr">
+                      <a:solidFill>
+                        <a:srgbClr val="C4C7C5"/>
+                      </a:solidFill>
+                      <a:prstDash val="solid"/>
+                      <a:round/>
+                      <a:headEnd type="none" w="med" len="med"/>
+                      <a:tailEnd type="none" w="med" len="med"/>
+                    </a:lnT>
+                    <a:lnB w="6350" cap="flat" cmpd="sng" algn="ctr">
+                      <a:solidFill>
+                        <a:srgbClr val="C4C7C5"/>
+                      </a:solidFill>
+                      <a:prstDash val="solid"/>
+                      <a:round/>
+                      <a:headEnd type="none" w="med" len="med"/>
+                      <a:tailEnd type="none" w="med" len="med"/>
+                    </a:lnB>
+                  </a:tcPr>
+                </a:tc>
+                <a:tc>
+                  <a:txBody>
+                    <a:bodyPr/>
+                    <a:lstStyle/>
+                    <a:p>
+                      <a:r>
+                        <a:rPr lang="pt-BR">
+                          <a:effectLst/>
+                          <a:latin typeface="Google Sans Text"/>
+                        </a:rPr>
+                        <a:t>Envia um novo conjunto de dados no corpo da requisição para cadastrar um registro.</a:t>
+                      </a:r>
+                    </a:p>
+                  </a:txBody>
+                  <a:tcPr marL="76200" marR="76200" marT="50800" marB="50800" anchor="ctr">
+                    <a:lnL w="6350" cap="flat" cmpd="sng" algn="ctr">
+                      <a:solidFill>
+                        <a:srgbClr val="C4C7C5"/>
+                      </a:solidFill>
+                      <a:prstDash val="solid"/>
+                      <a:round/>
+                      <a:headEnd type="none" w="med" len="med"/>
+                      <a:tailEnd type="none" w="med" len="med"/>
+                    </a:lnL>
+                    <a:lnR w="6350" cap="flat" cmpd="sng" algn="ctr">
+                      <a:solidFill>
+                        <a:srgbClr val="C4C7C5"/>
+                      </a:solidFill>
+                      <a:prstDash val="solid"/>
+                      <a:round/>
+                      <a:headEnd type="none" w="med" len="med"/>
+                      <a:tailEnd type="none" w="med" len="med"/>
+                    </a:lnR>
+                    <a:lnT w="6350" cap="flat" cmpd="sng" algn="ctr">
+                      <a:solidFill>
+                        <a:srgbClr val="C4C7C5"/>
+                      </a:solidFill>
+                      <a:prstDash val="solid"/>
+                      <a:round/>
+                      <a:headEnd type="none" w="med" len="med"/>
+                      <a:tailEnd type="none" w="med" len="med"/>
+                    </a:lnT>
+                    <a:lnB w="6350" cap="flat" cmpd="sng" algn="ctr">
+                      <a:solidFill>
+                        <a:srgbClr val="C4C7C5"/>
+                      </a:solidFill>
+                      <a:prstDash val="solid"/>
+                      <a:round/>
+                      <a:headEnd type="none" w="med" len="med"/>
+                      <a:tailEnd type="none" w="med" len="med"/>
+                    </a:lnB>
+                  </a:tcPr>
+                </a:tc>
+                <a:extLst>
+                  <a:ext uri="{0D108BD9-81ED-4DB2-BD59-A6C34878D82A}">
+                    <a16:rowId xmlns:a16="http://schemas.microsoft.com/office/drawing/2014/main" val="3203903154"/>
+                  </a:ext>
+                </a:extLst>
+              </a:tr>
+              <a:tr h="0">
+                <a:tc>
+                  <a:txBody>
+                    <a:bodyPr/>
+                    <a:lstStyle/>
+                    <a:p>
+                      <a:r>
+                        <a:rPr lang="pt-BR" b="1">
+                          <a:effectLst/>
+                          <a:latin typeface="Google Sans Text"/>
+                        </a:rPr>
+                        <a:t>PUT</a:t>
+                      </a:r>
+                      <a:endParaRPr lang="pt-BR">
+                        <a:effectLst/>
+                        <a:latin typeface="Google Sans Text"/>
+                      </a:endParaRPr>
+                    </a:p>
+                  </a:txBody>
+                  <a:tcPr marL="76200" marR="76200" marT="50800" marB="50800" anchor="ctr">
+                    <a:lnL w="6350" cap="flat" cmpd="sng" algn="ctr">
+                      <a:solidFill>
+                        <a:srgbClr val="C4C7C5"/>
+                      </a:solidFill>
+                      <a:prstDash val="solid"/>
+                      <a:round/>
+                      <a:headEnd type="none" w="med" len="med"/>
+                      <a:tailEnd type="none" w="med" len="med"/>
+                    </a:lnL>
+                    <a:lnR w="6350" cap="flat" cmpd="sng" algn="ctr">
+                      <a:solidFill>
+                        <a:srgbClr val="C4C7C5"/>
+                      </a:solidFill>
+                      <a:prstDash val="solid"/>
+                      <a:round/>
+                      <a:headEnd type="none" w="med" len="med"/>
+                      <a:tailEnd type="none" w="med" len="med"/>
+                    </a:lnR>
+                    <a:lnT w="6350" cap="flat" cmpd="sng" algn="ctr">
+                      <a:solidFill>
+                        <a:srgbClr val="C4C7C5"/>
+                      </a:solidFill>
+                      <a:prstDash val="solid"/>
+                      <a:round/>
+                      <a:headEnd type="none" w="med" len="med"/>
+                      <a:tailEnd type="none" w="med" len="med"/>
+                    </a:lnT>
+                    <a:lnB w="6350" cap="flat" cmpd="sng" algn="ctr">
+                      <a:solidFill>
+                        <a:srgbClr val="C4C7C5"/>
+                      </a:solidFill>
+                      <a:prstDash val="solid"/>
+                      <a:round/>
+                      <a:headEnd type="none" w="med" len="med"/>
+                      <a:tailEnd type="none" w="med" len="med"/>
+                    </a:lnB>
+                  </a:tcPr>
+                </a:tc>
+                <a:tc>
+                  <a:txBody>
+                    <a:bodyPr/>
+                    <a:lstStyle/>
+                    <a:p>
+                      <a:r>
+                        <a:rPr lang="pt-BR" b="1">
+                          <a:effectLst/>
+                          <a:latin typeface="Google Sans Text"/>
+                        </a:rPr>
+                        <a:t>Update</a:t>
+                      </a:r>
+                      <a:r>
+                        <a:rPr lang="pt-BR">
+                          <a:effectLst/>
+                          <a:latin typeface="Google Sans Text"/>
+                        </a:rPr>
+                        <a:t> (Atualizar)</a:t>
+                      </a:r>
+                    </a:p>
+                  </a:txBody>
+                  <a:tcPr marL="76200" marR="76200" marT="50800" marB="50800" anchor="ctr">
+                    <a:lnL w="6350" cap="flat" cmpd="sng" algn="ctr">
+                      <a:solidFill>
+                        <a:srgbClr val="C4C7C5"/>
+                      </a:solidFill>
+                      <a:prstDash val="solid"/>
+                      <a:round/>
+                      <a:headEnd type="none" w="med" len="med"/>
+                      <a:tailEnd type="none" w="med" len="med"/>
+                    </a:lnL>
+                    <a:lnR w="6350" cap="flat" cmpd="sng" algn="ctr">
+                      <a:solidFill>
+                        <a:srgbClr val="C4C7C5"/>
+                      </a:solidFill>
+                      <a:prstDash val="solid"/>
+                      <a:round/>
+                      <a:headEnd type="none" w="med" len="med"/>
+                      <a:tailEnd type="none" w="med" len="med"/>
+                    </a:lnR>
+                    <a:lnT w="6350" cap="flat" cmpd="sng" algn="ctr">
+                      <a:solidFill>
+                        <a:srgbClr val="C4C7C5"/>
+                      </a:solidFill>
+                      <a:prstDash val="solid"/>
+                      <a:round/>
+                      <a:headEnd type="none" w="med" len="med"/>
+                      <a:tailEnd type="none" w="med" len="med"/>
+                    </a:lnT>
+                    <a:lnB w="6350" cap="flat" cmpd="sng" algn="ctr">
+                      <a:solidFill>
+                        <a:srgbClr val="C4C7C5"/>
+                      </a:solidFill>
+                      <a:prstDash val="solid"/>
+                      <a:round/>
+                      <a:headEnd type="none" w="med" len="med"/>
+                      <a:tailEnd type="none" w="med" len="med"/>
+                    </a:lnB>
+                  </a:tcPr>
+                </a:tc>
+                <a:tc>
+                  <a:txBody>
+                    <a:bodyPr/>
+                    <a:lstStyle/>
+                    <a:p>
+                      <a:r>
+                        <a:rPr lang="pt-BR">
+                          <a:effectLst/>
+                          <a:latin typeface="Google Sans Text"/>
+                        </a:rPr>
+                        <a:t>Substitui ou atualiza um registro existente passando os novos dados.</a:t>
+                      </a:r>
+                    </a:p>
+                  </a:txBody>
+                  <a:tcPr marL="76200" marR="76200" marT="50800" marB="50800" anchor="ctr">
+                    <a:lnL w="6350" cap="flat" cmpd="sng" algn="ctr">
+                      <a:solidFill>
+                        <a:srgbClr val="C4C7C5"/>
+                      </a:solidFill>
+                      <a:prstDash val="solid"/>
+                      <a:round/>
+                      <a:headEnd type="none" w="med" len="med"/>
+                      <a:tailEnd type="none" w="med" len="med"/>
+                    </a:lnL>
+                    <a:lnR w="6350" cap="flat" cmpd="sng" algn="ctr">
+                      <a:solidFill>
+                        <a:srgbClr val="C4C7C5"/>
+                      </a:solidFill>
+                      <a:prstDash val="solid"/>
+                      <a:round/>
+                      <a:headEnd type="none" w="med" len="med"/>
+                      <a:tailEnd type="none" w="med" len="med"/>
+                    </a:lnR>
+                    <a:lnT w="6350" cap="flat" cmpd="sng" algn="ctr">
+                      <a:solidFill>
+                        <a:srgbClr val="C4C7C5"/>
+                      </a:solidFill>
+                      <a:prstDash val="solid"/>
+                      <a:round/>
+                      <a:headEnd type="none" w="med" len="med"/>
+                      <a:tailEnd type="none" w="med" len="med"/>
+                    </a:lnT>
+                    <a:lnB w="6350" cap="flat" cmpd="sng" algn="ctr">
+                      <a:solidFill>
+                        <a:srgbClr val="C4C7C5"/>
+                      </a:solidFill>
+                      <a:prstDash val="solid"/>
+                      <a:round/>
+                      <a:headEnd type="none" w="med" len="med"/>
+                      <a:tailEnd type="none" w="med" len="med"/>
+                    </a:lnB>
+                  </a:tcPr>
+                </a:tc>
+                <a:extLst>
+                  <a:ext uri="{0D108BD9-81ED-4DB2-BD59-A6C34878D82A}">
+                    <a16:rowId xmlns:a16="http://schemas.microsoft.com/office/drawing/2014/main" val="1207068973"/>
+                  </a:ext>
+                </a:extLst>
+              </a:tr>
+              <a:tr h="0">
+                <a:tc>
+                  <a:txBody>
+                    <a:bodyPr/>
+                    <a:lstStyle/>
+                    <a:p>
+                      <a:r>
+                        <a:rPr lang="pt-BR" b="1">
+                          <a:effectLst/>
+                          <a:latin typeface="Google Sans Text"/>
+                        </a:rPr>
+                        <a:t>DELETE</a:t>
+                      </a:r>
+                      <a:endParaRPr lang="pt-BR">
+                        <a:effectLst/>
+                        <a:latin typeface="Google Sans Text"/>
+                      </a:endParaRPr>
+                    </a:p>
+                  </a:txBody>
+                  <a:tcPr marL="76200" marR="76200" marT="50800" marB="50800" anchor="ctr">
+                    <a:lnL w="6350" cap="flat" cmpd="sng" algn="ctr">
+                      <a:solidFill>
+                        <a:srgbClr val="C4C7C5"/>
+                      </a:solidFill>
+                      <a:prstDash val="solid"/>
+                      <a:round/>
+                      <a:headEnd type="none" w="med" len="med"/>
+                      <a:tailEnd type="none" w="med" len="med"/>
+                    </a:lnL>
+                    <a:lnR w="6350" cap="flat" cmpd="sng" algn="ctr">
+                      <a:solidFill>
+                        <a:srgbClr val="C4C7C5"/>
+                      </a:solidFill>
+                      <a:prstDash val="solid"/>
+                      <a:round/>
+                      <a:headEnd type="none" w="med" len="med"/>
+                      <a:tailEnd type="none" w="med" len="med"/>
+                    </a:lnR>
+                    <a:lnT w="6350" cap="flat" cmpd="sng" algn="ctr">
+                      <a:solidFill>
+                        <a:srgbClr val="C4C7C5"/>
+                      </a:solidFill>
+                      <a:prstDash val="solid"/>
+                      <a:round/>
+                      <a:headEnd type="none" w="med" len="med"/>
+                      <a:tailEnd type="none" w="med" len="med"/>
+                    </a:lnT>
+                    <a:lnB w="6350" cap="flat" cmpd="sng" algn="ctr">
+                      <a:solidFill>
+                        <a:srgbClr val="C4C7C5"/>
+                      </a:solidFill>
+                      <a:prstDash val="solid"/>
+                      <a:round/>
+                      <a:headEnd type="none" w="med" len="med"/>
+                      <a:tailEnd type="none" w="med" len="med"/>
+                    </a:lnB>
+                  </a:tcPr>
+                </a:tc>
+                <a:tc>
+                  <a:txBody>
+                    <a:bodyPr/>
+                    <a:lstStyle/>
+                    <a:p>
+                      <a:r>
+                        <a:rPr lang="pt-BR" b="1">
+                          <a:effectLst/>
+                          <a:latin typeface="Google Sans Text"/>
+                        </a:rPr>
+                        <a:t>Delete</a:t>
+                      </a:r>
+                      <a:r>
+                        <a:rPr lang="pt-BR">
+                          <a:effectLst/>
+                          <a:latin typeface="Google Sans Text"/>
+                        </a:rPr>
+                        <a:t> (Excluir)</a:t>
+                      </a:r>
+                    </a:p>
+                  </a:txBody>
+                  <a:tcPr marL="76200" marR="76200" marT="50800" marB="50800" anchor="ctr">
+                    <a:lnL w="6350" cap="flat" cmpd="sng" algn="ctr">
+                      <a:solidFill>
+                        <a:srgbClr val="C4C7C5"/>
+                      </a:solidFill>
+                      <a:prstDash val="solid"/>
+                      <a:round/>
+                      <a:headEnd type="none" w="med" len="med"/>
+                      <a:tailEnd type="none" w="med" len="med"/>
+                    </a:lnL>
+                    <a:lnR w="6350" cap="flat" cmpd="sng" algn="ctr">
+                      <a:solidFill>
+                        <a:srgbClr val="C4C7C5"/>
+                      </a:solidFill>
+                      <a:prstDash val="solid"/>
+                      <a:round/>
+                      <a:headEnd type="none" w="med" len="med"/>
+                      <a:tailEnd type="none" w="med" len="med"/>
+                    </a:lnR>
+                    <a:lnT w="6350" cap="flat" cmpd="sng" algn="ctr">
+                      <a:solidFill>
+                        <a:srgbClr val="C4C7C5"/>
+                      </a:solidFill>
+                      <a:prstDash val="solid"/>
+                      <a:round/>
+                      <a:headEnd type="none" w="med" len="med"/>
+                      <a:tailEnd type="none" w="med" len="med"/>
+                    </a:lnT>
+                    <a:lnB w="6350" cap="flat" cmpd="sng" algn="ctr">
+                      <a:solidFill>
+                        <a:srgbClr val="C4C7C5"/>
+                      </a:solidFill>
+                      <a:prstDash val="solid"/>
+                      <a:round/>
+                      <a:headEnd type="none" w="med" len="med"/>
+                      <a:tailEnd type="none" w="med" len="med"/>
+                    </a:lnB>
+                  </a:tcPr>
+                </a:tc>
+                <a:tc>
+                  <a:txBody>
+                    <a:bodyPr/>
+                    <a:lstStyle/>
+                    <a:p>
+                      <a:r>
+                        <a:rPr lang="pt-BR" dirty="0">
+                          <a:effectLst/>
+                          <a:latin typeface="Google Sans Text"/>
+                        </a:rPr>
+                        <a:t>Remove um registro específico do servidor com base no seu ID.</a:t>
+                      </a:r>
+                    </a:p>
+                  </a:txBody>
+                  <a:tcPr marL="76200" marR="76200" marT="50800" marB="50800" anchor="ctr">
+                    <a:lnL w="6350" cap="flat" cmpd="sng" algn="ctr">
+                      <a:solidFill>
+                        <a:srgbClr val="C4C7C5"/>
+                      </a:solidFill>
+                      <a:prstDash val="solid"/>
+                      <a:round/>
+                      <a:headEnd type="none" w="med" len="med"/>
+                      <a:tailEnd type="none" w="med" len="med"/>
+                    </a:lnL>
+                    <a:lnR w="6350" cap="flat" cmpd="sng" algn="ctr">
+                      <a:solidFill>
+                        <a:srgbClr val="C4C7C5"/>
+                      </a:solidFill>
+                      <a:prstDash val="solid"/>
+                      <a:round/>
+                      <a:headEnd type="none" w="med" len="med"/>
+                      <a:tailEnd type="none" w="med" len="med"/>
+                    </a:lnR>
+                    <a:lnT w="6350" cap="flat" cmpd="sng" algn="ctr">
+                      <a:solidFill>
+                        <a:srgbClr val="C4C7C5"/>
+                      </a:solidFill>
+                      <a:prstDash val="solid"/>
+                      <a:round/>
+                      <a:headEnd type="none" w="med" len="med"/>
+                      <a:tailEnd type="none" w="med" len="med"/>
+                    </a:lnT>
+                    <a:lnB w="6350" cap="flat" cmpd="sng" algn="ctr">
+                      <a:solidFill>
+                        <a:srgbClr val="C4C7C5"/>
+                      </a:solidFill>
+                      <a:prstDash val="solid"/>
+                      <a:round/>
+                      <a:headEnd type="none" w="med" len="med"/>
+                      <a:tailEnd type="none" w="med" len="med"/>
+                    </a:lnB>
+                  </a:tcPr>
+                </a:tc>
+                <a:extLst>
+                  <a:ext uri="{0D108BD9-81ED-4DB2-BD59-A6C34878D82A}">
+                    <a16:rowId xmlns:a16="http://schemas.microsoft.com/office/drawing/2014/main" val="3483457638"/>
+                  </a:ext>
+                </a:extLst>
+              </a:tr>
+            </a:tbl>
+          </a:graphicData>
+        </a:graphic>
+      </p:graphicFrame>
+      <p:sp>
+        <p:nvSpPr>
+          <p:cNvPr id="5" name="Rectangle 1">
+            <a:extLst>
+              <a:ext uri="{FF2B5EF4-FFF2-40B4-BE49-F238E27FC236}">
+                <a16:creationId xmlns:a16="http://schemas.microsoft.com/office/drawing/2014/main" id="{9911C36A-AE8F-4DBB-85EA-AF764877FC39}"/>
+              </a:ext>
+            </a:extLst>
+          </p:cNvPr>
+          <p:cNvSpPr>
+            <a:spLocks noChangeArrowheads="1"/>
+          </p:cNvSpPr>
+          <p:nvPr/>
+        </p:nvSpPr>
+        <p:spPr bwMode="auto">
+          <a:xfrm>
+            <a:off x="10740" y="550372"/>
+            <a:ext cx="12181259" cy="2477601"/>
+          </a:xfrm>
+          <a:prstGeom prst="rect">
+            <a:avLst/>
+          </a:prstGeom>
+          <a:noFill/>
+          <a:ln>
+            <a:noFill/>
+          </a:ln>
+          <a:effectLst/>
+          <a:extLst>
+            <a:ext uri="{909E8E84-426E-40DD-AFC4-6F175D3DCCD1}">
+              <a14:hiddenFill xmlns:a14="http://schemas.microsoft.com/office/drawing/2010/main">
+                <a:solidFill>
+                  <a:schemeClr val="accent1"/>
+                </a:solidFill>
+              </a14:hiddenFill>
+            </a:ext>
+            <a:ext uri="{91240B29-F687-4F45-9708-019B960494DF}">
+              <a14:hiddenLine xmlns:a14="http://schemas.microsoft.com/office/drawing/2010/main" w="9525">
+                <a:solidFill>
+                  <a:schemeClr val="tx1"/>
+                </a:solidFill>
+                <a:miter lim="800000"/>
+                <a:headEnd/>
+                <a:tailEnd/>
+              </a14:hiddenLine>
+            </a:ext>
+            <a:ext uri="{AF507438-7753-43E0-B8FC-AC1667EBCBE1}">
+              <a14:hiddenEffects xmlns:a14="http://schemas.microsoft.com/office/drawing/2010/main">
+                <a:effectLst>
+                  <a:outerShdw dist="35921" dir="2700000" algn="ctr" rotWithShape="0">
+                    <a:schemeClr val="bg2"/>
+                  </a:outerShdw>
+                </a:effectLst>
+              </a14:hiddenEffects>
+            </a:ext>
+          </a:extLst>
+        </p:spPr>
+        <p:txBody>
+          <a:bodyPr vert="horz" wrap="square" lIns="91440" tIns="0" rIns="91440" bIns="45720" numCol="1" anchor="ctr" anchorCtr="0" compatLnSpc="1">
+            <a:prstTxWarp prst="textNoShape">
+              <a:avLst/>
+            </a:prstTxWarp>
+            <a:spAutoFit/>
+          </a:bodyPr>
+          <a:lstStyle/>
+          <a:p>
+            <a:pPr marL="0" marR="0" lvl="0" indent="0" algn="l" defTabSz="914400" rtl="0" eaLnBrk="0" fontAlgn="base" latinLnBrk="0" hangingPunct="0">
+              <a:lnSpc>
+                <a:spcPct val="100000"/>
+              </a:lnSpc>
+              <a:spcBef>
+                <a:spcPct val="0"/>
+              </a:spcBef>
+              <a:spcAft>
+                <a:spcPct val="0"/>
+              </a:spcAft>
+              <a:buClrTx/>
+              <a:buSzTx/>
+              <a:buFontTx/>
+              <a:buNone/>
+              <a:tabLst/>
+            </a:pPr>
+            <a:r>
+              <a:rPr kumimoji="0" lang="pt-BR" altLang="pt-BR" sz="2000" b="1" i="0" u="none" strike="noStrike" cap="none" normalizeH="0" baseline="0" dirty="0">
+                <a:ln>
+                  <a:noFill/>
+                </a:ln>
+                <a:solidFill>
+                  <a:schemeClr val="tx1"/>
+                </a:solidFill>
+                <a:effectLst/>
+                <a:latin typeface="Times New Roman" panose="02020603050405020304" pitchFamily="18" charset="0"/>
+                <a:cs typeface="Times New Roman" panose="02020603050405020304" pitchFamily="18" charset="0"/>
+              </a:rPr>
+              <a:t>Resumo dos outros protocolos listados na imagem para referência de aula:</a:t>
+            </a:r>
+            <a:br>
+              <a:rPr kumimoji="0" lang="pt-BR" altLang="pt-BR" sz="2000" b="1" i="0" u="none" strike="noStrike" cap="none" normalizeH="0" baseline="0" dirty="0">
+                <a:ln>
+                  <a:noFill/>
+                </a:ln>
+                <a:solidFill>
+                  <a:schemeClr val="tx1"/>
+                </a:solidFill>
+                <a:effectLst/>
+                <a:latin typeface="Times New Roman" panose="02020603050405020304" pitchFamily="18" charset="0"/>
+                <a:cs typeface="Times New Roman" panose="02020603050405020304" pitchFamily="18" charset="0"/>
+              </a:rPr>
+            </a:br>
+            <a:endParaRPr kumimoji="0" lang="pt-BR" altLang="pt-BR" sz="2000" b="0" i="0" u="none" strike="noStrike" cap="none" normalizeH="0" baseline="0" dirty="0">
+              <a:ln>
+                <a:noFill/>
+              </a:ln>
+              <a:solidFill>
+                <a:schemeClr val="tx1"/>
+              </a:solidFill>
+              <a:effectLst/>
+              <a:latin typeface="Times New Roman" panose="02020603050405020304" pitchFamily="18" charset="0"/>
+              <a:cs typeface="Times New Roman" panose="02020603050405020304" pitchFamily="18" charset="0"/>
+            </a:endParaRPr>
+          </a:p>
+          <a:p>
+            <a:pPr marL="0" marR="0" lvl="0" indent="0" algn="l" defTabSz="914400" rtl="0" eaLnBrk="0" fontAlgn="base" latinLnBrk="0" hangingPunct="0">
+              <a:lnSpc>
+                <a:spcPct val="100000"/>
+              </a:lnSpc>
+              <a:spcBef>
+                <a:spcPct val="0"/>
+              </a:spcBef>
+              <a:spcAft>
+                <a:spcPct val="0"/>
+              </a:spcAft>
+              <a:buClrTx/>
+              <a:buSzTx/>
+              <a:buFontTx/>
+              <a:buChar char="•"/>
+              <a:tabLst/>
+            </a:pPr>
+            <a:r>
+              <a:rPr kumimoji="0" lang="pt-BR" altLang="pt-BR" sz="2000" b="1" i="0" u="none" strike="noStrike" cap="none" normalizeH="0" baseline="0" dirty="0">
+                <a:ln>
+                  <a:noFill/>
+                </a:ln>
+                <a:solidFill>
+                  <a:schemeClr val="tx1"/>
+                </a:solidFill>
+                <a:effectLst/>
+                <a:latin typeface="Times New Roman" panose="02020603050405020304" pitchFamily="18" charset="0"/>
+                <a:cs typeface="Times New Roman" panose="02020603050405020304" pitchFamily="18" charset="0"/>
+              </a:rPr>
+              <a:t>SOAP:</a:t>
+            </a:r>
+            <a:r>
+              <a:rPr kumimoji="0" lang="pt-BR" altLang="pt-BR" sz="2000" b="0" i="0" u="none" strike="noStrike" cap="none" normalizeH="0" baseline="0" dirty="0">
+                <a:ln>
+                  <a:noFill/>
+                </a:ln>
+                <a:solidFill>
+                  <a:schemeClr val="tx1"/>
+                </a:solidFill>
+                <a:effectLst/>
+                <a:latin typeface="Times New Roman" panose="02020603050405020304" pitchFamily="18" charset="0"/>
+                <a:cs typeface="Times New Roman" panose="02020603050405020304" pitchFamily="18" charset="0"/>
+              </a:rPr>
+              <a:t> Não foca nesses verbos HTTP de forma semântica; utiliza mensagens em formato </a:t>
+            </a:r>
+            <a:r>
+              <a:rPr kumimoji="0" lang="pt-BR" altLang="pt-BR" sz="2000" b="1" i="0" u="none" strike="noStrike" cap="none" normalizeH="0" baseline="0" dirty="0">
+                <a:ln>
+                  <a:noFill/>
+                </a:ln>
+                <a:solidFill>
+                  <a:schemeClr val="tx1"/>
+                </a:solidFill>
+                <a:effectLst/>
+                <a:latin typeface="Times New Roman" panose="02020603050405020304" pitchFamily="18" charset="0"/>
+                <a:cs typeface="Times New Roman" panose="02020603050405020304" pitchFamily="18" charset="0"/>
+              </a:rPr>
+              <a:t>XML</a:t>
+            </a:r>
+            <a:r>
+              <a:rPr kumimoji="0" lang="pt-BR" altLang="pt-BR" sz="2000" b="0" i="0" u="none" strike="noStrike" cap="none" normalizeH="0" baseline="0" dirty="0">
+                <a:ln>
+                  <a:noFill/>
+                </a:ln>
+                <a:solidFill>
+                  <a:schemeClr val="tx1"/>
+                </a:solidFill>
+                <a:effectLst/>
+                <a:latin typeface="Times New Roman" panose="02020603050405020304" pitchFamily="18" charset="0"/>
+                <a:cs typeface="Times New Roman" panose="02020603050405020304" pitchFamily="18" charset="0"/>
+              </a:rPr>
+              <a:t> envelopadas.</a:t>
+            </a:r>
+          </a:p>
+          <a:p>
+            <a:pPr marL="0" marR="0" lvl="0" indent="0" algn="l" defTabSz="914400" rtl="0" eaLnBrk="0" fontAlgn="base" latinLnBrk="0" hangingPunct="0">
+              <a:lnSpc>
+                <a:spcPct val="100000"/>
+              </a:lnSpc>
+              <a:spcBef>
+                <a:spcPct val="0"/>
+              </a:spcBef>
+              <a:spcAft>
+                <a:spcPct val="0"/>
+              </a:spcAft>
+              <a:buClrTx/>
+              <a:buSzTx/>
+              <a:buFontTx/>
+              <a:buChar char="•"/>
+              <a:tabLst/>
+            </a:pPr>
+            <a:r>
+              <a:rPr kumimoji="0" lang="pt-BR" altLang="pt-BR" sz="2000" b="1" i="0" u="none" strike="noStrike" cap="none" normalizeH="0" baseline="0" dirty="0" err="1">
+                <a:ln>
+                  <a:noFill/>
+                </a:ln>
+                <a:solidFill>
+                  <a:schemeClr val="tx1"/>
+                </a:solidFill>
+                <a:effectLst/>
+                <a:latin typeface="Times New Roman" panose="02020603050405020304" pitchFamily="18" charset="0"/>
+                <a:cs typeface="Times New Roman" panose="02020603050405020304" pitchFamily="18" charset="0"/>
+              </a:rPr>
+              <a:t>GraphQL</a:t>
+            </a:r>
+            <a:r>
+              <a:rPr kumimoji="0" lang="pt-BR" altLang="pt-BR" sz="2000" b="1" i="0" u="none" strike="noStrike" cap="none" normalizeH="0" baseline="0" dirty="0">
+                <a:ln>
+                  <a:noFill/>
+                </a:ln>
+                <a:solidFill>
+                  <a:schemeClr val="tx1"/>
+                </a:solidFill>
+                <a:effectLst/>
+                <a:latin typeface="Times New Roman" panose="02020603050405020304" pitchFamily="18" charset="0"/>
+                <a:cs typeface="Times New Roman" panose="02020603050405020304" pitchFamily="18" charset="0"/>
+              </a:rPr>
+              <a:t>:</a:t>
+            </a:r>
+            <a:r>
+              <a:rPr kumimoji="0" lang="pt-BR" altLang="pt-BR" sz="2000" b="0" i="0" u="none" strike="noStrike" cap="none" normalizeH="0" baseline="0" dirty="0">
+                <a:ln>
+                  <a:noFill/>
+                </a:ln>
+                <a:solidFill>
+                  <a:schemeClr val="tx1"/>
+                </a:solidFill>
+                <a:effectLst/>
+                <a:latin typeface="Times New Roman" panose="02020603050405020304" pitchFamily="18" charset="0"/>
+                <a:cs typeface="Times New Roman" panose="02020603050405020304" pitchFamily="18" charset="0"/>
+              </a:rPr>
+              <a:t> Utiliza praticamente apenas requisições </a:t>
+            </a:r>
+            <a:r>
+              <a:rPr kumimoji="0" lang="pt-BR" altLang="pt-BR" sz="2000" b="1" i="0" u="none" strike="noStrike" cap="none" normalizeH="0" baseline="0" dirty="0">
+                <a:ln>
+                  <a:noFill/>
+                </a:ln>
+                <a:solidFill>
+                  <a:schemeClr val="tx1"/>
+                </a:solidFill>
+                <a:effectLst/>
+                <a:latin typeface="Times New Roman" panose="02020603050405020304" pitchFamily="18" charset="0"/>
+                <a:cs typeface="Times New Roman" panose="02020603050405020304" pitchFamily="18" charset="0"/>
+              </a:rPr>
+              <a:t>POST</a:t>
+            </a:r>
+            <a:r>
+              <a:rPr kumimoji="0" lang="pt-BR" altLang="pt-BR" sz="2000" b="0" i="0" u="none" strike="noStrike" cap="none" normalizeH="0" baseline="0" dirty="0">
+                <a:ln>
+                  <a:noFill/>
+                </a:ln>
+                <a:solidFill>
+                  <a:schemeClr val="tx1"/>
+                </a:solidFill>
+                <a:effectLst/>
+                <a:latin typeface="Times New Roman" panose="02020603050405020304" pitchFamily="18" charset="0"/>
+                <a:cs typeface="Times New Roman" panose="02020603050405020304" pitchFamily="18" charset="0"/>
+              </a:rPr>
+              <a:t> enviando uma consulta personalizada no corpo para pedir campos específicos.</a:t>
+            </a:r>
+          </a:p>
+          <a:p>
+            <a:pPr marL="0" marR="0" lvl="0" indent="0" algn="l" defTabSz="914400" rtl="0" eaLnBrk="0" fontAlgn="base" latinLnBrk="0" hangingPunct="0">
+              <a:lnSpc>
+                <a:spcPct val="100000"/>
+              </a:lnSpc>
+              <a:spcBef>
+                <a:spcPct val="0"/>
+              </a:spcBef>
+              <a:spcAft>
+                <a:spcPct val="0"/>
+              </a:spcAft>
+              <a:buClrTx/>
+              <a:buSzTx/>
+              <a:buFontTx/>
+              <a:buChar char="•"/>
+              <a:tabLst/>
+            </a:pPr>
+            <a:r>
+              <a:rPr kumimoji="0" lang="pt-BR" altLang="pt-BR" sz="2000" b="1" i="0" u="none" strike="noStrike" cap="none" normalizeH="0" baseline="0" dirty="0" err="1">
+                <a:ln>
+                  <a:noFill/>
+                </a:ln>
+                <a:solidFill>
+                  <a:schemeClr val="tx1"/>
+                </a:solidFill>
+                <a:effectLst/>
+                <a:latin typeface="Times New Roman" panose="02020603050405020304" pitchFamily="18" charset="0"/>
+                <a:cs typeface="Times New Roman" panose="02020603050405020304" pitchFamily="18" charset="0"/>
+              </a:rPr>
+              <a:t>WebSockets</a:t>
+            </a:r>
+            <a:r>
+              <a:rPr kumimoji="0" lang="pt-BR" altLang="pt-BR" sz="2000" b="1" i="0" u="none" strike="noStrike" cap="none" normalizeH="0" baseline="0" dirty="0">
+                <a:ln>
+                  <a:noFill/>
+                </a:ln>
+                <a:solidFill>
+                  <a:schemeClr val="tx1"/>
+                </a:solidFill>
+                <a:effectLst/>
+                <a:latin typeface="Times New Roman" panose="02020603050405020304" pitchFamily="18" charset="0"/>
+                <a:cs typeface="Times New Roman" panose="02020603050405020304" pitchFamily="18" charset="0"/>
+              </a:rPr>
+              <a:t> / </a:t>
+            </a:r>
+            <a:r>
+              <a:rPr kumimoji="0" lang="pt-BR" altLang="pt-BR" sz="2000" b="1" i="0" u="none" strike="noStrike" cap="none" normalizeH="0" baseline="0" dirty="0" err="1">
+                <a:ln>
+                  <a:noFill/>
+                </a:ln>
+                <a:solidFill>
+                  <a:schemeClr val="tx1"/>
+                </a:solidFill>
+                <a:effectLst/>
+                <a:latin typeface="Times New Roman" panose="02020603050405020304" pitchFamily="18" charset="0"/>
+                <a:cs typeface="Times New Roman" panose="02020603050405020304" pitchFamily="18" charset="0"/>
+              </a:rPr>
+              <a:t>gRPC</a:t>
+            </a:r>
+            <a:r>
+              <a:rPr kumimoji="0" lang="pt-BR" altLang="pt-BR" sz="2000" b="1" i="0" u="none" strike="noStrike" cap="none" normalizeH="0" baseline="0" dirty="0">
+                <a:ln>
+                  <a:noFill/>
+                </a:ln>
+                <a:solidFill>
+                  <a:schemeClr val="tx1"/>
+                </a:solidFill>
+                <a:effectLst/>
+                <a:latin typeface="Times New Roman" panose="02020603050405020304" pitchFamily="18" charset="0"/>
+                <a:cs typeface="Times New Roman" panose="02020603050405020304" pitchFamily="18" charset="0"/>
+              </a:rPr>
+              <a:t>:</a:t>
+            </a:r>
+            <a:r>
+              <a:rPr kumimoji="0" lang="pt-BR" altLang="pt-BR" sz="2000" b="0" i="0" u="none" strike="noStrike" cap="none" normalizeH="0" baseline="0" dirty="0">
+                <a:ln>
+                  <a:noFill/>
+                </a:ln>
+                <a:solidFill>
+                  <a:schemeClr val="tx1"/>
+                </a:solidFill>
+                <a:effectLst/>
+                <a:latin typeface="Times New Roman" panose="02020603050405020304" pitchFamily="18" charset="0"/>
+                <a:cs typeface="Times New Roman" panose="02020603050405020304" pitchFamily="18" charset="0"/>
+              </a:rPr>
+              <a:t> Utiliza conexões persistentes bidirecionais e protocolos de transporte em tempo real, sem se limitar ao modelo tradicional de requisição/resposta do HTTP.</a:t>
+            </a:r>
+          </a:p>
+          <a:p>
+            <a:pPr marL="0" marR="0" lvl="0" indent="0" algn="l" defTabSz="914400" rtl="0" eaLnBrk="0" fontAlgn="base" latinLnBrk="0" hangingPunct="0">
+              <a:lnSpc>
+                <a:spcPct val="100000"/>
+              </a:lnSpc>
+              <a:spcBef>
+                <a:spcPct val="0"/>
+              </a:spcBef>
+              <a:spcAft>
+                <a:spcPct val="0"/>
+              </a:spcAft>
+              <a:buClrTx/>
+              <a:buSzTx/>
+              <a:buFontTx/>
+              <a:buNone/>
+              <a:tabLst/>
+            </a:pPr>
+            <a:endParaRPr kumimoji="0" lang="pt-BR" altLang="pt-BR" sz="1800" b="0" i="0" u="none" strike="noStrike" cap="none" normalizeH="0" baseline="0" dirty="0">
+              <a:ln>
+                <a:noFill/>
+              </a:ln>
+              <a:solidFill>
+                <a:schemeClr val="tx1"/>
+              </a:solidFill>
+              <a:effectLst/>
+              <a:latin typeface="Arial" panose="020B0604020202020204" pitchFamily="34" charset="0"/>
+            </a:endParaRPr>
+          </a:p>
+        </p:txBody>
+      </p:sp>
+    </p:spTree>
+    <p:extLst>
+      <p:ext uri="{BB962C8B-B14F-4D97-AF65-F5344CB8AC3E}">
+        <p14:creationId xmlns:p14="http://schemas.microsoft.com/office/powerpoint/2010/main" val="2984230957"/>
+      </p:ext>
+    </p:extLst>
+  </p:cSld>
+  <p:clrMapOvr>
+    <a:masterClrMapping/>
+  </p:clrMapOvr>
+</p:sld>
+</file>
+
+<file path=ppt/slides/slide5.xml><?xml version="1.0" encoding="utf-8"?>
+<p:sld xmlns:a="http://schemas.openxmlformats.org/drawingml/2006/main" xmlns:r="http://schemas.openxmlformats.org/officeDocument/2006/relationships" xmlns:p="http://schemas.openxmlformats.org/presentationml/2006/main">
+  <p:cSld>
+    <p:spTree>
+      <p:nvGrpSpPr>
+        <p:cNvPr id="1" name=""/>
+        <p:cNvGrpSpPr/>
+        <p:nvPr/>
+      </p:nvGrpSpPr>
+      <p:grpSpPr>
+        <a:xfrm>
+          <a:off x="0" y="0"/>
+          <a:ext cx="0" cy="0"/>
+          <a:chOff x="0" y="0"/>
+          <a:chExt cx="0" cy="0"/>
+        </a:xfrm>
+      </p:grpSpPr>
+      <p:sp>
+        <p:nvSpPr>
+          <p:cNvPr id="7" name="CaixaDeTexto 6">
+            <a:extLst>
+              <a:ext uri="{FF2B5EF4-FFF2-40B4-BE49-F238E27FC236}">
+                <a16:creationId xmlns:a16="http://schemas.microsoft.com/office/drawing/2014/main" id="{88FD6603-769F-4699-8E38-B5C49C39EC14}"/>
+              </a:ext>
+            </a:extLst>
+          </p:cNvPr>
+          <p:cNvSpPr txBox="1"/>
+          <p:nvPr/>
+        </p:nvSpPr>
+        <p:spPr>
+          <a:xfrm>
+            <a:off x="5374257" y="1483743"/>
+            <a:ext cx="184731" cy="369332"/>
+          </a:xfrm>
+          <a:prstGeom prst="rect">
+            <a:avLst/>
+          </a:prstGeom>
+          <a:noFill/>
+        </p:spPr>
+        <p:txBody>
+          <a:bodyPr wrap="none" rtlCol="0">
+            <a:spAutoFit/>
+          </a:bodyPr>
+          <a:lstStyle/>
+          <a:p>
+            <a:endParaRPr lang="pt-BR" dirty="0"/>
+          </a:p>
+        </p:txBody>
+      </p:sp>
+      <p:sp>
+        <p:nvSpPr>
+          <p:cNvPr id="5" name="CaixaDeTexto 4">
+            <a:extLst>
+              <a:ext uri="{FF2B5EF4-FFF2-40B4-BE49-F238E27FC236}">
+                <a16:creationId xmlns:a16="http://schemas.microsoft.com/office/drawing/2014/main" id="{085F1300-331F-4646-8EFF-78012CADE0C6}"/>
+              </a:ext>
+            </a:extLst>
+          </p:cNvPr>
+          <p:cNvSpPr txBox="1"/>
+          <p:nvPr/>
+        </p:nvSpPr>
+        <p:spPr>
+          <a:xfrm>
+            <a:off x="-8626" y="553893"/>
+            <a:ext cx="11864196" cy="3416320"/>
+          </a:xfrm>
+          <a:prstGeom prst="rect">
+            <a:avLst/>
+          </a:prstGeom>
+          <a:noFill/>
+        </p:spPr>
+        <p:txBody>
+          <a:bodyPr wrap="square">
+            <a:spAutoFit/>
+          </a:bodyPr>
+          <a:lstStyle/>
+          <a:p>
+            <a:r>
+              <a:rPr lang="pt-BR" sz="2400" b="1" dirty="0">
+                <a:latin typeface="Times New Roman" panose="02020603050405020304" pitchFamily="18" charset="0"/>
+                <a:cs typeface="Times New Roman" panose="02020603050405020304" pitchFamily="18" charset="0"/>
+              </a:rPr>
+              <a:t>🌐 TIPOS DE APIS </a:t>
+            </a:r>
+          </a:p>
+          <a:p>
+            <a:endParaRPr lang="pt-BR" sz="2400" b="1" dirty="0">
+              <a:latin typeface="Times New Roman" panose="02020603050405020304" pitchFamily="18" charset="0"/>
+              <a:cs typeface="Times New Roman" panose="02020603050405020304" pitchFamily="18" charset="0"/>
+            </a:endParaRPr>
+          </a:p>
+          <a:p>
+            <a:r>
+              <a:rPr lang="pt-BR" sz="2400" b="1" dirty="0">
+                <a:latin typeface="Times New Roman" panose="02020603050405020304" pitchFamily="18" charset="0"/>
+                <a:cs typeface="Times New Roman" panose="02020603050405020304" pitchFamily="18" charset="0"/>
+              </a:rPr>
+              <a:t>1. Quanto ao Acesso / Tipo de Negócio</a:t>
+            </a:r>
+            <a:br>
+              <a:rPr lang="pt-BR" sz="2400" b="1" dirty="0">
+                <a:latin typeface="Times New Roman" panose="02020603050405020304" pitchFamily="18" charset="0"/>
+                <a:cs typeface="Times New Roman" panose="02020603050405020304" pitchFamily="18" charset="0"/>
+              </a:rPr>
+            </a:br>
+            <a:r>
+              <a:rPr lang="pt-BR" sz="2400" dirty="0">
+                <a:latin typeface="Times New Roman" panose="02020603050405020304" pitchFamily="18" charset="0"/>
+                <a:cs typeface="Times New Roman" panose="02020603050405020304" pitchFamily="18" charset="0"/>
+              </a:rPr>
+              <a:t>A classificação mais importante para os alunos entenderem onde as APIs são aplicadas:</a:t>
+            </a:r>
+            <a:br>
+              <a:rPr lang="pt-BR" sz="2400" dirty="0">
+                <a:latin typeface="Times New Roman" panose="02020603050405020304" pitchFamily="18" charset="0"/>
+                <a:cs typeface="Times New Roman" panose="02020603050405020304" pitchFamily="18" charset="0"/>
+              </a:rPr>
+            </a:br>
+            <a:endParaRPr lang="pt-BR" sz="2400" dirty="0">
+              <a:latin typeface="Times New Roman" panose="02020603050405020304" pitchFamily="18" charset="0"/>
+              <a:cs typeface="Times New Roman" panose="02020603050405020304" pitchFamily="18" charset="0"/>
+            </a:endParaRPr>
+          </a:p>
+          <a:p>
+            <a:pPr>
+              <a:buFont typeface="Arial" panose="020B0604020202020204" pitchFamily="34" charset="0"/>
+              <a:buChar char="•"/>
+            </a:pPr>
+            <a:r>
+              <a:rPr lang="pt-BR" sz="2400" b="1" dirty="0">
+                <a:latin typeface="Times New Roman" panose="02020603050405020304" pitchFamily="18" charset="0"/>
+                <a:cs typeface="Times New Roman" panose="02020603050405020304" pitchFamily="18" charset="0"/>
+              </a:rPr>
+              <a:t>APIs Públicas (Abertas / Open APIs):</a:t>
+            </a:r>
+            <a:r>
+              <a:rPr lang="pt-BR" sz="2400" dirty="0">
+                <a:latin typeface="Times New Roman" panose="02020603050405020304" pitchFamily="18" charset="0"/>
+                <a:cs typeface="Times New Roman" panose="02020603050405020304" pitchFamily="18" charset="0"/>
+              </a:rPr>
+              <a:t> (</a:t>
+            </a:r>
+            <a:r>
+              <a:rPr lang="pt-BR" sz="2400" dirty="0" err="1">
+                <a:latin typeface="Times New Roman" panose="02020603050405020304" pitchFamily="18" charset="0"/>
+                <a:cs typeface="Times New Roman" panose="02020603050405020304" pitchFamily="18" charset="0"/>
+              </a:rPr>
+              <a:t>ex</a:t>
+            </a:r>
+            <a:r>
+              <a:rPr lang="pt-BR" sz="2400" dirty="0">
+                <a:latin typeface="Times New Roman" panose="02020603050405020304" pitchFamily="18" charset="0"/>
+                <a:cs typeface="Times New Roman" panose="02020603050405020304" pitchFamily="18" charset="0"/>
+              </a:rPr>
+              <a:t>: </a:t>
+            </a:r>
+            <a:r>
+              <a:rPr lang="pt-BR" sz="2400" dirty="0" err="1">
+                <a:latin typeface="Times New Roman" panose="02020603050405020304" pitchFamily="18" charset="0"/>
+                <a:cs typeface="Times New Roman" panose="02020603050405020304" pitchFamily="18" charset="0"/>
+              </a:rPr>
+              <a:t>ViaCEP</a:t>
+            </a:r>
+            <a:r>
+              <a:rPr lang="pt-BR" sz="2400" dirty="0">
+                <a:latin typeface="Times New Roman" panose="02020603050405020304" pitchFamily="18" charset="0"/>
+                <a:cs typeface="Times New Roman" panose="02020603050405020304" pitchFamily="18" charset="0"/>
+              </a:rPr>
+              <a:t>, </a:t>
+            </a:r>
+            <a:r>
+              <a:rPr lang="pt-BR" sz="2400" dirty="0" err="1">
+                <a:latin typeface="Times New Roman" panose="02020603050405020304" pitchFamily="18" charset="0"/>
+                <a:cs typeface="Times New Roman" panose="02020603050405020304" pitchFamily="18" charset="0"/>
+              </a:rPr>
+              <a:t>OpenWeather</a:t>
+            </a:r>
+            <a:r>
+              <a:rPr lang="pt-BR" sz="2400" dirty="0">
+                <a:latin typeface="Times New Roman" panose="02020603050405020304" pitchFamily="18" charset="0"/>
+                <a:cs typeface="Times New Roman" panose="02020603050405020304" pitchFamily="18" charset="0"/>
+              </a:rPr>
+              <a:t>, API do GitHub). </a:t>
+            </a:r>
+          </a:p>
+          <a:p>
+            <a:pPr>
+              <a:buFont typeface="Arial" panose="020B0604020202020204" pitchFamily="34" charset="0"/>
+              <a:buChar char="•"/>
+            </a:pPr>
+            <a:r>
+              <a:rPr lang="pt-BR" sz="2400" b="1" dirty="0">
+                <a:latin typeface="Times New Roman" panose="02020603050405020304" pitchFamily="18" charset="0"/>
+                <a:cs typeface="Times New Roman" panose="02020603050405020304" pitchFamily="18" charset="0"/>
+              </a:rPr>
+              <a:t>APIs Privadas (Internas):</a:t>
+            </a:r>
+            <a:r>
+              <a:rPr lang="pt-BR" sz="2400" dirty="0">
+                <a:latin typeface="Times New Roman" panose="02020603050405020304" pitchFamily="18" charset="0"/>
+                <a:cs typeface="Times New Roman" panose="02020603050405020304" pitchFamily="18" charset="0"/>
+              </a:rPr>
+              <a:t> (</a:t>
+            </a:r>
+            <a:r>
+              <a:rPr lang="pt-BR" sz="2400" dirty="0" err="1">
+                <a:latin typeface="Times New Roman" panose="02020603050405020304" pitchFamily="18" charset="0"/>
+                <a:cs typeface="Times New Roman" panose="02020603050405020304" pitchFamily="18" charset="0"/>
+              </a:rPr>
+              <a:t>ex</a:t>
+            </a:r>
+            <a:r>
+              <a:rPr lang="pt-BR" sz="2400" dirty="0">
+                <a:latin typeface="Times New Roman" panose="02020603050405020304" pitchFamily="18" charset="0"/>
+                <a:cs typeface="Times New Roman" panose="02020603050405020304" pitchFamily="18" charset="0"/>
+              </a:rPr>
+              <a:t>: conectar o sistema de RH com o de folha de pagamento).</a:t>
+            </a:r>
+          </a:p>
+          <a:p>
+            <a:pPr>
+              <a:buFont typeface="Arial" panose="020B0604020202020204" pitchFamily="34" charset="0"/>
+              <a:buChar char="•"/>
+            </a:pPr>
+            <a:r>
+              <a:rPr lang="pt-BR" sz="2400" b="1" dirty="0">
+                <a:latin typeface="Times New Roman" panose="02020603050405020304" pitchFamily="18" charset="0"/>
+                <a:cs typeface="Times New Roman" panose="02020603050405020304" pitchFamily="18" charset="0"/>
+              </a:rPr>
+              <a:t>APIs de Parceiros (</a:t>
+            </a:r>
+            <a:r>
+              <a:rPr lang="pt-BR" sz="2400" b="1" dirty="0" err="1">
+                <a:latin typeface="Times New Roman" panose="02020603050405020304" pitchFamily="18" charset="0"/>
+                <a:cs typeface="Times New Roman" panose="02020603050405020304" pitchFamily="18" charset="0"/>
+              </a:rPr>
+              <a:t>Partner</a:t>
+            </a:r>
+            <a:r>
+              <a:rPr lang="pt-BR" sz="2400" b="1" dirty="0">
+                <a:latin typeface="Times New Roman" panose="02020603050405020304" pitchFamily="18" charset="0"/>
+                <a:cs typeface="Times New Roman" panose="02020603050405020304" pitchFamily="18" charset="0"/>
+              </a:rPr>
+              <a:t> APIs):</a:t>
+            </a:r>
+            <a:r>
+              <a:rPr lang="pt-BR" sz="2400" dirty="0">
+                <a:latin typeface="Times New Roman" panose="02020603050405020304" pitchFamily="18" charset="0"/>
+                <a:cs typeface="Times New Roman" panose="02020603050405020304" pitchFamily="18" charset="0"/>
+              </a:rPr>
+              <a:t> (</a:t>
+            </a:r>
+            <a:r>
+              <a:rPr lang="pt-BR" sz="2400" dirty="0" err="1">
+                <a:latin typeface="Times New Roman" panose="02020603050405020304" pitchFamily="18" charset="0"/>
+                <a:cs typeface="Times New Roman" panose="02020603050405020304" pitchFamily="18" charset="0"/>
+              </a:rPr>
+              <a:t>ex</a:t>
+            </a:r>
+            <a:r>
+              <a:rPr lang="pt-BR" sz="2400" dirty="0">
+                <a:latin typeface="Times New Roman" panose="02020603050405020304" pitchFamily="18" charset="0"/>
+                <a:cs typeface="Times New Roman" panose="02020603050405020304" pitchFamily="18" charset="0"/>
+              </a:rPr>
+              <a:t>: APIs bancárias B2B, gateways de pagamento).</a:t>
+            </a:r>
+          </a:p>
+          <a:p>
+            <a:pPr>
+              <a:buFont typeface="Arial" panose="020B0604020202020204" pitchFamily="34" charset="0"/>
+              <a:buChar char="•"/>
+            </a:pPr>
+            <a:r>
+              <a:rPr lang="pt-BR" sz="2400" b="1" dirty="0">
+                <a:latin typeface="Times New Roman" panose="02020603050405020304" pitchFamily="18" charset="0"/>
+                <a:cs typeface="Times New Roman" panose="02020603050405020304" pitchFamily="18" charset="0"/>
+              </a:rPr>
+              <a:t>APIs Compostas (</a:t>
+            </a:r>
+            <a:r>
+              <a:rPr lang="pt-BR" sz="2400" b="1" dirty="0" err="1">
+                <a:latin typeface="Times New Roman" panose="02020603050405020304" pitchFamily="18" charset="0"/>
+                <a:cs typeface="Times New Roman" panose="02020603050405020304" pitchFamily="18" charset="0"/>
+              </a:rPr>
+              <a:t>Composite</a:t>
+            </a:r>
+            <a:r>
+              <a:rPr lang="pt-BR" sz="2400" b="1" dirty="0">
+                <a:latin typeface="Times New Roman" panose="02020603050405020304" pitchFamily="18" charset="0"/>
+                <a:cs typeface="Times New Roman" panose="02020603050405020304" pitchFamily="18" charset="0"/>
+              </a:rPr>
+              <a:t> APIs):</a:t>
+            </a:r>
+            <a:r>
+              <a:rPr lang="pt-BR" sz="2400" dirty="0">
+                <a:latin typeface="Times New Roman" panose="02020603050405020304" pitchFamily="18" charset="0"/>
+                <a:cs typeface="Times New Roman" panose="02020603050405020304" pitchFamily="18" charset="0"/>
+              </a:rPr>
+              <a:t> Unificam múltiplos </a:t>
+            </a:r>
+            <a:r>
+              <a:rPr lang="pt-BR" sz="2400" dirty="0" err="1">
+                <a:latin typeface="Times New Roman" panose="02020603050405020304" pitchFamily="18" charset="0"/>
+                <a:cs typeface="Times New Roman" panose="02020603050405020304" pitchFamily="18" charset="0"/>
+              </a:rPr>
+              <a:t>endpoints</a:t>
+            </a:r>
+            <a:r>
+              <a:rPr lang="pt-BR" sz="2400" dirty="0">
+                <a:latin typeface="Times New Roman" panose="02020603050405020304" pitchFamily="18" charset="0"/>
+                <a:cs typeface="Times New Roman" panose="02020603050405020304" pitchFamily="18" charset="0"/>
+              </a:rPr>
+              <a:t>.</a:t>
+            </a:r>
+          </a:p>
+        </p:txBody>
+      </p:sp>
+    </p:spTree>
+    <p:extLst>
+      <p:ext uri="{BB962C8B-B14F-4D97-AF65-F5344CB8AC3E}">
+        <p14:creationId xmlns:p14="http://schemas.microsoft.com/office/powerpoint/2010/main" val="1439616780"/>
+      </p:ext>
+    </p:extLst>
+  </p:cSld>
+  <p:clrMapOvr>
+    <a:masterClrMapping/>
+  </p:clrMapOvr>
+</p:sld>
+</file>
+
+<file path=ppt/slides/slide6.xml><?xml version="1.0" encoding="utf-8"?>
+<p:sld xmlns:a="http://schemas.openxmlformats.org/drawingml/2006/main" xmlns:r="http://schemas.openxmlformats.org/officeDocument/2006/relationships" xmlns:p="http://schemas.openxmlformats.org/presentationml/2006/main">
+  <p:cSld>
+    <p:spTree>
+      <p:nvGrpSpPr>
+        <p:cNvPr id="1" name=""/>
+        <p:cNvGrpSpPr/>
+        <p:nvPr/>
+      </p:nvGrpSpPr>
+      <p:grpSpPr>
+        <a:xfrm>
+          <a:off x="0" y="0"/>
+          <a:ext cx="0" cy="0"/>
+          <a:chOff x="0" y="0"/>
+          <a:chExt cx="0" cy="0"/>
+        </a:xfrm>
+      </p:grpSpPr>
+      <p:sp>
+        <p:nvSpPr>
+          <p:cNvPr id="7" name="CaixaDeTexto 6">
+            <a:extLst>
+              <a:ext uri="{FF2B5EF4-FFF2-40B4-BE49-F238E27FC236}">
+                <a16:creationId xmlns:a16="http://schemas.microsoft.com/office/drawing/2014/main" id="{88FD6603-769F-4699-8E38-B5C49C39EC14}"/>
+              </a:ext>
+            </a:extLst>
+          </p:cNvPr>
+          <p:cNvSpPr txBox="1"/>
+          <p:nvPr/>
+        </p:nvSpPr>
+        <p:spPr>
+          <a:xfrm>
+            <a:off x="5374257" y="1483743"/>
+            <a:ext cx="184731" cy="369332"/>
+          </a:xfrm>
+          <a:prstGeom prst="rect">
+            <a:avLst/>
+          </a:prstGeom>
+          <a:noFill/>
+        </p:spPr>
+        <p:txBody>
+          <a:bodyPr wrap="none" rtlCol="0">
+            <a:spAutoFit/>
+          </a:bodyPr>
+          <a:lstStyle/>
+          <a:p>
+            <a:endParaRPr lang="pt-BR" dirty="0"/>
+          </a:p>
+        </p:txBody>
+      </p:sp>
+      <p:sp>
+        <p:nvSpPr>
+          <p:cNvPr id="9" name="CaixaDeTexto 8">
+            <a:extLst>
+              <a:ext uri="{FF2B5EF4-FFF2-40B4-BE49-F238E27FC236}">
+                <a16:creationId xmlns:a16="http://schemas.microsoft.com/office/drawing/2014/main" id="{FD2487EA-CB89-473F-8CF0-BB79D734AAFE}"/>
+              </a:ext>
+            </a:extLst>
+          </p:cNvPr>
+          <p:cNvSpPr txBox="1"/>
+          <p:nvPr/>
+        </p:nvSpPr>
+        <p:spPr>
+          <a:xfrm>
+            <a:off x="0" y="552463"/>
+            <a:ext cx="12301268" cy="4154984"/>
+          </a:xfrm>
+          <a:prstGeom prst="rect">
+            <a:avLst/>
+          </a:prstGeom>
+          <a:noFill/>
+        </p:spPr>
+        <p:txBody>
+          <a:bodyPr wrap="square">
+            <a:spAutoFit/>
+          </a:bodyPr>
+          <a:lstStyle/>
+          <a:p>
+            <a:r>
+              <a:rPr lang="pt-BR" sz="2400" b="1" dirty="0">
+                <a:latin typeface="Times New Roman" panose="02020603050405020304" pitchFamily="18" charset="0"/>
+                <a:cs typeface="Times New Roman" panose="02020603050405020304" pitchFamily="18" charset="0"/>
+              </a:rPr>
+              <a:t>2. Quanto ao Protocolo / Estilo de Arquitetura como a comunicação é estruturada na web:</a:t>
+            </a:r>
+          </a:p>
+          <a:p>
+            <a:endParaRPr lang="pt-BR" sz="2000" dirty="0">
+              <a:latin typeface="Times New Roman" panose="02020603050405020304" pitchFamily="18" charset="0"/>
+              <a:cs typeface="Times New Roman" panose="02020603050405020304" pitchFamily="18" charset="0"/>
+            </a:endParaRPr>
+          </a:p>
+          <a:p>
+            <a:r>
+              <a:rPr lang="pt-BR" sz="2000" b="1" dirty="0">
+                <a:latin typeface="Times New Roman" panose="02020603050405020304" pitchFamily="18" charset="0"/>
+                <a:cs typeface="Times New Roman" panose="02020603050405020304" pitchFamily="18" charset="0"/>
+              </a:rPr>
+              <a:t>REST / </a:t>
+            </a:r>
+            <a:r>
+              <a:rPr lang="pt-BR" sz="2000" b="1" dirty="0" err="1">
+                <a:latin typeface="Times New Roman" panose="02020603050405020304" pitchFamily="18" charset="0"/>
+                <a:cs typeface="Times New Roman" panose="02020603050405020304" pitchFamily="18" charset="0"/>
+              </a:rPr>
+              <a:t>RESTful</a:t>
+            </a:r>
+            <a:r>
+              <a:rPr lang="pt-BR" sz="2000" b="1" dirty="0">
+                <a:latin typeface="Times New Roman" panose="02020603050405020304" pitchFamily="18" charset="0"/>
+                <a:cs typeface="Times New Roman" panose="02020603050405020304" pitchFamily="18" charset="0"/>
+              </a:rPr>
+              <a:t> (</a:t>
+            </a:r>
+            <a:r>
+              <a:rPr lang="pt-BR" sz="2000" b="1" dirty="0" err="1">
+                <a:latin typeface="Times New Roman" panose="02020603050405020304" pitchFamily="18" charset="0"/>
+                <a:cs typeface="Times New Roman" panose="02020603050405020304" pitchFamily="18" charset="0"/>
+              </a:rPr>
+              <a:t>Representational</a:t>
+            </a:r>
+            <a:r>
+              <a:rPr lang="pt-BR" sz="2000" b="1" dirty="0">
+                <a:latin typeface="Times New Roman" panose="02020603050405020304" pitchFamily="18" charset="0"/>
+                <a:cs typeface="Times New Roman" panose="02020603050405020304" pitchFamily="18" charset="0"/>
+              </a:rPr>
+              <a:t> </a:t>
+            </a:r>
+            <a:r>
+              <a:rPr lang="pt-BR" sz="2000" b="1" dirty="0" err="1">
+                <a:latin typeface="Times New Roman" panose="02020603050405020304" pitchFamily="18" charset="0"/>
+                <a:cs typeface="Times New Roman" panose="02020603050405020304" pitchFamily="18" charset="0"/>
+              </a:rPr>
+              <a:t>State</a:t>
+            </a:r>
+            <a:r>
+              <a:rPr lang="pt-BR" sz="2000" b="1" dirty="0">
+                <a:latin typeface="Times New Roman" panose="02020603050405020304" pitchFamily="18" charset="0"/>
+                <a:cs typeface="Times New Roman" panose="02020603050405020304" pitchFamily="18" charset="0"/>
+              </a:rPr>
+              <a:t> </a:t>
+            </a:r>
+            <a:r>
+              <a:rPr lang="pt-BR" sz="2000" b="1" dirty="0" err="1">
+                <a:latin typeface="Times New Roman" panose="02020603050405020304" pitchFamily="18" charset="0"/>
+                <a:cs typeface="Times New Roman" panose="02020603050405020304" pitchFamily="18" charset="0"/>
+              </a:rPr>
+              <a:t>Transfer</a:t>
+            </a:r>
+            <a:r>
+              <a:rPr lang="pt-BR" sz="2000" b="1" dirty="0">
+                <a:latin typeface="Times New Roman" panose="02020603050405020304" pitchFamily="18" charset="0"/>
+                <a:cs typeface="Times New Roman" panose="02020603050405020304" pitchFamily="18" charset="0"/>
+              </a:rPr>
+              <a:t>): </a:t>
+            </a:r>
+            <a:r>
+              <a:rPr lang="pt-BR" sz="2000" dirty="0">
+                <a:latin typeface="Times New Roman" panose="02020603050405020304" pitchFamily="18" charset="0"/>
+                <a:cs typeface="Times New Roman" panose="02020603050405020304" pitchFamily="18" charset="0"/>
+              </a:rPr>
+              <a:t>O padrão da web moderna. Utiliza verbos </a:t>
+            </a:r>
+            <a:r>
+              <a:rPr lang="pt-BR" sz="2000" b="1" dirty="0">
+                <a:latin typeface="Times New Roman" panose="02020603050405020304" pitchFamily="18" charset="0"/>
+                <a:cs typeface="Times New Roman" panose="02020603050405020304" pitchFamily="18" charset="0"/>
+              </a:rPr>
+              <a:t>HTTP (GET, POST, PUT, DELETE)</a:t>
+            </a:r>
+            <a:r>
+              <a:rPr lang="pt-BR" sz="2000" dirty="0">
+                <a:latin typeface="Times New Roman" panose="02020603050405020304" pitchFamily="18" charset="0"/>
+                <a:cs typeface="Times New Roman" panose="02020603050405020304" pitchFamily="18" charset="0"/>
+              </a:rPr>
+              <a:t>, envia dados em formato JSON e possui excelente desempenho</a:t>
+            </a:r>
+            <a:r>
+              <a:rPr lang="pt-BR" sz="2000" b="1" dirty="0">
+                <a:latin typeface="Times New Roman" panose="02020603050405020304" pitchFamily="18" charset="0"/>
+                <a:cs typeface="Times New Roman" panose="02020603050405020304" pitchFamily="18" charset="0"/>
+              </a:rPr>
+              <a:t>. (Foco total da nossa aula).</a:t>
+            </a:r>
+          </a:p>
+          <a:p>
+            <a:endParaRPr lang="pt-BR" sz="2000" dirty="0">
+              <a:latin typeface="Times New Roman" panose="02020603050405020304" pitchFamily="18" charset="0"/>
+              <a:cs typeface="Times New Roman" panose="02020603050405020304" pitchFamily="18" charset="0"/>
+            </a:endParaRPr>
+          </a:p>
+          <a:p>
+            <a:r>
+              <a:rPr lang="pt-BR" sz="2000" b="1" dirty="0">
+                <a:latin typeface="Times New Roman" panose="02020603050405020304" pitchFamily="18" charset="0"/>
+                <a:cs typeface="Times New Roman" panose="02020603050405020304" pitchFamily="18" charset="0"/>
+              </a:rPr>
+              <a:t>SOAP (</a:t>
+            </a:r>
+            <a:r>
+              <a:rPr lang="pt-BR" sz="2000" b="1" dirty="0" err="1">
+                <a:latin typeface="Times New Roman" panose="02020603050405020304" pitchFamily="18" charset="0"/>
+                <a:cs typeface="Times New Roman" panose="02020603050405020304" pitchFamily="18" charset="0"/>
+              </a:rPr>
+              <a:t>Simple</a:t>
+            </a:r>
+            <a:r>
+              <a:rPr lang="pt-BR" sz="2000" b="1" dirty="0">
+                <a:latin typeface="Times New Roman" panose="02020603050405020304" pitchFamily="18" charset="0"/>
+                <a:cs typeface="Times New Roman" panose="02020603050405020304" pitchFamily="18" charset="0"/>
+              </a:rPr>
+              <a:t> </a:t>
+            </a:r>
+            <a:r>
+              <a:rPr lang="pt-BR" sz="2000" b="1" dirty="0" err="1">
+                <a:latin typeface="Times New Roman" panose="02020603050405020304" pitchFamily="18" charset="0"/>
+                <a:cs typeface="Times New Roman" panose="02020603050405020304" pitchFamily="18" charset="0"/>
+              </a:rPr>
+              <a:t>Object</a:t>
+            </a:r>
+            <a:r>
+              <a:rPr lang="pt-BR" sz="2000" b="1" dirty="0">
+                <a:latin typeface="Times New Roman" panose="02020603050405020304" pitchFamily="18" charset="0"/>
+                <a:cs typeface="Times New Roman" panose="02020603050405020304" pitchFamily="18" charset="0"/>
+              </a:rPr>
+              <a:t> Access </a:t>
+            </a:r>
+            <a:r>
+              <a:rPr lang="pt-BR" sz="2000" b="1" dirty="0" err="1">
+                <a:latin typeface="Times New Roman" panose="02020603050405020304" pitchFamily="18" charset="0"/>
+                <a:cs typeface="Times New Roman" panose="02020603050405020304" pitchFamily="18" charset="0"/>
+              </a:rPr>
+              <a:t>Protocol</a:t>
+            </a:r>
+            <a:r>
+              <a:rPr lang="pt-BR" sz="2000" b="1" dirty="0">
+                <a:latin typeface="Times New Roman" panose="02020603050405020304" pitchFamily="18" charset="0"/>
+                <a:cs typeface="Times New Roman" panose="02020603050405020304" pitchFamily="18" charset="0"/>
+              </a:rPr>
+              <a:t>): </a:t>
+            </a:r>
+            <a:r>
+              <a:rPr lang="pt-BR" sz="2000" dirty="0">
+                <a:latin typeface="Times New Roman" panose="02020603050405020304" pitchFamily="18" charset="0"/>
+                <a:cs typeface="Times New Roman" panose="02020603050405020304" pitchFamily="18" charset="0"/>
+              </a:rPr>
+              <a:t>Padrão legado/corporativo rígido baseado em mensagens XML, muito utilizado por bancos e sistemas legados de alta segurança.</a:t>
+            </a:r>
+          </a:p>
+          <a:p>
+            <a:endParaRPr lang="pt-BR" sz="2000" dirty="0">
+              <a:latin typeface="Times New Roman" panose="02020603050405020304" pitchFamily="18" charset="0"/>
+              <a:cs typeface="Times New Roman" panose="02020603050405020304" pitchFamily="18" charset="0"/>
+            </a:endParaRPr>
+          </a:p>
+          <a:p>
+            <a:r>
+              <a:rPr lang="pt-BR" sz="2000" b="1" dirty="0" err="1">
+                <a:latin typeface="Times New Roman" panose="02020603050405020304" pitchFamily="18" charset="0"/>
+                <a:cs typeface="Times New Roman" panose="02020603050405020304" pitchFamily="18" charset="0"/>
+              </a:rPr>
+              <a:t>GraphQL</a:t>
+            </a:r>
+            <a:r>
+              <a:rPr lang="pt-BR" sz="2000" b="1" dirty="0">
+                <a:latin typeface="Times New Roman" panose="02020603050405020304" pitchFamily="18" charset="0"/>
+                <a:cs typeface="Times New Roman" panose="02020603050405020304" pitchFamily="18" charset="0"/>
+              </a:rPr>
+              <a:t>:</a:t>
+            </a:r>
+            <a:r>
+              <a:rPr lang="pt-BR" sz="2000" dirty="0">
+                <a:latin typeface="Times New Roman" panose="02020603050405020304" pitchFamily="18" charset="0"/>
+                <a:cs typeface="Times New Roman" panose="02020603050405020304" pitchFamily="18" charset="0"/>
+              </a:rPr>
+              <a:t> Desenvolvido pelo Meta, permite que o cliente solicite exatamente os campos de que precisa em uma única requisição, evitando transferência excessiva de dados (over-</a:t>
+            </a:r>
+            <a:r>
+              <a:rPr lang="pt-BR" sz="2000" dirty="0" err="1">
+                <a:latin typeface="Times New Roman" panose="02020603050405020304" pitchFamily="18" charset="0"/>
+                <a:cs typeface="Times New Roman" panose="02020603050405020304" pitchFamily="18" charset="0"/>
+              </a:rPr>
+              <a:t>fetching</a:t>
+            </a:r>
+            <a:r>
+              <a:rPr lang="pt-BR" sz="2000" dirty="0">
+                <a:latin typeface="Times New Roman" panose="02020603050405020304" pitchFamily="18" charset="0"/>
+                <a:cs typeface="Times New Roman" panose="02020603050405020304" pitchFamily="18" charset="0"/>
+              </a:rPr>
+              <a:t>).</a:t>
+            </a:r>
+          </a:p>
+          <a:p>
+            <a:endParaRPr lang="pt-BR" sz="2000" dirty="0">
+              <a:latin typeface="Times New Roman" panose="02020603050405020304" pitchFamily="18" charset="0"/>
+              <a:cs typeface="Times New Roman" panose="02020603050405020304" pitchFamily="18" charset="0"/>
+            </a:endParaRPr>
+          </a:p>
+          <a:p>
+            <a:r>
+              <a:rPr lang="pt-BR" sz="2000" b="1" dirty="0" err="1">
+                <a:latin typeface="Times New Roman" panose="02020603050405020304" pitchFamily="18" charset="0"/>
+                <a:cs typeface="Times New Roman" panose="02020603050405020304" pitchFamily="18" charset="0"/>
+              </a:rPr>
+              <a:t>WebSockets</a:t>
+            </a:r>
+            <a:r>
+              <a:rPr lang="pt-BR" sz="2000" b="1" dirty="0">
+                <a:latin typeface="Times New Roman" panose="02020603050405020304" pitchFamily="18" charset="0"/>
+                <a:cs typeface="Times New Roman" panose="02020603050405020304" pitchFamily="18" charset="0"/>
+              </a:rPr>
+              <a:t> / </a:t>
+            </a:r>
+            <a:r>
+              <a:rPr lang="pt-BR" sz="2000" b="1" dirty="0" err="1">
+                <a:latin typeface="Times New Roman" panose="02020603050405020304" pitchFamily="18" charset="0"/>
+                <a:cs typeface="Times New Roman" panose="02020603050405020304" pitchFamily="18" charset="0"/>
+              </a:rPr>
+              <a:t>gRPC</a:t>
+            </a:r>
+            <a:r>
+              <a:rPr lang="pt-BR" sz="2000" b="1" dirty="0">
+                <a:latin typeface="Times New Roman" panose="02020603050405020304" pitchFamily="18" charset="0"/>
+                <a:cs typeface="Times New Roman" panose="02020603050405020304" pitchFamily="18" charset="0"/>
+              </a:rPr>
+              <a:t>: </a:t>
+            </a:r>
+            <a:r>
+              <a:rPr lang="pt-BR" sz="2000" dirty="0">
+                <a:latin typeface="Times New Roman" panose="02020603050405020304" pitchFamily="18" charset="0"/>
+                <a:cs typeface="Times New Roman" panose="02020603050405020304" pitchFamily="18" charset="0"/>
+              </a:rPr>
+              <a:t>Utilizados para comunicação bidirecional em tempo real (chats, jogos online, cotações financeiras ao vivo).</a:t>
+            </a:r>
+          </a:p>
+        </p:txBody>
+      </p:sp>
+    </p:spTree>
+    <p:extLst>
+      <p:ext uri="{BB962C8B-B14F-4D97-AF65-F5344CB8AC3E}">
+        <p14:creationId xmlns:p14="http://schemas.microsoft.com/office/powerpoint/2010/main" val="640381052"/>
+      </p:ext>
+    </p:extLst>
+  </p:cSld>
+  <p:clrMapOvr>
+    <a:masterClrMapping/>
+  </p:clrMapOvr>
+</p:sld>
+</file>
+
+<file path=ppt/slides/slide7.xml><?xml version="1.0" encoding="utf-8"?>
+<p:sld xmlns:a="http://schemas.openxmlformats.org/drawingml/2006/main" xmlns:r="http://schemas.openxmlformats.org/officeDocument/2006/relationships" xmlns:p="http://schemas.openxmlformats.org/presentationml/2006/main">
+  <p:cSld>
+    <p:spTree>
+      <p:nvGrpSpPr>
+        <p:cNvPr id="1" name=""/>
+        <p:cNvGrpSpPr/>
+        <p:nvPr/>
+      </p:nvGrpSpPr>
+      <p:grpSpPr>
+        <a:xfrm>
+          <a:off x="0" y="0"/>
+          <a:ext cx="0" cy="0"/>
+          <a:chOff x="0" y="0"/>
+          <a:chExt cx="0" cy="0"/>
+        </a:xfrm>
+      </p:grpSpPr>
+      <p:sp>
+        <p:nvSpPr>
+          <p:cNvPr id="7" name="CaixaDeTexto 6">
+            <a:extLst>
+              <a:ext uri="{FF2B5EF4-FFF2-40B4-BE49-F238E27FC236}">
+                <a16:creationId xmlns:a16="http://schemas.microsoft.com/office/drawing/2014/main" id="{88FD6603-769F-4699-8E38-B5C49C39EC14}"/>
+              </a:ext>
+            </a:extLst>
+          </p:cNvPr>
+          <p:cNvSpPr txBox="1"/>
+          <p:nvPr/>
+        </p:nvSpPr>
+        <p:spPr>
+          <a:xfrm>
+            <a:off x="5374257" y="1483743"/>
+            <a:ext cx="184731" cy="369332"/>
+          </a:xfrm>
+          <a:prstGeom prst="rect">
+            <a:avLst/>
+          </a:prstGeom>
+          <a:noFill/>
+        </p:spPr>
+        <p:txBody>
+          <a:bodyPr wrap="none" rtlCol="0">
+            <a:spAutoFit/>
+          </a:bodyPr>
+          <a:lstStyle/>
+          <a:p>
+            <a:endParaRPr lang="pt-BR" dirty="0"/>
+          </a:p>
+        </p:txBody>
+      </p:sp>
+      <p:sp>
+        <p:nvSpPr>
+          <p:cNvPr id="9" name="CaixaDeTexto 8">
+            <a:extLst>
+              <a:ext uri="{FF2B5EF4-FFF2-40B4-BE49-F238E27FC236}">
+                <a16:creationId xmlns:a16="http://schemas.microsoft.com/office/drawing/2014/main" id="{FD2487EA-CB89-473F-8CF0-BB79D734AAFE}"/>
+              </a:ext>
+            </a:extLst>
+          </p:cNvPr>
+          <p:cNvSpPr txBox="1"/>
+          <p:nvPr/>
+        </p:nvSpPr>
+        <p:spPr>
+          <a:xfrm>
+            <a:off x="0" y="552463"/>
+            <a:ext cx="12301268" cy="4832092"/>
+          </a:xfrm>
+          <a:prstGeom prst="rect">
+            <a:avLst/>
+          </a:prstGeom>
+          <a:noFill/>
+        </p:spPr>
+        <p:txBody>
+          <a:bodyPr wrap="square">
+            <a:spAutoFit/>
+          </a:bodyPr>
+          <a:lstStyle/>
+          <a:p>
+            <a:r>
+              <a:rPr lang="pt-BR" sz="2400" b="1" dirty="0">
+                <a:latin typeface="Times New Roman" panose="02020603050405020304" pitchFamily="18" charset="0"/>
+                <a:cs typeface="Times New Roman" panose="02020603050405020304" pitchFamily="18" charset="0"/>
+              </a:rPr>
+              <a:t>3. O Papel do JSON na Comunicação Web:</a:t>
+            </a:r>
+          </a:p>
+          <a:p>
+            <a:endParaRPr lang="pt-BR" sz="2400" b="1" u="sng" dirty="0">
+              <a:latin typeface="Times New Roman" panose="02020603050405020304" pitchFamily="18" charset="0"/>
+              <a:cs typeface="Times New Roman" panose="02020603050405020304" pitchFamily="18" charset="0"/>
+            </a:endParaRPr>
+          </a:p>
+          <a:p>
+            <a:r>
+              <a:rPr lang="pt-BR" sz="2000" dirty="0">
+                <a:latin typeface="Times New Roman" panose="02020603050405020304" pitchFamily="18" charset="0"/>
+                <a:cs typeface="Times New Roman" panose="02020603050405020304" pitchFamily="18" charset="0"/>
+              </a:rPr>
+              <a:t>O JSON é um formato leve de estruturação de dados baseado em pares de chave: valor. Quando o navegador faz uma requisição HTTP (</a:t>
+            </a:r>
+            <a:r>
+              <a:rPr lang="pt-BR" sz="2000" dirty="0" err="1">
+                <a:latin typeface="Times New Roman" panose="02020603050405020304" pitchFamily="18" charset="0"/>
+                <a:cs typeface="Times New Roman" panose="02020603050405020304" pitchFamily="18" charset="0"/>
+              </a:rPr>
+              <a:t>fetch</a:t>
+            </a:r>
+            <a:r>
+              <a:rPr lang="pt-BR" sz="2000" dirty="0">
+                <a:latin typeface="Times New Roman" panose="02020603050405020304" pitchFamily="18" charset="0"/>
+                <a:cs typeface="Times New Roman" panose="02020603050405020304" pitchFamily="18" charset="0"/>
+              </a:rPr>
+              <a:t>) para uma API, o servidor responde enviando as informações formatadas como JSON.</a:t>
+            </a:r>
+          </a:p>
+          <a:p>
+            <a:endParaRPr lang="pt-BR" sz="2000" dirty="0">
+              <a:latin typeface="Times New Roman" panose="02020603050405020304" pitchFamily="18" charset="0"/>
+              <a:cs typeface="Times New Roman" panose="02020603050405020304" pitchFamily="18" charset="0"/>
+            </a:endParaRPr>
+          </a:p>
+          <a:p>
+            <a:r>
+              <a:rPr lang="pt-BR" sz="2000" dirty="0">
+                <a:latin typeface="Times New Roman" panose="02020603050405020304" pitchFamily="18" charset="0"/>
+                <a:cs typeface="Times New Roman" panose="02020603050405020304" pitchFamily="18" charset="0"/>
+              </a:rPr>
+              <a:t>Exemplo de Resposta de uma API em JSON:</a:t>
+            </a:r>
+          </a:p>
+          <a:p>
+            <a:endParaRPr lang="pt-BR" sz="2000" dirty="0">
+              <a:latin typeface="Times New Roman" panose="02020603050405020304" pitchFamily="18" charset="0"/>
+              <a:cs typeface="Times New Roman" panose="02020603050405020304" pitchFamily="18" charset="0"/>
+            </a:endParaRPr>
+          </a:p>
+          <a:p>
+            <a:r>
+              <a:rPr lang="pt-BR" sz="2000" dirty="0">
+                <a:latin typeface="Times New Roman" panose="02020603050405020304" pitchFamily="18" charset="0"/>
+                <a:cs typeface="Times New Roman" panose="02020603050405020304" pitchFamily="18" charset="0"/>
+              </a:rPr>
+              <a:t>JSON</a:t>
+            </a:r>
+          </a:p>
+          <a:p>
+            <a:r>
+              <a:rPr lang="pt-BR" sz="2000" dirty="0">
+                <a:latin typeface="Times New Roman" panose="02020603050405020304" pitchFamily="18" charset="0"/>
+                <a:cs typeface="Times New Roman" panose="02020603050405020304" pitchFamily="18" charset="0"/>
+              </a:rPr>
+              <a:t>{</a:t>
+            </a:r>
+          </a:p>
+          <a:p>
+            <a:r>
+              <a:rPr lang="pt-BR" sz="2000" dirty="0">
+                <a:latin typeface="Times New Roman" panose="02020603050405020304" pitchFamily="18" charset="0"/>
+                <a:cs typeface="Times New Roman" panose="02020603050405020304" pitchFamily="18" charset="0"/>
+              </a:rPr>
+              <a:t>  "status": 200,</a:t>
+            </a:r>
+          </a:p>
+          <a:p>
+            <a:r>
+              <a:rPr lang="pt-BR" sz="2000" dirty="0">
+                <a:latin typeface="Times New Roman" panose="02020603050405020304" pitchFamily="18" charset="0"/>
+                <a:cs typeface="Times New Roman" panose="02020603050405020304" pitchFamily="18" charset="0"/>
+              </a:rPr>
+              <a:t>  "</a:t>
+            </a:r>
+            <a:r>
+              <a:rPr lang="pt-BR" sz="2000" dirty="0" err="1">
+                <a:latin typeface="Times New Roman" panose="02020603050405020304" pitchFamily="18" charset="0"/>
+                <a:cs typeface="Times New Roman" panose="02020603050405020304" pitchFamily="18" charset="0"/>
+              </a:rPr>
+              <a:t>usuario</a:t>
+            </a:r>
+            <a:r>
+              <a:rPr lang="pt-BR" sz="2000" dirty="0">
+                <a:latin typeface="Times New Roman" panose="02020603050405020304" pitchFamily="18" charset="0"/>
+                <a:cs typeface="Times New Roman" panose="02020603050405020304" pitchFamily="18" charset="0"/>
+              </a:rPr>
+              <a:t>": "Antonio Cruz",</a:t>
+            </a:r>
+          </a:p>
+          <a:p>
+            <a:r>
+              <a:rPr lang="pt-BR" sz="2000" dirty="0">
+                <a:latin typeface="Times New Roman" panose="02020603050405020304" pitchFamily="18" charset="0"/>
+                <a:cs typeface="Times New Roman" panose="02020603050405020304" pitchFamily="18" charset="0"/>
+              </a:rPr>
+              <a:t>  "turma": "1ESSRA",</a:t>
+            </a:r>
+          </a:p>
+          <a:p>
+            <a:r>
+              <a:rPr lang="pt-BR" sz="2000" dirty="0">
+                <a:latin typeface="Times New Roman" panose="02020603050405020304" pitchFamily="18" charset="0"/>
+                <a:cs typeface="Times New Roman" panose="02020603050405020304" pitchFamily="18" charset="0"/>
+              </a:rPr>
+              <a:t>  "ativo": </a:t>
+            </a:r>
+            <a:r>
+              <a:rPr lang="pt-BR" sz="2000" dirty="0" err="1">
+                <a:latin typeface="Times New Roman" panose="02020603050405020304" pitchFamily="18" charset="0"/>
+                <a:cs typeface="Times New Roman" panose="02020603050405020304" pitchFamily="18" charset="0"/>
+              </a:rPr>
+              <a:t>true</a:t>
+            </a:r>
+            <a:r>
+              <a:rPr lang="pt-BR" sz="2000" dirty="0">
+                <a:latin typeface="Times New Roman" panose="02020603050405020304" pitchFamily="18" charset="0"/>
+                <a:cs typeface="Times New Roman" panose="02020603050405020304" pitchFamily="18" charset="0"/>
+              </a:rPr>
+              <a:t>,</a:t>
+            </a:r>
+          </a:p>
+          <a:p>
+            <a:r>
+              <a:rPr lang="pt-BR" sz="2000" dirty="0">
+                <a:latin typeface="Times New Roman" panose="02020603050405020304" pitchFamily="18" charset="0"/>
+                <a:cs typeface="Times New Roman" panose="02020603050405020304" pitchFamily="18" charset="0"/>
+              </a:rPr>
+              <a:t>  "disciplinas": ["Desenvolvimento Web", "Lógica Dinâmica"]</a:t>
+            </a:r>
+          </a:p>
+          <a:p>
+            <a:r>
+              <a:rPr lang="pt-BR" sz="2000" dirty="0">
+                <a:latin typeface="Times New Roman" panose="02020603050405020304" pitchFamily="18" charset="0"/>
+                <a:cs typeface="Times New Roman" panose="02020603050405020304" pitchFamily="18" charset="0"/>
+              </a:rPr>
+              <a:t>}</a:t>
+            </a:r>
+            <a:endParaRPr lang="pt-BR" dirty="0">
+              <a:latin typeface="Times New Roman" panose="02020603050405020304" pitchFamily="18" charset="0"/>
+              <a:cs typeface="Times New Roman" panose="02020603050405020304" pitchFamily="18" charset="0"/>
+            </a:endParaRPr>
+          </a:p>
+        </p:txBody>
+      </p:sp>
+    </p:spTree>
+    <p:extLst>
+      <p:ext uri="{BB962C8B-B14F-4D97-AF65-F5344CB8AC3E}">
+        <p14:creationId xmlns:p14="http://schemas.microsoft.com/office/powerpoint/2010/main" val="3340963908"/>
+      </p:ext>
+    </p:extLst>
+  </p:cSld>
+  <p:clrMapOvr>
+    <a:masterClrMapping/>
+  </p:clrMapOvr>
+</p:sld>
+</file>
+
+<file path=ppt/slides/slide8.xml><?xml version="1.0" encoding="utf-8"?>
+<p:sld xmlns:a="http://schemas.openxmlformats.org/drawingml/2006/main" xmlns:r="http://schemas.openxmlformats.org/officeDocument/2006/relationships" xmlns:p="http://schemas.openxmlformats.org/presentationml/2006/main">
+  <p:cSld>
+    <p:spTree>
+      <p:nvGrpSpPr>
+        <p:cNvPr id="1" name=""/>
+        <p:cNvGrpSpPr/>
+        <p:nvPr/>
+      </p:nvGrpSpPr>
+      <p:grpSpPr>
+        <a:xfrm>
+          <a:off x="0" y="0"/>
+          <a:ext cx="0" cy="0"/>
+          <a:chOff x="0" y="0"/>
+          <a:chExt cx="0" cy="0"/>
+        </a:xfrm>
+      </p:grpSpPr>
+      <p:sp>
+        <p:nvSpPr>
+          <p:cNvPr id="7" name="CaixaDeTexto 6">
+            <a:extLst>
+              <a:ext uri="{FF2B5EF4-FFF2-40B4-BE49-F238E27FC236}">
+                <a16:creationId xmlns:a16="http://schemas.microsoft.com/office/drawing/2014/main" id="{88FD6603-769F-4699-8E38-B5C49C39EC14}"/>
+              </a:ext>
+            </a:extLst>
+          </p:cNvPr>
+          <p:cNvSpPr txBox="1"/>
+          <p:nvPr/>
+        </p:nvSpPr>
+        <p:spPr>
+          <a:xfrm>
+            <a:off x="5374257" y="1483743"/>
+            <a:ext cx="184731" cy="369332"/>
+          </a:xfrm>
+          <a:prstGeom prst="rect">
+            <a:avLst/>
+          </a:prstGeom>
+          <a:noFill/>
+        </p:spPr>
+        <p:txBody>
+          <a:bodyPr wrap="none" rtlCol="0">
+            <a:spAutoFit/>
+          </a:bodyPr>
+          <a:lstStyle/>
+          <a:p>
+            <a:endParaRPr lang="pt-BR" dirty="0"/>
+          </a:p>
+        </p:txBody>
+      </p:sp>
+      <p:sp>
+        <p:nvSpPr>
+          <p:cNvPr id="9" name="CaixaDeTexto 8">
+            <a:extLst>
+              <a:ext uri="{FF2B5EF4-FFF2-40B4-BE49-F238E27FC236}">
+                <a16:creationId xmlns:a16="http://schemas.microsoft.com/office/drawing/2014/main" id="{FD2487EA-CB89-473F-8CF0-BB79D734AAFE}"/>
+              </a:ext>
+            </a:extLst>
+          </p:cNvPr>
+          <p:cNvSpPr txBox="1"/>
+          <p:nvPr/>
+        </p:nvSpPr>
+        <p:spPr>
+          <a:xfrm>
+            <a:off x="0" y="552463"/>
+            <a:ext cx="12301268" cy="2985433"/>
+          </a:xfrm>
+          <a:prstGeom prst="rect">
+            <a:avLst/>
+          </a:prstGeom>
+          <a:noFill/>
+        </p:spPr>
+        <p:txBody>
+          <a:bodyPr wrap="square">
+            <a:spAutoFit/>
+          </a:bodyPr>
+          <a:lstStyle/>
+          <a:p>
+            <a:r>
+              <a:rPr lang="pt-BR" sz="2400" b="1" dirty="0">
+                <a:latin typeface="Times New Roman" panose="02020603050405020304" pitchFamily="18" charset="0"/>
+                <a:cs typeface="Times New Roman" panose="02020603050405020304" pitchFamily="18" charset="0"/>
+              </a:rPr>
+              <a:t>4. Por Que o JSON É o Padrão do Mercado?</a:t>
+            </a:r>
+            <a:br>
+              <a:rPr lang="pt-BR" sz="2400" b="1" dirty="0">
+                <a:latin typeface="Times New Roman" panose="02020603050405020304" pitchFamily="18" charset="0"/>
+                <a:cs typeface="Times New Roman" panose="02020603050405020304" pitchFamily="18" charset="0"/>
+              </a:rPr>
+            </a:br>
+            <a:endParaRPr lang="pt-BR" sz="2400" b="1" dirty="0">
+              <a:latin typeface="Times New Roman" panose="02020603050405020304" pitchFamily="18" charset="0"/>
+              <a:cs typeface="Times New Roman" panose="02020603050405020304" pitchFamily="18" charset="0"/>
+            </a:endParaRPr>
+          </a:p>
+          <a:p>
+            <a:r>
+              <a:rPr lang="pt-BR" sz="2000" dirty="0">
+                <a:latin typeface="Times New Roman" panose="02020603050405020304" pitchFamily="18" charset="0"/>
+                <a:cs typeface="Times New Roman" panose="02020603050405020304" pitchFamily="18" charset="0"/>
+              </a:rPr>
+              <a:t>Independência de Linguagem: Pode ser gerado por um servidor em Python, Java ou C# e lido diretamente por </a:t>
+            </a:r>
+            <a:r>
+              <a:rPr lang="pt-BR" sz="2000" dirty="0" err="1">
+                <a:latin typeface="Times New Roman" panose="02020603050405020304" pitchFamily="18" charset="0"/>
+                <a:cs typeface="Times New Roman" panose="02020603050405020304" pitchFamily="18" charset="0"/>
+              </a:rPr>
+              <a:t>JavaScript</a:t>
+            </a:r>
+            <a:r>
+              <a:rPr lang="pt-BR" sz="2000" dirty="0">
+                <a:latin typeface="Times New Roman" panose="02020603050405020304" pitchFamily="18" charset="0"/>
+                <a:cs typeface="Times New Roman" panose="02020603050405020304" pitchFamily="18" charset="0"/>
+              </a:rPr>
+              <a:t> no navegador.</a:t>
+            </a:r>
+          </a:p>
+          <a:p>
+            <a:endParaRPr lang="pt-BR" sz="2000" dirty="0">
+              <a:latin typeface="Times New Roman" panose="02020603050405020304" pitchFamily="18" charset="0"/>
+              <a:cs typeface="Times New Roman" panose="02020603050405020304" pitchFamily="18" charset="0"/>
+            </a:endParaRPr>
+          </a:p>
+          <a:p>
+            <a:r>
+              <a:rPr lang="pt-BR" sz="2000" dirty="0">
+                <a:latin typeface="Times New Roman" panose="02020603050405020304" pitchFamily="18" charset="0"/>
+                <a:cs typeface="Times New Roman" panose="02020603050405020304" pitchFamily="18" charset="0"/>
+              </a:rPr>
+              <a:t>Leitura Simples: É fácil de ler tanto por humanos quanto por máquinas.</a:t>
+            </a:r>
+          </a:p>
+          <a:p>
+            <a:endParaRPr lang="pt-BR" sz="2000" dirty="0">
+              <a:latin typeface="Times New Roman" panose="02020603050405020304" pitchFamily="18" charset="0"/>
+              <a:cs typeface="Times New Roman" panose="02020603050405020304" pitchFamily="18" charset="0"/>
+            </a:endParaRPr>
+          </a:p>
+          <a:p>
+            <a:r>
+              <a:rPr lang="pt-BR" sz="2000" dirty="0">
+                <a:latin typeface="Times New Roman" panose="02020603050405020304" pitchFamily="18" charset="0"/>
+                <a:cs typeface="Times New Roman" panose="02020603050405020304" pitchFamily="18" charset="0"/>
+              </a:rPr>
+              <a:t>Integração Nativa com </a:t>
+            </a:r>
+            <a:r>
+              <a:rPr lang="pt-BR" sz="2000" dirty="0" err="1">
+                <a:latin typeface="Times New Roman" panose="02020603050405020304" pitchFamily="18" charset="0"/>
+                <a:cs typeface="Times New Roman" panose="02020603050405020304" pitchFamily="18" charset="0"/>
+              </a:rPr>
+              <a:t>JavaScript</a:t>
+            </a:r>
+            <a:r>
+              <a:rPr lang="pt-BR" sz="2000" dirty="0">
+                <a:latin typeface="Times New Roman" panose="02020603050405020304" pitchFamily="18" charset="0"/>
+                <a:cs typeface="Times New Roman" panose="02020603050405020304" pitchFamily="18" charset="0"/>
+              </a:rPr>
+              <a:t>: O navegador converte um texto JSON em um objeto nativo do JS de forma instantânea usando o método </a:t>
+            </a:r>
+            <a:r>
+              <a:rPr lang="pt-BR" sz="2000" dirty="0" err="1">
+                <a:latin typeface="Times New Roman" panose="02020603050405020304" pitchFamily="18" charset="0"/>
+                <a:cs typeface="Times New Roman" panose="02020603050405020304" pitchFamily="18" charset="0"/>
+              </a:rPr>
+              <a:t>JSON.parse</a:t>
+            </a:r>
+            <a:r>
+              <a:rPr lang="pt-BR" sz="2000" dirty="0">
+                <a:latin typeface="Times New Roman" panose="02020603050405020304" pitchFamily="18" charset="0"/>
+                <a:cs typeface="Times New Roman" panose="02020603050405020304" pitchFamily="18" charset="0"/>
+              </a:rPr>
+              <a:t>().</a:t>
+            </a:r>
+            <a:endParaRPr lang="pt-BR" sz="1600" dirty="0">
+              <a:latin typeface="Times New Roman" panose="02020603050405020304" pitchFamily="18" charset="0"/>
+              <a:cs typeface="Times New Roman" panose="02020603050405020304" pitchFamily="18" charset="0"/>
+            </a:endParaRPr>
+          </a:p>
+        </p:txBody>
+      </p:sp>
+    </p:spTree>
+    <p:extLst>
+      <p:ext uri="{BB962C8B-B14F-4D97-AF65-F5344CB8AC3E}">
+        <p14:creationId xmlns:p14="http://schemas.microsoft.com/office/powerpoint/2010/main" val="1975743805"/>
+      </p:ext>
+    </p:extLst>
+  </p:cSld>
+  <p:clrMapOvr>
+    <a:masterClrMapping/>
+  </p:clrMapOvr>
+</p:sld>
+</file>
+
+<file path=ppt/slides/slide9.xml><?xml version="1.0" encoding="utf-8"?>
+<p:sld xmlns:a="http://schemas.openxmlformats.org/drawingml/2006/main" xmlns:r="http://schemas.openxmlformats.org/officeDocument/2006/relationships" xmlns:p="http://schemas.openxmlformats.org/presentationml/2006/main">
+  <p:cSld>
+    <p:spTree>
+      <p:nvGrpSpPr>
+        <p:cNvPr id="1" name=""/>
+        <p:cNvGrpSpPr/>
+        <p:nvPr/>
+      </p:nvGrpSpPr>
+      <p:grpSpPr>
+        <a:xfrm>
+          <a:off x="0" y="0"/>
+          <a:ext cx="0" cy="0"/>
+          <a:chOff x="0" y="0"/>
+          <a:chExt cx="0" cy="0"/>
+        </a:xfrm>
+      </p:grpSpPr>
+      <p:sp>
+        <p:nvSpPr>
+          <p:cNvPr id="7" name="CaixaDeTexto 6">
+            <a:extLst>
+              <a:ext uri="{FF2B5EF4-FFF2-40B4-BE49-F238E27FC236}">
+                <a16:creationId xmlns:a16="http://schemas.microsoft.com/office/drawing/2014/main" id="{88FD6603-769F-4699-8E38-B5C49C39EC14}"/>
+              </a:ext>
+            </a:extLst>
+          </p:cNvPr>
+          <p:cNvSpPr txBox="1"/>
+          <p:nvPr/>
+        </p:nvSpPr>
+        <p:spPr>
+          <a:xfrm>
+            <a:off x="5374257" y="1483743"/>
+            <a:ext cx="184731" cy="369332"/>
+          </a:xfrm>
+          <a:prstGeom prst="rect">
+            <a:avLst/>
+          </a:prstGeom>
+          <a:noFill/>
+        </p:spPr>
+        <p:txBody>
+          <a:bodyPr wrap="none" rtlCol="0">
+            <a:spAutoFit/>
+          </a:bodyPr>
+          <a:lstStyle/>
+          <a:p>
+            <a:endParaRPr lang="pt-BR" dirty="0"/>
+          </a:p>
+        </p:txBody>
+      </p:sp>
+      <p:sp>
+        <p:nvSpPr>
+          <p:cNvPr id="9" name="CaixaDeTexto 8">
+            <a:extLst>
+              <a:ext uri="{FF2B5EF4-FFF2-40B4-BE49-F238E27FC236}">
+                <a16:creationId xmlns:a16="http://schemas.microsoft.com/office/drawing/2014/main" id="{FD2487EA-CB89-473F-8CF0-BB79D734AAFE}"/>
+              </a:ext>
+            </a:extLst>
+          </p:cNvPr>
+          <p:cNvSpPr txBox="1"/>
+          <p:nvPr/>
+        </p:nvSpPr>
+        <p:spPr>
+          <a:xfrm>
+            <a:off x="0" y="552463"/>
+            <a:ext cx="12301268" cy="5139869"/>
+          </a:xfrm>
+          <a:prstGeom prst="rect">
+            <a:avLst/>
+          </a:prstGeom>
+          <a:noFill/>
+        </p:spPr>
+        <p:txBody>
+          <a:bodyPr wrap="square">
+            <a:spAutoFit/>
+          </a:bodyPr>
+          <a:lstStyle/>
+          <a:p>
+            <a:r>
+              <a:rPr lang="pt-BR" sz="2400" b="1" dirty="0">
+                <a:latin typeface="Times New Roman" panose="02020603050405020304" pitchFamily="18" charset="0"/>
+                <a:cs typeface="Times New Roman" panose="02020603050405020304" pitchFamily="18" charset="0"/>
+              </a:rPr>
+              <a:t>5. Sintaxe Prática: Consumindo JSON de uma API no JS</a:t>
+            </a:r>
+            <a:br>
+              <a:rPr lang="pt-BR" sz="2400" b="1" dirty="0">
+                <a:latin typeface="Times New Roman" panose="02020603050405020304" pitchFamily="18" charset="0"/>
+                <a:cs typeface="Times New Roman" panose="02020603050405020304" pitchFamily="18" charset="0"/>
+              </a:rPr>
+            </a:br>
+            <a:endParaRPr lang="pt-BR" sz="2400" b="1" dirty="0">
+              <a:latin typeface="Times New Roman" panose="02020603050405020304" pitchFamily="18" charset="0"/>
+              <a:cs typeface="Times New Roman" panose="02020603050405020304" pitchFamily="18" charset="0"/>
+            </a:endParaRPr>
+          </a:p>
+          <a:p>
+            <a:r>
+              <a:rPr lang="pt-BR" sz="2000" dirty="0">
+                <a:latin typeface="Times New Roman" panose="02020603050405020304" pitchFamily="18" charset="0"/>
+                <a:cs typeface="Times New Roman" panose="02020603050405020304" pitchFamily="18" charset="0"/>
+              </a:rPr>
+              <a:t>No fluxo real do Checkpoint 2, o método </a:t>
+            </a:r>
+            <a:r>
+              <a:rPr lang="pt-BR" sz="2000" dirty="0" err="1">
+                <a:latin typeface="Times New Roman" panose="02020603050405020304" pitchFamily="18" charset="0"/>
+                <a:cs typeface="Times New Roman" panose="02020603050405020304" pitchFamily="18" charset="0"/>
+              </a:rPr>
+              <a:t>fetch</a:t>
+            </a:r>
+            <a:r>
+              <a:rPr lang="pt-BR" sz="2000" dirty="0">
+                <a:latin typeface="Times New Roman" panose="02020603050405020304" pitchFamily="18" charset="0"/>
+                <a:cs typeface="Times New Roman" panose="02020603050405020304" pitchFamily="18" charset="0"/>
+              </a:rPr>
+              <a:t>() busca a resposta da API e o método .</a:t>
+            </a:r>
+            <a:r>
+              <a:rPr lang="pt-BR" sz="2000" dirty="0" err="1">
+                <a:latin typeface="Times New Roman" panose="02020603050405020304" pitchFamily="18" charset="0"/>
+                <a:cs typeface="Times New Roman" panose="02020603050405020304" pitchFamily="18" charset="0"/>
+              </a:rPr>
+              <a:t>json</a:t>
+            </a:r>
+            <a:r>
+              <a:rPr lang="pt-BR" sz="2000" dirty="0">
+                <a:latin typeface="Times New Roman" panose="02020603050405020304" pitchFamily="18" charset="0"/>
+                <a:cs typeface="Times New Roman" panose="02020603050405020304" pitchFamily="18" charset="0"/>
+              </a:rPr>
+              <a:t>() converte essa resposta bruta em um objeto utilizável pelo código:</a:t>
+            </a:r>
+          </a:p>
+          <a:p>
+            <a:endParaRPr lang="pt-BR" sz="2000" dirty="0">
+              <a:latin typeface="Times New Roman" panose="02020603050405020304" pitchFamily="18" charset="0"/>
+              <a:cs typeface="Times New Roman" panose="02020603050405020304" pitchFamily="18" charset="0"/>
+            </a:endParaRPr>
+          </a:p>
+          <a:p>
+            <a:r>
+              <a:rPr lang="pt-BR" sz="2000" dirty="0" err="1">
+                <a:latin typeface="Times New Roman" panose="02020603050405020304" pitchFamily="18" charset="0"/>
+                <a:cs typeface="Times New Roman" panose="02020603050405020304" pitchFamily="18" charset="0"/>
+              </a:rPr>
+              <a:t>JavaScript</a:t>
+            </a:r>
+            <a:endParaRPr lang="pt-BR" sz="2000" dirty="0">
+              <a:latin typeface="Times New Roman" panose="02020603050405020304" pitchFamily="18" charset="0"/>
+              <a:cs typeface="Times New Roman" panose="02020603050405020304" pitchFamily="18" charset="0"/>
+            </a:endParaRPr>
+          </a:p>
+          <a:p>
+            <a:r>
+              <a:rPr lang="pt-BR" sz="2000" dirty="0">
+                <a:latin typeface="Times New Roman" panose="02020603050405020304" pitchFamily="18" charset="0"/>
+                <a:cs typeface="Times New Roman" panose="02020603050405020304" pitchFamily="18" charset="0"/>
+              </a:rPr>
+              <a:t>// Buscando dados de uma API externa</a:t>
+            </a:r>
+          </a:p>
+          <a:p>
+            <a:r>
+              <a:rPr lang="pt-BR" sz="2000" dirty="0" err="1">
+                <a:latin typeface="Times New Roman" panose="02020603050405020304" pitchFamily="18" charset="0"/>
+                <a:cs typeface="Times New Roman" panose="02020603050405020304" pitchFamily="18" charset="0"/>
+              </a:rPr>
+              <a:t>fetch</a:t>
+            </a:r>
+            <a:r>
+              <a:rPr lang="pt-BR" sz="2000" dirty="0">
+                <a:latin typeface="Times New Roman" panose="02020603050405020304" pitchFamily="18" charset="0"/>
+                <a:cs typeface="Times New Roman" panose="02020603050405020304" pitchFamily="18" charset="0"/>
+              </a:rPr>
+              <a:t>("https://viacep.com.br/ws/01001000/</a:t>
+            </a:r>
+            <a:r>
+              <a:rPr lang="pt-BR" sz="2000" dirty="0" err="1">
+                <a:latin typeface="Times New Roman" panose="02020603050405020304" pitchFamily="18" charset="0"/>
+                <a:cs typeface="Times New Roman" panose="02020603050405020304" pitchFamily="18" charset="0"/>
+              </a:rPr>
+              <a:t>json</a:t>
+            </a:r>
+            <a:r>
+              <a:rPr lang="pt-BR" sz="2000" dirty="0">
+                <a:latin typeface="Times New Roman" panose="02020603050405020304" pitchFamily="18" charset="0"/>
+                <a:cs typeface="Times New Roman" panose="02020603050405020304" pitchFamily="18" charset="0"/>
+              </a:rPr>
+              <a:t>/")</a:t>
+            </a:r>
+          </a:p>
+          <a:p>
+            <a:r>
+              <a:rPr lang="pt-BR" sz="2000" dirty="0">
+                <a:latin typeface="Times New Roman" panose="02020603050405020304" pitchFamily="18" charset="0"/>
+                <a:cs typeface="Times New Roman" panose="02020603050405020304" pitchFamily="18" charset="0"/>
+              </a:rPr>
+              <a:t>  .</a:t>
+            </a:r>
+            <a:r>
+              <a:rPr lang="pt-BR" sz="2000" dirty="0" err="1">
+                <a:latin typeface="Times New Roman" panose="02020603050405020304" pitchFamily="18" charset="0"/>
+                <a:cs typeface="Times New Roman" panose="02020603050405020304" pitchFamily="18" charset="0"/>
+              </a:rPr>
+              <a:t>then</a:t>
+            </a:r>
+            <a:r>
+              <a:rPr lang="pt-BR" sz="2000" dirty="0">
+                <a:latin typeface="Times New Roman" panose="02020603050405020304" pitchFamily="18" charset="0"/>
+                <a:cs typeface="Times New Roman" panose="02020603050405020304" pitchFamily="18" charset="0"/>
+              </a:rPr>
+              <a:t>(resposta =&gt; </a:t>
+            </a:r>
+            <a:r>
+              <a:rPr lang="pt-BR" sz="2000" dirty="0" err="1">
+                <a:latin typeface="Times New Roman" panose="02020603050405020304" pitchFamily="18" charset="0"/>
+                <a:cs typeface="Times New Roman" panose="02020603050405020304" pitchFamily="18" charset="0"/>
+              </a:rPr>
+              <a:t>resposta.json</a:t>
+            </a:r>
+            <a:r>
+              <a:rPr lang="pt-BR" sz="2000" dirty="0">
+                <a:latin typeface="Times New Roman" panose="02020603050405020304" pitchFamily="18" charset="0"/>
+                <a:cs typeface="Times New Roman" panose="02020603050405020304" pitchFamily="18" charset="0"/>
+              </a:rPr>
+              <a:t>()) // Converte a resposta HTTP em objeto JSON</a:t>
+            </a:r>
+          </a:p>
+          <a:p>
+            <a:r>
+              <a:rPr lang="pt-BR" sz="2000" dirty="0">
+                <a:latin typeface="Times New Roman" panose="02020603050405020304" pitchFamily="18" charset="0"/>
+                <a:cs typeface="Times New Roman" panose="02020603050405020304" pitchFamily="18" charset="0"/>
+              </a:rPr>
+              <a:t>  .</a:t>
+            </a:r>
+            <a:r>
+              <a:rPr lang="pt-BR" sz="2000" dirty="0" err="1">
+                <a:latin typeface="Times New Roman" panose="02020603050405020304" pitchFamily="18" charset="0"/>
+                <a:cs typeface="Times New Roman" panose="02020603050405020304" pitchFamily="18" charset="0"/>
+              </a:rPr>
+              <a:t>then</a:t>
+            </a:r>
+            <a:r>
+              <a:rPr lang="pt-BR" sz="2000" dirty="0">
+                <a:latin typeface="Times New Roman" panose="02020603050405020304" pitchFamily="18" charset="0"/>
+                <a:cs typeface="Times New Roman" panose="02020603050405020304" pitchFamily="18" charset="0"/>
+              </a:rPr>
+              <a:t>(dados =&gt; {</a:t>
+            </a:r>
+          </a:p>
+          <a:p>
+            <a:r>
+              <a:rPr lang="pt-BR" sz="2000" dirty="0">
+                <a:latin typeface="Times New Roman" panose="02020603050405020304" pitchFamily="18" charset="0"/>
+                <a:cs typeface="Times New Roman" panose="02020603050405020304" pitchFamily="18" charset="0"/>
+              </a:rPr>
+              <a:t>    // Acessando as chaves do JSON retornado</a:t>
+            </a:r>
+          </a:p>
+          <a:p>
+            <a:r>
+              <a:rPr lang="pt-BR" sz="2000" dirty="0">
+                <a:latin typeface="Times New Roman" panose="02020603050405020304" pitchFamily="18" charset="0"/>
+                <a:cs typeface="Times New Roman" panose="02020603050405020304" pitchFamily="18" charset="0"/>
+              </a:rPr>
+              <a:t>    console.log("Logradouro:", </a:t>
+            </a:r>
+            <a:r>
+              <a:rPr lang="pt-BR" sz="2000" dirty="0" err="1">
+                <a:latin typeface="Times New Roman" panose="02020603050405020304" pitchFamily="18" charset="0"/>
+                <a:cs typeface="Times New Roman" panose="02020603050405020304" pitchFamily="18" charset="0"/>
+              </a:rPr>
+              <a:t>dados.logradouro</a:t>
+            </a:r>
+            <a:r>
+              <a:rPr lang="pt-BR" sz="2000" dirty="0">
+                <a:latin typeface="Times New Roman" panose="02020603050405020304" pitchFamily="18" charset="0"/>
+                <a:cs typeface="Times New Roman" panose="02020603050405020304" pitchFamily="18" charset="0"/>
+              </a:rPr>
+              <a:t>);</a:t>
+            </a:r>
+          </a:p>
+          <a:p>
+            <a:r>
+              <a:rPr lang="pt-BR" sz="2000" dirty="0">
+                <a:latin typeface="Times New Roman" panose="02020603050405020304" pitchFamily="18" charset="0"/>
+                <a:cs typeface="Times New Roman" panose="02020603050405020304" pitchFamily="18" charset="0"/>
+              </a:rPr>
+              <a:t>    console.log("Bairro:", </a:t>
+            </a:r>
+            <a:r>
+              <a:rPr lang="pt-BR" sz="2000" dirty="0" err="1">
+                <a:latin typeface="Times New Roman" panose="02020603050405020304" pitchFamily="18" charset="0"/>
+                <a:cs typeface="Times New Roman" panose="02020603050405020304" pitchFamily="18" charset="0"/>
+              </a:rPr>
+              <a:t>dados.bairro</a:t>
+            </a:r>
+            <a:r>
+              <a:rPr lang="pt-BR" sz="2000" dirty="0">
+                <a:latin typeface="Times New Roman" panose="02020603050405020304" pitchFamily="18" charset="0"/>
+                <a:cs typeface="Times New Roman" panose="02020603050405020304" pitchFamily="18" charset="0"/>
+              </a:rPr>
+              <a:t>);</a:t>
+            </a:r>
+          </a:p>
+          <a:p>
+            <a:r>
+              <a:rPr lang="pt-BR" sz="2000" dirty="0">
+                <a:latin typeface="Times New Roman" panose="02020603050405020304" pitchFamily="18" charset="0"/>
+                <a:cs typeface="Times New Roman" panose="02020603050405020304" pitchFamily="18" charset="0"/>
+              </a:rPr>
+              <a:t>  });</a:t>
+            </a:r>
+            <a:br>
+              <a:rPr lang="pt-BR" sz="2000" dirty="0">
+                <a:latin typeface="Times New Roman" panose="02020603050405020304" pitchFamily="18" charset="0"/>
+                <a:cs typeface="Times New Roman" panose="02020603050405020304" pitchFamily="18" charset="0"/>
+              </a:rPr>
+            </a:br>
+            <a:endParaRPr lang="pt-BR" sz="2000" dirty="0">
+              <a:latin typeface="Times New Roman" panose="02020603050405020304" pitchFamily="18" charset="0"/>
+              <a:cs typeface="Times New Roman" panose="02020603050405020304" pitchFamily="18" charset="0"/>
+            </a:endParaRPr>
+          </a:p>
+          <a:p>
+            <a:r>
+              <a:rPr lang="pt-BR" sz="2000" dirty="0">
+                <a:latin typeface="Times New Roman" panose="02020603050405020304" pitchFamily="18" charset="0"/>
+                <a:cs typeface="Times New Roman" panose="02020603050405020304" pitchFamily="18" charset="0"/>
+              </a:rPr>
+              <a:t>Em resumo: A API traz o transporte e a regra de negócio; o JSON é o idioma padrão em que a mensagem é entregue.</a:t>
+            </a:r>
+            <a:endParaRPr lang="pt-BR" sz="1400" dirty="0">
+              <a:latin typeface="Times New Roman" panose="02020603050405020304" pitchFamily="18" charset="0"/>
+              <a:cs typeface="Times New Roman" panose="02020603050405020304" pitchFamily="18" charset="0"/>
+            </a:endParaRPr>
+          </a:p>
+        </p:txBody>
+      </p:sp>
+    </p:spTree>
+    <p:extLst>
+      <p:ext uri="{BB962C8B-B14F-4D97-AF65-F5344CB8AC3E}">
+        <p14:creationId xmlns:p14="http://schemas.microsoft.com/office/powerpoint/2010/main" val="112422609"/>
       </p:ext>
     </p:extLst>
   </p:cSld>

--- a/10092026/Apresentação principal.pptx
+++ b/10092026/Apresentação principal.pptx
@@ -2913,7 +2913,7 @@
                 <a:effectLst/>
                 <a:latin typeface="+mj-lt"/>
               </a:rPr>
-              <a:t>“O entendimento do passado nos oferece um parâmetro para projetarmos o futuro, mas é o presente que revela a real situação do nosso progresso. Por isso, tenha total acuidade ao seu hoje.”</a:t>
+              <a:t>“O entendimento do passado nos oferece um parâmetro para projetarmos o futuro, mas é o presente que revela a real situação do nosso progresso. Por isso, tenha acuidade ao seu hoje.”</a:t>
             </a:r>
             <a:r>
               <a:rPr lang="pt-BR" sz="2400" i="1" dirty="0">
@@ -3048,7 +3048,7 @@
                 <a:latin typeface="Times New Roman" panose="02020603050405020304" pitchFamily="18" charset="0"/>
                 <a:cs typeface="Times New Roman" panose="02020603050405020304" pitchFamily="18" charset="0"/>
               </a:rPr>
-              <a:t>Todas as APIs REST modernas que consumiremos na aula de hoje (</a:t>
+              <a:t>Todas as APIs REST (</a:t>
             </a:r>
             <a:r>
               <a:rPr lang="pt-BR" sz="2400" dirty="0" err="1">
@@ -4246,13 +4246,13 @@
           <p:nvPr>
             <p:extLst>
               <p:ext uri="{D42A27DB-BD31-4B8C-83A1-F6EECF244321}">
-                <p14:modId xmlns:p14="http://schemas.microsoft.com/office/powerpoint/2010/main" val="2253491092"/>
+                <p14:modId xmlns:p14="http://schemas.microsoft.com/office/powerpoint/2010/main" val="574691083"/>
               </p:ext>
             </p:extLst>
           </p:nvPr>
         </p:nvGraphicFramePr>
         <p:xfrm>
-          <a:off x="116457" y="2876026"/>
+          <a:off x="107831" y="2901904"/>
           <a:ext cx="10515600" cy="3251200"/>
         </p:xfrm>
         <a:graphic>
@@ -5188,8 +5188,8 @@
         </p:nvSpPr>
         <p:spPr bwMode="auto">
           <a:xfrm>
-            <a:off x="10740" y="550372"/>
-            <a:ext cx="12181259" cy="2477601"/>
+            <a:off x="10740" y="549682"/>
+            <a:ext cx="12181259" cy="2323713"/>
           </a:xfrm>
           <a:prstGeom prst="rect">
             <a:avLst/>
@@ -5254,7 +5254,7 @@
               <a:tabLst/>
             </a:pPr>
             <a:r>
-              <a:rPr kumimoji="0" lang="pt-BR" altLang="pt-BR" sz="2000" b="1" i="0" u="none" strike="noStrike" cap="none" normalizeH="0" baseline="0" dirty="0">
+              <a:rPr kumimoji="0" lang="pt-BR" altLang="pt-BR" sz="2400" b="1" i="0" u="none" strike="noStrike" cap="none" normalizeH="0" baseline="0" dirty="0">
                 <a:ln>
                   <a:noFill/>
                 </a:ln>
@@ -5268,7 +5268,7 @@
               <a:t>Resumo dos outros protocolos listados na imagem para referência de aula:</a:t>
             </a:r>
             <a:br>
-              <a:rPr kumimoji="0" lang="pt-BR" altLang="pt-BR" sz="2000" b="1" i="0" u="none" strike="noStrike" cap="none" normalizeH="0" baseline="0" dirty="0">
+              <a:rPr kumimoji="0" lang="pt-BR" altLang="pt-BR" sz="2400" b="1" i="0" u="none" strike="noStrike" cap="none" normalizeH="0" baseline="0" dirty="0">
                 <a:ln>
                   <a:noFill/>
                 </a:ln>
@@ -5280,7 +5280,7 @@
                 <a:cs typeface="Times New Roman" panose="02020603050405020304" pitchFamily="18" charset="0"/>
               </a:rPr>
             </a:br>
-            <a:endParaRPr kumimoji="0" lang="pt-BR" altLang="pt-BR" sz="2000" b="0" i="0" u="none" strike="noStrike" cap="none" normalizeH="0" baseline="0" dirty="0">
+            <a:endParaRPr kumimoji="0" lang="pt-BR" altLang="pt-BR" sz="2400" b="0" i="0" u="none" strike="noStrike" cap="none" normalizeH="0" baseline="0" dirty="0">
               <a:ln>
                 <a:noFill/>
               </a:ln>
@@ -5541,34 +5541,6 @@
               </a:rPr>
               <a:t> Utiliza conexões persistentes bidirecionais e protocolos de transporte em tempo real, sem se limitar ao modelo tradicional de requisição/resposta do HTTP.</a:t>
             </a:r>
-          </a:p>
-          <a:p>
-            <a:pPr marL="0" marR="0" lvl="0" indent="0" algn="l" defTabSz="914400" rtl="0" eaLnBrk="0" fontAlgn="base" latinLnBrk="0" hangingPunct="0">
-              <a:lnSpc>
-                <a:spcPct val="100000"/>
-              </a:lnSpc>
-              <a:spcBef>
-                <a:spcPct val="0"/>
-              </a:spcBef>
-              <a:spcAft>
-                <a:spcPct val="0"/>
-              </a:spcAft>
-              <a:buClrTx/>
-              <a:buSzTx/>
-              <a:buFontTx/>
-              <a:buNone/>
-              <a:tabLst/>
-            </a:pPr>
-            <a:endParaRPr kumimoji="0" lang="pt-BR" altLang="pt-BR" sz="1800" b="0" i="0" u="none" strike="noStrike" cap="none" normalizeH="0" baseline="0" dirty="0">
-              <a:ln>
-                <a:noFill/>
-              </a:ln>
-              <a:solidFill>
-                <a:schemeClr val="tx1"/>
-              </a:solidFill>
-              <a:effectLst/>
-              <a:latin typeface="Arial" panose="020B0604020202020204" pitchFamily="34" charset="0"/>
-            </a:endParaRPr>
           </a:p>
         </p:txBody>
       </p:sp>
@@ -6814,7 +6786,7 @@
                 <a:latin typeface="Times New Roman" panose="02020603050405020304" pitchFamily="18" charset="0"/>
                 <a:cs typeface="Times New Roman" panose="02020603050405020304" pitchFamily="18" charset="0"/>
               </a:rPr>
-              <a:t>No fluxo real do Checkpoint 2, o método </a:t>
+              <a:t>O método </a:t>
             </a:r>
             <a:r>
               <a:rPr lang="pt-BR" sz="2000" dirty="0" err="1">
